--- a/QueueLess_Presentation.pptx
+++ b/QueueLess_Presentation.pptx
@@ -5,14 +5,15 @@
     <p:sldMasterId id="2147483648" r:id="rId1"/>
   </p:sldMasterIdLst>
   <p:notesMasterIdLst>
-    <p:notesMasterId r:id="rId7"/>
+    <p:notesMasterId r:id="rId8"/>
   </p:notesMasterIdLst>
   <p:sldIdLst>
     <p:sldId id="256" r:id="rId2"/>
     <p:sldId id="257" r:id="rId3"/>
     <p:sldId id="258" r:id="rId4"/>
     <p:sldId id="259" r:id="rId5"/>
-    <p:sldId id="260" r:id="rId6"/>
+    <p:sldId id="261" r:id="rId6"/>
+    <p:sldId id="260" r:id="rId7"/>
   </p:sldIdLst>
   <p:sldSz cx="12192000" cy="6858000"/>
   <p:notesSz cx="6858000" cy="12192000"/>
@@ -109,6 +110,20 @@
     </a:lvl9pPr>
   </p:defaultTextStyle>
   <p:extLst>
+    <p:ext uri="{521415D9-36F7-43E2-AB2F-B90AF26B5E84}">
+      <p14:sectionLst xmlns:p14="http://schemas.microsoft.com/office/powerpoint/2010/main">
+        <p14:section name="Default Section" id="{2F9D6747-739E-40B9-85D1-44FD8110C92F}">
+          <p14:sldIdLst>
+            <p14:sldId id="256"/>
+            <p14:sldId id="257"/>
+            <p14:sldId id="258"/>
+            <p14:sldId id="259"/>
+            <p14:sldId id="261"/>
+            <p14:sldId id="260"/>
+          </p14:sldIdLst>
+        </p14:section>
+      </p14:sectionLst>
+    </p:ext>
     <p:ext uri="{EFAFB233-063F-42B5-8137-9DF3F51BA10A}">
       <p15:sldGuideLst xmlns:p15="http://schemas.microsoft.com/office/powerpoint/2012/main"/>
     </p:ext>
@@ -141,7 +156,7 @@
     </p:spTree>
     <p:extLst>
       <p:ext uri="{BB962C8B-B14F-4D97-AF65-F5344CB8AC3E}">
-        <p14:creationId xmlns:p14="http://schemas.microsoft.com/office/powerpoint/2010/main" val="2778836670"/>
+        <p14:creationId xmlns:p14="http://schemas.microsoft.com/office/powerpoint/2010/main" val="2597487259"/>
       </p:ext>
     </p:extLst>
   </p:cSld>
@@ -548,7 +563,7 @@
           <a:p>
             <a:r>
               <a:rPr lang="en-US" dirty="0"/>
-              <a:t>מסבירים שהתהליך היה מתועד ומבוקר: PRD לפני קוד, שלבים קטנים, ובדיקה אחרי כל שלב. כל החלטה נבחרה במודע.</a:t>
+              <a:t>מדגישים שלא כתבנו קוד לפני תכנון: PRD, WORK_LOGIC ו-TESTING נכתבו לפני ובמהלך הפיתוח, וכל החלטה מתועדת עם נימוק. הקבצים יושבים בתיקיית VIBE_CODING בריפו וניתן להראות אותם.</a:t>
             </a:r>
           </a:p>
         </p:txBody>
@@ -635,7 +650,7 @@
           <a:p>
             <a:r>
               <a:rPr lang="en-US" dirty="0"/>
-              <a:t>פותחים DevTools ומראים את המפתחות בפועל. מסבירים למה localStorage מספיק לדמו ומה היה משתנה בפרודקשן.</a:t>
+              <a:t>עוברים מסלול לקוח ואז מסלול בעל עסק. מדגישים שה-Scope צומצם במודע כדי להציג מוצר יציב.</a:t>
             </a:r>
           </a:p>
         </p:txBody>
@@ -658,6 +673,93 @@
             <a:fld id="{F7021451-1387-4CA6-816F-3879F97B5CBC}" type="slidenum">
               <a:rPr lang="en-US"/>
               <a:t>5</a:t>
+            </a:fld>
+            <a:endParaRPr lang="en-US"/>
+          </a:p>
+        </p:txBody>
+      </p:sp>
+    </p:spTree>
+    <p:extLst>
+      <p:ext uri="{BB962C8B-B14F-4D97-AF65-F5344CB8AC3E}">
+        <p14:creationId xmlns:p14="http://schemas.microsoft.com/office/powerpoint/2010/main" val="2306573308"/>
+      </p:ext>
+    </p:extLst>
+  </p:cSld>
+  <p:clrMapOvr>
+    <a:masterClrMapping/>
+  </p:clrMapOvr>
+</p:notes>
+</file>
+
+<file path=ppt/notesSlides/notesSlide6.xml><?xml version="1.0" encoding="utf-8"?>
+<p:notes xmlns:a="http://schemas.openxmlformats.org/drawingml/2006/main" xmlns:r="http://schemas.openxmlformats.org/officeDocument/2006/relationships" xmlns:p="http://schemas.openxmlformats.org/presentationml/2006/main">
+  <p:cSld>
+    <p:spTree>
+      <p:nvGrpSpPr>
+        <p:cNvPr id="1" name=""/>
+        <p:cNvGrpSpPr/>
+        <p:nvPr/>
+      </p:nvGrpSpPr>
+      <p:grpSpPr>
+        <a:xfrm>
+          <a:off x="0" y="0"/>
+          <a:ext cx="0" cy="0"/>
+          <a:chOff x="0" y="0"/>
+          <a:chExt cx="0" cy="0"/>
+        </a:xfrm>
+      </p:grpSpPr>
+      <p:sp>
+        <p:nvSpPr>
+          <p:cNvPr id="2" name="Slide Image Placeholder 1"/>
+          <p:cNvSpPr>
+            <a:spLocks noGrp="1" noRot="1" noChangeAspect="1"/>
+          </p:cNvSpPr>
+          <p:nvPr>
+            <p:ph type="sldImg"/>
+          </p:nvPr>
+        </p:nvSpPr>
+        <p:spPr/>
+      </p:sp>
+      <p:sp>
+        <p:nvSpPr>
+          <p:cNvPr id="3" name="Notes Placeholder 2"/>
+          <p:cNvSpPr>
+            <a:spLocks noGrp="1"/>
+          </p:cNvSpPr>
+          <p:nvPr>
+            <p:ph type="body" idx="1"/>
+          </p:nvPr>
+        </p:nvSpPr>
+        <p:spPr/>
+        <p:txBody>
+          <a:bodyPr/>
+          <a:lstStyle/>
+          <a:p>
+            <a:r>
+              <a:rPr lang="en-US" dirty="0"/>
+              <a:t>פותחים DevTools ומראים את המפתחות בפועל. מסבירים למה localStorage מספיק לדמו ומה היה משתנה בפרודקשן.</a:t>
+            </a:r>
+          </a:p>
+        </p:txBody>
+      </p:sp>
+      <p:sp>
+        <p:nvSpPr>
+          <p:cNvPr id="4" name="Slide Number Placeholder 3"/>
+          <p:cNvSpPr>
+            <a:spLocks noGrp="1"/>
+          </p:cNvSpPr>
+          <p:nvPr>
+            <p:ph type="sldNum" sz="quarter" idx="10"/>
+          </p:nvPr>
+        </p:nvSpPr>
+        <p:spPr/>
+        <p:txBody>
+          <a:bodyPr/>
+          <a:lstStyle/>
+          <a:p>
+            <a:fld id="{F7021451-1387-4CA6-816F-3879F97B5CBC}" type="slidenum">
+              <a:rPr lang="en-US"/>
+              <a:t>6</a:t>
             </a:fld>
             <a:endParaRPr lang="en-US"/>
           </a:p>
@@ -1115,7 +1217,6 @@
                 <a:solidFill>
                   <a:srgbClr val="9BA3AE"/>
                 </a:solidFill>
-                <a:latin typeface="Arial" pitchFamily="34" charset="0"/>
                 <a:ea typeface="Arial" pitchFamily="34" charset="-122"/>
                 <a:cs typeface="Arial" pitchFamily="34" charset="-120"/>
               </a:rPr>
@@ -1198,7 +1299,6 @@
                 <a:solidFill>
                   <a:srgbClr val="F5F1EA"/>
                 </a:solidFill>
-                <a:latin typeface="Arial" pitchFamily="34" charset="0"/>
                 <a:ea typeface="Arial" pitchFamily="34" charset="-122"/>
                 <a:cs typeface="Arial" pitchFamily="34" charset="-120"/>
               </a:rPr>
@@ -1237,7 +1337,6 @@
                 <a:solidFill>
                   <a:srgbClr val="C9A96A"/>
                 </a:solidFill>
-                <a:latin typeface="Arial" pitchFamily="34" charset="0"/>
                 <a:ea typeface="Arial" pitchFamily="34" charset="-122"/>
                 <a:cs typeface="Arial" pitchFamily="34" charset="-120"/>
               </a:rPr>
@@ -1276,29 +1375,46 @@
                 <a:solidFill>
                   <a:srgbClr val="9BA3AE"/>
                 </a:solidFill>
-                <a:latin typeface="Arial" pitchFamily="34" charset="0"/>
-                <a:ea typeface="Arial" pitchFamily="34" charset="-122"/>
-                <a:cs typeface="Arial" pitchFamily="34" charset="-120"/>
-              </a:rPr>
-              <a:t>מסחר עסקים דיגיטליים יישומיים  |</a:t>
+                <a:ea typeface="Arial" pitchFamily="34" charset="-122"/>
+                <a:cs typeface="Arial" pitchFamily="34" charset="-120"/>
+              </a:rPr>
+              <a:t>מסחר עסקים דיגיטליים יישומיים</a:t>
             </a:r>
             <a:r>
               <a:rPr lang="he-IL" sz="1350" dirty="0">
                 <a:solidFill>
                   <a:srgbClr val="9BA3AE"/>
                 </a:solidFill>
-                <a:latin typeface="Arial" pitchFamily="34" charset="0"/>
-                <a:ea typeface="Arial" pitchFamily="34" charset="-122"/>
-                <a:cs typeface="Arial" pitchFamily="34" charset="-120"/>
-              </a:rPr>
-              <a:t> פרויקט </a:t>
+                <a:ea typeface="Arial" pitchFamily="34" charset="-122"/>
+                <a:cs typeface="Arial" pitchFamily="34" charset="-120"/>
+              </a:rPr>
+              <a:t> |</a:t>
             </a:r>
             <a:r>
               <a:rPr lang="en-US" sz="1350" dirty="0">
                 <a:solidFill>
                   <a:srgbClr val="9BA3AE"/>
                 </a:solidFill>
-                <a:latin typeface="Arial" pitchFamily="34" charset="0"/>
+                <a:ea typeface="Arial" pitchFamily="34" charset="-122"/>
+                <a:cs typeface="Arial" pitchFamily="34" charset="-120"/>
+              </a:rPr>
+              <a:t> </a:t>
+            </a:r>
+            <a:r>
+              <a:rPr lang="he-IL" sz="1350" dirty="0">
+                <a:solidFill>
+                  <a:srgbClr val="9BA3AE"/>
+                </a:solidFill>
+                <a:ea typeface="Arial" pitchFamily="34" charset="-122"/>
+                <a:cs typeface="Arial" pitchFamily="34" charset="-120"/>
+              </a:rPr>
+              <a:t>פרויקט </a:t>
+            </a:r>
+            <a:r>
+              <a:rPr lang="en-US" sz="1350" dirty="0">
+                <a:solidFill>
+                  <a:srgbClr val="9BA3AE"/>
+                </a:solidFill>
                 <a:ea typeface="Arial" pitchFamily="34" charset="-122"/>
                 <a:cs typeface="Arial" pitchFamily="34" charset="-120"/>
               </a:rPr>
@@ -1316,7 +1432,7 @@
         </p:nvSpPr>
         <p:spPr>
           <a:xfrm>
-            <a:off x="4690872" y="2852928"/>
+            <a:off x="4709160" y="2852928"/>
             <a:ext cx="6949440" cy="621792"/>
           </a:xfrm>
           <a:prstGeom prst="roundRect">
@@ -1359,7 +1475,6 @@
                 <a:solidFill>
                   <a:srgbClr val="F5F1EA"/>
                 </a:solidFill>
-                <a:latin typeface="Arial" pitchFamily="34" charset="0"/>
                 <a:ea typeface="Arial" pitchFamily="34" charset="-122"/>
                 <a:cs typeface="Arial" pitchFamily="34" charset="-120"/>
               </a:rPr>
@@ -1398,7 +1513,6 @@
                 <a:solidFill>
                   <a:srgbClr val="C9A96A"/>
                 </a:solidFill>
-                <a:latin typeface="Arial" pitchFamily="34" charset="0"/>
                 <a:ea typeface="Arial" pitchFamily="34" charset="-122"/>
                 <a:cs typeface="Arial" pitchFamily="34" charset="-120"/>
               </a:rPr>
@@ -1437,7 +1551,6 @@
                 <a:solidFill>
                   <a:srgbClr val="9BA3AE"/>
                 </a:solidFill>
-                <a:latin typeface="Arial" pitchFamily="34" charset="0"/>
                 <a:cs typeface="Arial" pitchFamily="34" charset="-120"/>
               </a:rPr>
               <a:t>ת.ז - 111111111</a:t>
@@ -1497,7 +1610,6 @@
                 <a:solidFill>
                   <a:srgbClr val="F5F1EA"/>
                 </a:solidFill>
-                <a:latin typeface="Arial" pitchFamily="34" charset="0"/>
                 <a:ea typeface="Arial" pitchFamily="34" charset="-122"/>
                 <a:cs typeface="Arial" pitchFamily="34" charset="-120"/>
               </a:rPr>
@@ -1536,7 +1648,6 @@
                 <a:solidFill>
                   <a:srgbClr val="C9A96A"/>
                 </a:solidFill>
-                <a:latin typeface="Arial" pitchFamily="34" charset="0"/>
                 <a:ea typeface="Arial" pitchFamily="34" charset="-122"/>
                 <a:cs typeface="Arial" pitchFamily="34" charset="-120"/>
               </a:rPr>
@@ -1575,10 +1686,9 @@
                 <a:solidFill>
                   <a:srgbClr val="9BA3AE"/>
                 </a:solidFill>
-                <a:latin typeface="Arial" pitchFamily="34" charset="0"/>
-                <a:cs typeface="Arial" pitchFamily="34" charset="-120"/>
-              </a:rPr>
-              <a:t>ת.ז - 222222222</a:t>
+                <a:cs typeface="Arial" pitchFamily="34" charset="-120"/>
+              </a:rPr>
+              <a:t>ת.ז - 111111111</a:t>
             </a:r>
             <a:endParaRPr lang="en-US" sz="1150" dirty="0"/>
           </a:p>
@@ -1635,7 +1745,6 @@
                 <a:solidFill>
                   <a:srgbClr val="F5F1EA"/>
                 </a:solidFill>
-                <a:latin typeface="Arial" pitchFamily="34" charset="0"/>
                 <a:ea typeface="Arial" pitchFamily="34" charset="-122"/>
                 <a:cs typeface="Arial" pitchFamily="34" charset="-120"/>
               </a:rPr>
@@ -1674,7 +1783,6 @@
                 <a:solidFill>
                   <a:srgbClr val="C9A96A"/>
                 </a:solidFill>
-                <a:latin typeface="Arial" pitchFamily="34" charset="0"/>
                 <a:ea typeface="Arial" pitchFamily="34" charset="-122"/>
                 <a:cs typeface="Arial" pitchFamily="34" charset="-120"/>
               </a:rPr>
@@ -1713,10 +1821,9 @@
                 <a:solidFill>
                   <a:srgbClr val="9BA3AE"/>
                 </a:solidFill>
-                <a:latin typeface="Arial" pitchFamily="34" charset="0"/>
-                <a:cs typeface="Arial" pitchFamily="34" charset="-120"/>
-              </a:rPr>
-              <a:t>ת.ז - 333333333</a:t>
+                <a:cs typeface="Arial" pitchFamily="34" charset="-120"/>
+              </a:rPr>
+              <a:t>ת.ז - 111111111</a:t>
             </a:r>
             <a:endParaRPr lang="en-US" sz="1150" dirty="0"/>
           </a:p>
@@ -1773,7 +1880,6 @@
                 <a:solidFill>
                   <a:srgbClr val="F5F1EA"/>
                 </a:solidFill>
-                <a:latin typeface="Arial" pitchFamily="34" charset="0"/>
                 <a:ea typeface="Arial" pitchFamily="34" charset="-122"/>
                 <a:cs typeface="Arial" pitchFamily="34" charset="-120"/>
               </a:rPr>
@@ -1812,7 +1918,6 @@
                 <a:solidFill>
                   <a:srgbClr val="C9A96A"/>
                 </a:solidFill>
-                <a:latin typeface="Arial" pitchFamily="34" charset="0"/>
                 <a:ea typeface="Arial" pitchFamily="34" charset="-122"/>
                 <a:cs typeface="Arial" pitchFamily="34" charset="-120"/>
               </a:rPr>
@@ -1851,10 +1956,9 @@
                 <a:solidFill>
                   <a:srgbClr val="9BA3AE"/>
                 </a:solidFill>
-                <a:latin typeface="Arial" pitchFamily="34" charset="0"/>
-                <a:cs typeface="Arial" pitchFamily="34" charset="-120"/>
-              </a:rPr>
-              <a:t>ת.ז - 444444444</a:t>
+                <a:cs typeface="Arial" pitchFamily="34" charset="-120"/>
+              </a:rPr>
+              <a:t>ת.ז - 111111111</a:t>
             </a:r>
             <a:endParaRPr lang="en-US" sz="1150" dirty="0"/>
           </a:p>
@@ -1905,24 +2009,76 @@
           <a:bodyPr wrap="square" lIns="0" tIns="0" rIns="0" bIns="0" rtlCol="0" anchor="ctr"/>
           <a:lstStyle/>
           <a:p>
+            <a:pPr algn="ctr"/>
+            <a:r>
+              <a:rPr lang="en-US" sz="1300" dirty="0">
+                <a:solidFill>
+                  <a:srgbClr val="C9A96A"/>
+                </a:solidFill>
+                <a:cs typeface="Arial" pitchFamily="34" charset="-120"/>
+              </a:rPr>
+              <a:t>Link: </a:t>
+            </a:r>
+            <a:r>
+              <a:rPr lang="en-US" sz="1300" dirty="0">
+                <a:solidFill>
+                  <a:srgbClr val="C9A96A"/>
+                </a:solidFill>
+                <a:ea typeface="Arial" pitchFamily="34" charset="-122"/>
+                <a:cs typeface="Arial" pitchFamily="34" charset="-120"/>
+              </a:rPr>
+              <a:t>https://queue-less-rho.vercel.app/QueueLess_v5.html</a:t>
+            </a:r>
+            <a:endParaRPr lang="en-US" sz="1300" dirty="0"/>
+          </a:p>
+          <a:p>
             <a:pPr marL="0" indent="0" algn="ctr">
               <a:buNone/>
             </a:pPr>
-            <a:r>
-              <a:rPr lang="en-US" sz="1300" dirty="0">
-                <a:solidFill>
-                  <a:srgbClr val="C9A96A"/>
-                </a:solidFill>
-                <a:latin typeface="Arial" pitchFamily="34" charset="0"/>
-                <a:ea typeface="Arial" pitchFamily="34" charset="-122"/>
-                <a:cs typeface="Arial" pitchFamily="34" charset="-120"/>
-              </a:rPr>
-              <a:t>https://queue-less-rho.vercel.app/QueueLess_v5.html</a:t>
-            </a:r>
             <a:endParaRPr lang="en-US" sz="1300" dirty="0"/>
           </a:p>
         </p:txBody>
       </p:sp>
+      <p:pic>
+        <p:nvPicPr>
+          <p:cNvPr id="30" name="Picture 29">
+            <a:extLst>
+              <a:ext uri="{FF2B5EF4-FFF2-40B4-BE49-F238E27FC236}">
+                <a16:creationId xmlns:a16="http://schemas.microsoft.com/office/drawing/2014/main" id="{EC4FC8AE-990F-7806-791A-9A8167D5F547}"/>
+              </a:ext>
+            </a:extLst>
+          </p:cNvPr>
+          <p:cNvPicPr>
+            <a:picLocks noChangeAspect="1"/>
+          </p:cNvPicPr>
+          <p:nvPr/>
+        </p:nvPicPr>
+        <p:blipFill>
+          <a:blip r:embed="rId5"/>
+          <a:stretch>
+            <a:fillRect/>
+          </a:stretch>
+        </p:blipFill>
+        <p:spPr>
+          <a:xfrm>
+            <a:off x="431321" y="569343"/>
+            <a:ext cx="4140679" cy="5771072"/>
+          </a:xfrm>
+          <a:prstGeom prst="rect">
+            <a:avLst/>
+          </a:prstGeom>
+          <a:ln>
+            <a:noFill/>
+          </a:ln>
+          <a:effectLst>
+            <a:outerShdw blurRad="292100" dist="139700" dir="2700000" algn="tl" rotWithShape="0">
+              <a:srgbClr val="333333">
+                <a:alpha val="65000"/>
+              </a:srgbClr>
+            </a:outerShdw>
+          </a:effectLst>
+        </p:spPr>
+      </p:pic>
     </p:spTree>
   </p:cSld>
   <p:clrMapOvr>
@@ -1964,8 +2120,8 @@
         </p:nvSpPr>
         <p:spPr>
           <a:xfrm>
-            <a:off x="2354031" y="301752"/>
-            <a:ext cx="6725961" cy="548640"/>
+            <a:off x="2432649" y="329400"/>
+            <a:ext cx="6423315" cy="548640"/>
           </a:xfrm>
           <a:prstGeom prst="rect">
             <a:avLst/>
@@ -1985,7 +2141,6 @@
                 <a:solidFill>
                   <a:srgbClr val="1F2933"/>
                 </a:solidFill>
-                <a:latin typeface="Arial" pitchFamily="34" charset="0"/>
                 <a:cs typeface="Arial" pitchFamily="34" charset="-120"/>
               </a:rPr>
               <a:t>הבעיה ש- </a:t>
@@ -1995,7 +2150,6 @@
                 <a:solidFill>
                   <a:srgbClr val="1F2933"/>
                 </a:solidFill>
-                <a:latin typeface="Arial" pitchFamily="34" charset="0"/>
                 <a:cs typeface="Arial" pitchFamily="34" charset="-120"/>
               </a:rPr>
               <a:t>QueueLess</a:t>
@@ -2005,7 +2159,6 @@
                 <a:solidFill>
                   <a:srgbClr val="1F2933"/>
                 </a:solidFill>
-                <a:latin typeface="Arial" pitchFamily="34" charset="0"/>
                 <a:cs typeface="Arial" pitchFamily="34" charset="-120"/>
               </a:rPr>
               <a:t> פותרת</a:t>
@@ -2022,8 +2175,8 @@
         </p:nvSpPr>
         <p:spPr>
           <a:xfrm>
-            <a:off x="5669280" y="1051560"/>
-            <a:ext cx="5971032" cy="365760"/>
+            <a:off x="548640" y="1051560"/>
+            <a:ext cx="11091672" cy="365760"/>
           </a:xfrm>
           <a:prstGeom prst="rect">
             <a:avLst/>
@@ -2035,24 +2188,45 @@
           <a:bodyPr wrap="square" lIns="0" tIns="0" rIns="0" bIns="0" rtlCol="0" anchor="ctr"/>
           <a:lstStyle/>
           <a:p>
-            <a:pPr marL="0" indent="0" algn="r" rtl="1">
-              <a:buNone/>
-            </a:pPr>
-            <a:r>
-              <a:rPr lang="he-IL" sz="1500" dirty="0">
-                <a:latin typeface="Arial" pitchFamily="34" charset="0"/>
-                <a:cs typeface="Arial" pitchFamily="34" charset="-120"/>
-              </a:rPr>
-              <a:t>עסקים קטנים עדיין מנהלים תורים דרך טלפון, יומן ידני ו- </a:t>
-            </a:r>
-            <a:r>
-              <a:rPr lang="en-US" sz="1500" dirty="0">
-                <a:latin typeface="Arial" pitchFamily="34" charset="0"/>
+            <a:pPr algn="ctr" rtl="1"/>
+            <a:r>
+              <a:rPr lang="he-IL" sz="1600" b="1" dirty="0">
+                <a:solidFill>
+                  <a:srgbClr val="6B5426"/>
+                </a:solidFill>
+                <a:ea typeface="Arial" pitchFamily="34" charset="-122"/>
+                <a:cs typeface="Arial" pitchFamily="34" charset="-120"/>
+              </a:rPr>
+              <a:t>עסקים קטנים עדיין מנהלים תורים דרך שיחות טלפון, יומן ידני ו- </a:t>
+            </a:r>
+            <a:r>
+              <a:rPr lang="en-US" sz="1600" b="1" dirty="0">
+                <a:solidFill>
+                  <a:srgbClr val="6B5426"/>
+                </a:solidFill>
+                <a:ea typeface="Arial" pitchFamily="34" charset="-122"/>
                 <a:cs typeface="Arial" pitchFamily="34" charset="-120"/>
               </a:rPr>
               <a:t>WhatsApp</a:t>
             </a:r>
-            <a:endParaRPr lang="en-US" sz="1500" dirty="0"/>
+            <a:r>
+              <a:rPr lang="he-IL" sz="1600" b="1" dirty="0">
+                <a:solidFill>
+                  <a:srgbClr val="6B5426"/>
+                </a:solidFill>
+                <a:ea typeface="Arial" pitchFamily="34" charset="-122"/>
+                <a:cs typeface="Arial" pitchFamily="34" charset="-120"/>
+              </a:rPr>
+              <a:t> </a:t>
+            </a:r>
+          </a:p>
+          <a:p>
+            <a:pPr marL="0" indent="0" algn="ctr" rtl="1">
+              <a:buNone/>
+            </a:pPr>
+            <a:endParaRPr lang="he-IL" sz="1500" dirty="0">
+              <a:cs typeface="Arial" pitchFamily="34" charset="-120"/>
+            </a:endParaRPr>
           </a:p>
         </p:txBody>
       </p:sp>
@@ -2156,7 +2330,6 @@
                 <a:solidFill>
                   <a:srgbClr val="B4483C"/>
                 </a:solidFill>
-                <a:latin typeface="Arial" pitchFamily="34" charset="0"/>
                 <a:ea typeface="Arial" pitchFamily="34" charset="-122"/>
                 <a:cs typeface="Arial" pitchFamily="34" charset="-120"/>
               </a:rPr>
@@ -2195,7 +2368,6 @@
                 <a:solidFill>
                   <a:srgbClr val="6B7280"/>
                 </a:solidFill>
-                <a:latin typeface="Arial" pitchFamily="34" charset="0"/>
                 <a:cs typeface="Arial" pitchFamily="34" charset="-120"/>
               </a:rPr>
               <a:t>שיחות טלפון | יומן ידני | </a:t>
@@ -2205,10 +2377,9 @@
                 <a:solidFill>
                   <a:srgbClr val="6B7280"/>
                 </a:solidFill>
-                <a:latin typeface="Arial" pitchFamily="34" charset="0"/>
-                <a:cs typeface="Arial" pitchFamily="34" charset="-120"/>
-              </a:rPr>
-              <a:t>WhatsApp</a:t>
+                <a:cs typeface="Arial" pitchFamily="34" charset="-120"/>
+              </a:rPr>
+              <a:t>WhatsApp </a:t>
             </a:r>
             <a:endParaRPr lang="en-US" sz="1300" dirty="0"/>
           </a:p>
@@ -2266,7 +2437,6 @@
                 <a:solidFill>
                   <a:srgbClr val="1F2933"/>
                 </a:solidFill>
-                <a:latin typeface="Arial" pitchFamily="34" charset="0"/>
                 <a:ea typeface="Arial" pitchFamily="34" charset="-122"/>
                 <a:cs typeface="Arial" pitchFamily="34" charset="-120"/>
               </a:rPr>
@@ -2328,7 +2498,6 @@
                 <a:solidFill>
                   <a:srgbClr val="1F2933"/>
                 </a:solidFill>
-                <a:latin typeface="Arial" pitchFamily="34" charset="0"/>
                 <a:ea typeface="Arial" pitchFamily="34" charset="-122"/>
                 <a:cs typeface="Arial" pitchFamily="34" charset="-120"/>
               </a:rPr>
@@ -2390,7 +2559,6 @@
                 <a:solidFill>
                   <a:srgbClr val="1F2933"/>
                 </a:solidFill>
-                <a:latin typeface="Arial" pitchFamily="34" charset="0"/>
                 <a:ea typeface="Arial" pitchFamily="34" charset="-122"/>
                 <a:cs typeface="Arial" pitchFamily="34" charset="-120"/>
               </a:rPr>
@@ -2452,7 +2620,6 @@
                 <a:solidFill>
                   <a:srgbClr val="1F2933"/>
                 </a:solidFill>
-                <a:latin typeface="Arial" pitchFamily="34" charset="0"/>
                 <a:ea typeface="Arial" pitchFamily="34" charset="-122"/>
                 <a:cs typeface="Arial" pitchFamily="34" charset="-120"/>
               </a:rPr>
@@ -2514,7 +2681,6 @@
                 <a:solidFill>
                   <a:srgbClr val="1F2933"/>
                 </a:solidFill>
-                <a:latin typeface="Arial" pitchFamily="34" charset="0"/>
                 <a:ea typeface="Arial" pitchFamily="34" charset="-122"/>
                 <a:cs typeface="Arial" pitchFamily="34" charset="-120"/>
               </a:rPr>
@@ -2643,7 +2809,6 @@
                 <a:solidFill>
                   <a:srgbClr val="C9A96A"/>
                 </a:solidFill>
-                <a:latin typeface="Arial" pitchFamily="34" charset="0"/>
                 <a:ea typeface="Arial" pitchFamily="34" charset="-122"/>
                 <a:cs typeface="Arial" pitchFamily="34" charset="-120"/>
               </a:rPr>
@@ -2682,7 +2847,6 @@
                 <a:solidFill>
                   <a:srgbClr val="9BA3AE"/>
                 </a:solidFill>
-                <a:latin typeface="Arial" pitchFamily="34" charset="0"/>
                 <a:ea typeface="Arial" pitchFamily="34" charset="-122"/>
                 <a:cs typeface="Arial" pitchFamily="34" charset="-120"/>
               </a:rPr>
@@ -2693,33 +2857,10 @@
                 <a:solidFill>
                   <a:srgbClr val="9BA3AE"/>
                 </a:solidFill>
-                <a:latin typeface="Arial" pitchFamily="34" charset="0"/>
-                <a:ea typeface="Arial" pitchFamily="34" charset="-122"/>
-                <a:cs typeface="Arial" pitchFamily="34" charset="-120"/>
-              </a:rPr>
-              <a:t>ו</a:t>
-            </a:r>
-            <a:r>
-              <a:rPr lang="en-US" sz="1300" dirty="0">
-                <a:solidFill>
-                  <a:srgbClr val="9BA3AE"/>
-                </a:solidFill>
-                <a:latin typeface="Arial" pitchFamily="34" charset="0"/>
-                <a:ea typeface="Arial" pitchFamily="34" charset="-122"/>
-                <a:cs typeface="Arial" pitchFamily="34" charset="-120"/>
-              </a:rPr>
-              <a:t>זמינה מכל </a:t>
-            </a:r>
-            <a:r>
-              <a:rPr lang="he-IL" sz="1300" dirty="0">
-                <a:solidFill>
-                  <a:srgbClr val="9BA3AE"/>
-                </a:solidFill>
-                <a:latin typeface="Arial" pitchFamily="34" charset="0"/>
-                <a:ea typeface="Arial" pitchFamily="34" charset="-122"/>
-                <a:cs typeface="Arial" pitchFamily="34" charset="-120"/>
-              </a:rPr>
-              <a:t>מקום</a:t>
+                <a:ea typeface="Arial" pitchFamily="34" charset="-122"/>
+                <a:cs typeface="Arial" pitchFamily="34" charset="-120"/>
+              </a:rPr>
+              <a:t>וזמינה מכל מקום</a:t>
             </a:r>
             <a:endParaRPr lang="en-US" sz="1300" dirty="0"/>
           </a:p>
@@ -2777,7 +2918,6 @@
                 <a:solidFill>
                   <a:srgbClr val="E8E4DC"/>
                 </a:solidFill>
-                <a:latin typeface="Arial" pitchFamily="34" charset="0"/>
                 <a:ea typeface="Arial" pitchFamily="34" charset="-122"/>
                 <a:cs typeface="Arial" pitchFamily="34" charset="-120"/>
               </a:rPr>
@@ -2839,7 +2979,6 @@
                 <a:solidFill>
                   <a:srgbClr val="E8E4DC"/>
                 </a:solidFill>
-                <a:latin typeface="Arial" pitchFamily="34" charset="0"/>
                 <a:ea typeface="Arial" pitchFamily="34" charset="-122"/>
                 <a:cs typeface="Arial" pitchFamily="34" charset="-120"/>
               </a:rPr>
@@ -2901,7 +3040,6 @@
                 <a:solidFill>
                   <a:srgbClr val="E8E4DC"/>
                 </a:solidFill>
-                <a:latin typeface="Arial" pitchFamily="34" charset="0"/>
                 <a:ea typeface="Arial" pitchFamily="34" charset="-122"/>
                 <a:cs typeface="Arial" pitchFamily="34" charset="-120"/>
               </a:rPr>
@@ -2963,7 +3101,6 @@
                 <a:solidFill>
                   <a:srgbClr val="E8E4DC"/>
                 </a:solidFill>
-                <a:latin typeface="Arial" pitchFamily="34" charset="0"/>
                 <a:ea typeface="Arial" pitchFamily="34" charset="-122"/>
                 <a:cs typeface="Arial" pitchFamily="34" charset="-120"/>
               </a:rPr>
@@ -3025,7 +3162,6 @@
                 <a:solidFill>
                   <a:srgbClr val="E8E4DC"/>
                 </a:solidFill>
-                <a:latin typeface="Arial" pitchFamily="34" charset="0"/>
                 <a:ea typeface="Arial" pitchFamily="34" charset="-122"/>
                 <a:cs typeface="Arial" pitchFamily="34" charset="-120"/>
               </a:rPr>
@@ -3076,8 +3212,8 @@
         </p:nvSpPr>
         <p:spPr>
           <a:xfrm>
-            <a:off x="4742688" y="384048"/>
-            <a:ext cx="2706624" cy="548640"/>
+            <a:off x="5117046" y="215113"/>
+            <a:ext cx="1957908" cy="548640"/>
           </a:xfrm>
           <a:prstGeom prst="rect">
             <a:avLst/>
@@ -3093,11 +3229,10 @@
               <a:buNone/>
             </a:pPr>
             <a:r>
-              <a:rPr lang="en-US" sz="3800" b="1" dirty="0">
+              <a:rPr lang="en-US" sz="6600" b="1" dirty="0">
                 <a:solidFill>
                   <a:srgbClr val="1F2933"/>
                 </a:solidFill>
-                <a:latin typeface="Arial" pitchFamily="34" charset="0"/>
                 <a:ea typeface="Arial" pitchFamily="34" charset="-122"/>
                 <a:cs typeface="Arial" pitchFamily="34" charset="-120"/>
               </a:rPr>
@@ -3108,11 +3243,10 @@
                 <a:solidFill>
                   <a:srgbClr val="1F2933"/>
                 </a:solidFill>
-                <a:latin typeface="Arial" pitchFamily="34" charset="0"/>
-                <a:ea typeface="Arial" pitchFamily="34" charset="-122"/>
-                <a:cs typeface="Arial" pitchFamily="34" charset="-120"/>
-              </a:rPr>
-              <a:t> עובד</a:t>
+                <a:ea typeface="Arial" pitchFamily="34" charset="-122"/>
+                <a:cs typeface="Arial" pitchFamily="34" charset="-120"/>
+              </a:rPr>
+              <a:t> </a:t>
             </a:r>
             <a:endParaRPr lang="en-US" sz="3800" dirty="0"/>
           </a:p>
@@ -3126,8 +3260,8 @@
         </p:nvSpPr>
         <p:spPr>
           <a:xfrm>
-            <a:off x="6153912" y="1014984"/>
-            <a:ext cx="5486400" cy="329184"/>
+            <a:off x="2302102" y="950976"/>
+            <a:ext cx="7191555" cy="329184"/>
           </a:xfrm>
           <a:prstGeom prst="rect">
             <a:avLst/>
@@ -3143,14 +3277,35 @@
               <a:buNone/>
             </a:pPr>
             <a:r>
-              <a:rPr lang="en-US" sz="1500" dirty="0">
-                <a:latin typeface="Arial" pitchFamily="34" charset="0"/>
-                <a:ea typeface="Arial" pitchFamily="34" charset="-122"/>
-                <a:cs typeface="Arial" pitchFamily="34" charset="-120"/>
-              </a:rPr>
-              <a:t>מה בנינו בפועל, ומה בחרנו לא לבנות</a:t>
-            </a:r>
-            <a:endParaRPr lang="en-US" sz="1500" dirty="0"/>
+              <a:rPr lang="he-IL" sz="1600" b="1" dirty="0">
+                <a:solidFill>
+                  <a:srgbClr val="6B5426"/>
+                </a:solidFill>
+                <a:ea typeface="Arial" pitchFamily="34" charset="-122"/>
+                <a:cs typeface="Arial" pitchFamily="34" charset="-120"/>
+              </a:rPr>
+              <a:t>בחרנו </a:t>
+            </a:r>
+            <a:r>
+              <a:rPr lang="en-US" sz="1600" b="1" dirty="0">
+                <a:solidFill>
+                  <a:srgbClr val="6B5426"/>
+                </a:solidFill>
+                <a:ea typeface="Arial" pitchFamily="34" charset="-122"/>
+                <a:cs typeface="Arial" pitchFamily="34" charset="-120"/>
+              </a:rPr>
+              <a:t>MVP</a:t>
+            </a:r>
+            <a:r>
+              <a:rPr lang="he-IL" sz="1600" b="1" dirty="0">
+                <a:solidFill>
+                  <a:srgbClr val="6B5426"/>
+                </a:solidFill>
+                <a:ea typeface="Arial" pitchFamily="34" charset="-122"/>
+                <a:cs typeface="Arial" pitchFamily="34" charset="-120"/>
+              </a:rPr>
+              <a:t> ממוקד כדי להציג מוצר יציב, ברור ועובד שיהיה פשוט להבנה ושימוש</a:t>
+            </a:r>
           </a:p>
         </p:txBody>
       </p:sp>
@@ -3162,7 +3317,7 @@
         </p:nvSpPr>
         <p:spPr>
           <a:xfrm>
-            <a:off x="6291072" y="1536192"/>
+            <a:off x="6291072" y="1417320"/>
             <a:ext cx="5349240" cy="3401568"/>
           </a:xfrm>
           <a:prstGeom prst="roundRect">
@@ -3189,7 +3344,7 @@
         </p:nvSpPr>
         <p:spPr>
           <a:xfrm>
-            <a:off x="10744200" y="1792224"/>
+            <a:off x="10744200" y="1652569"/>
             <a:ext cx="603504" cy="603504"/>
           </a:xfrm>
           <a:prstGeom prst="ellipse">
@@ -3217,7 +3372,7 @@
         </p:blipFill>
         <p:spPr>
           <a:xfrm>
-            <a:off x="10907146" y="1955170"/>
+            <a:off x="10907146" y="1815515"/>
             <a:ext cx="277612" cy="277612"/>
           </a:xfrm>
           <a:prstGeom prst="rect">
@@ -3233,7 +3388,7 @@
         </p:nvSpPr>
         <p:spPr>
           <a:xfrm>
-            <a:off x="6638544" y="1810512"/>
+            <a:off x="6638544" y="1670857"/>
             <a:ext cx="3977640" cy="384048"/>
           </a:xfrm>
           <a:prstGeom prst="rect">
@@ -3254,7 +3409,6 @@
                 <a:solidFill>
                   <a:srgbClr val="1F2933"/>
                 </a:solidFill>
-                <a:latin typeface="Arial" pitchFamily="34" charset="0"/>
                 <a:ea typeface="Arial" pitchFamily="34" charset="-122"/>
                 <a:cs typeface="Arial" pitchFamily="34" charset="-120"/>
               </a:rPr>
@@ -3272,7 +3426,7 @@
         </p:nvSpPr>
         <p:spPr>
           <a:xfrm>
-            <a:off x="11210544" y="2509647"/>
+            <a:off x="11210544" y="2369992"/>
             <a:ext cx="82296" cy="82296"/>
           </a:xfrm>
           <a:prstGeom prst="ellipse">
@@ -3292,7 +3446,7 @@
         </p:nvSpPr>
         <p:spPr>
           <a:xfrm>
-            <a:off x="6638544" y="2432304"/>
+            <a:off x="6638544" y="2292649"/>
             <a:ext cx="4443984" cy="411480"/>
           </a:xfrm>
           <a:prstGeom prst="rect">
@@ -3312,26 +3466,42 @@
               <a:buNone/>
             </a:pPr>
             <a:r>
+              <a:rPr lang="en-US" sz="1450" dirty="0">
+                <a:solidFill>
+                  <a:srgbClr val="1F2933"/>
+                </a:solidFill>
+                <a:ea typeface="Arial" pitchFamily="34" charset="-122"/>
+                <a:cs typeface="Arial" pitchFamily="34" charset="-120"/>
+              </a:rPr>
+              <a:t>הרשמה </a:t>
+            </a:r>
+            <a:r>
               <a:rPr lang="he-IL" sz="1450" dirty="0">
                 <a:solidFill>
                   <a:srgbClr val="1F2933"/>
                 </a:solidFill>
-                <a:latin typeface="Arial" pitchFamily="34" charset="0"/>
-                <a:cs typeface="Arial" pitchFamily="34" charset="-120"/>
-              </a:rPr>
-              <a:t>הרשמה והתחברות שכוללת סיסמה + </a:t>
+                <a:ea typeface="Arial" pitchFamily="34" charset="-122"/>
+                <a:cs typeface="Arial" pitchFamily="34" charset="-120"/>
+              </a:rPr>
+              <a:t>והתחברות עם נייד, סיסמה ו- </a:t>
             </a:r>
             <a:r>
               <a:rPr lang="en-US" sz="1450" dirty="0">
                 <a:solidFill>
                   <a:srgbClr val="1F2933"/>
                 </a:solidFill>
-                <a:latin typeface="Arial" pitchFamily="34" charset="0"/>
+                <a:ea typeface="Arial" pitchFamily="34" charset="-122"/>
                 <a:cs typeface="Arial" pitchFamily="34" charset="-120"/>
               </a:rPr>
               <a:t>OTP</a:t>
             </a:r>
-            <a:endParaRPr lang="en-US" sz="1450" dirty="0"/>
+            <a:endParaRPr lang="he-IL" sz="1450" dirty="0">
+              <a:solidFill>
+                <a:srgbClr val="1F2933"/>
+              </a:solidFill>
+              <a:ea typeface="Arial" pitchFamily="34" charset="-122"/>
+              <a:cs typeface="Arial" pitchFamily="34" charset="-120"/>
+            </a:endParaRPr>
           </a:p>
         </p:txBody>
       </p:sp>
@@ -3343,7 +3513,7 @@
         </p:nvSpPr>
         <p:spPr>
           <a:xfrm>
-            <a:off x="11210544" y="2921127"/>
+            <a:off x="11210544" y="2781472"/>
             <a:ext cx="82296" cy="82296"/>
           </a:xfrm>
           <a:prstGeom prst="ellipse">
@@ -3363,7 +3533,7 @@
         </p:nvSpPr>
         <p:spPr>
           <a:xfrm>
-            <a:off x="6638544" y="2843784"/>
+            <a:off x="6638544" y="2704129"/>
             <a:ext cx="4443984" cy="411480"/>
           </a:xfrm>
           <a:prstGeom prst="rect">
@@ -3387,7 +3557,6 @@
                 <a:solidFill>
                   <a:srgbClr val="1F2933"/>
                 </a:solidFill>
-                <a:latin typeface="Arial" pitchFamily="34" charset="0"/>
                 <a:ea typeface="Arial" pitchFamily="34" charset="-122"/>
                 <a:cs typeface="Arial" pitchFamily="34" charset="-120"/>
               </a:rPr>
@@ -3405,7 +3574,7 @@
         </p:nvSpPr>
         <p:spPr>
           <a:xfrm>
-            <a:off x="11210544" y="3332607"/>
+            <a:off x="11210544" y="3192952"/>
             <a:ext cx="82296" cy="82296"/>
           </a:xfrm>
           <a:prstGeom prst="ellipse">
@@ -3425,7 +3594,7 @@
         </p:nvSpPr>
         <p:spPr>
           <a:xfrm>
-            <a:off x="6638544" y="3255264"/>
+            <a:off x="6638544" y="3115609"/>
             <a:ext cx="4443984" cy="411480"/>
           </a:xfrm>
           <a:prstGeom prst="rect">
@@ -3449,7 +3618,6 @@
                 <a:solidFill>
                   <a:srgbClr val="1F2933"/>
                 </a:solidFill>
-                <a:latin typeface="Arial" pitchFamily="34" charset="0"/>
                 <a:ea typeface="Arial" pitchFamily="34" charset="-122"/>
                 <a:cs typeface="Arial" pitchFamily="34" charset="-120"/>
               </a:rPr>
@@ -3467,7 +3635,7 @@
         </p:nvSpPr>
         <p:spPr>
           <a:xfrm>
-            <a:off x="11210544" y="3744087"/>
+            <a:off x="11210544" y="3604432"/>
             <a:ext cx="82296" cy="82296"/>
           </a:xfrm>
           <a:prstGeom prst="ellipse">
@@ -3487,7 +3655,7 @@
         </p:nvSpPr>
         <p:spPr>
           <a:xfrm>
-            <a:off x="6638544" y="3666744"/>
+            <a:off x="6638544" y="3527089"/>
             <a:ext cx="4443984" cy="411480"/>
           </a:xfrm>
           <a:prstGeom prst="rect">
@@ -3511,7 +3679,6 @@
                 <a:solidFill>
                   <a:srgbClr val="1F2933"/>
                 </a:solidFill>
-                <a:latin typeface="Arial" pitchFamily="34" charset="0"/>
                 <a:ea typeface="Arial" pitchFamily="34" charset="-122"/>
                 <a:cs typeface="Arial" pitchFamily="34" charset="-120"/>
               </a:rPr>
@@ -3529,7 +3696,7 @@
         </p:nvSpPr>
         <p:spPr>
           <a:xfrm>
-            <a:off x="11210544" y="4155567"/>
+            <a:off x="11210544" y="4015912"/>
             <a:ext cx="82296" cy="82296"/>
           </a:xfrm>
           <a:prstGeom prst="ellipse">
@@ -3549,7 +3716,7 @@
         </p:nvSpPr>
         <p:spPr>
           <a:xfrm>
-            <a:off x="6638544" y="4078224"/>
+            <a:off x="6638544" y="3938569"/>
             <a:ext cx="4443984" cy="411480"/>
           </a:xfrm>
           <a:prstGeom prst="rect">
@@ -3569,15 +3736,24 @@
               <a:buNone/>
             </a:pPr>
             <a:r>
+              <a:rPr lang="en-US" sz="1450" dirty="0">
+                <a:solidFill>
+                  <a:srgbClr val="1F2933"/>
+                </a:solidFill>
+                <a:ea typeface="Arial" pitchFamily="34" charset="-122"/>
+                <a:cs typeface="Arial" pitchFamily="34" charset="-120"/>
+              </a:rPr>
+              <a:t>מסך אישי</a:t>
+            </a:r>
+            <a:r>
               <a:rPr lang="he-IL" sz="1450" dirty="0">
                 <a:solidFill>
                   <a:srgbClr val="1F2933"/>
                 </a:solidFill>
-                <a:latin typeface="Arial" pitchFamily="34" charset="0"/>
-                <a:ea typeface="Arial" pitchFamily="34" charset="-122"/>
-                <a:cs typeface="Arial" pitchFamily="34" charset="-120"/>
-              </a:rPr>
-              <a:t>מסך אישי: התורים שלי</a:t>
+                <a:ea typeface="Arial" pitchFamily="34" charset="-122"/>
+                <a:cs typeface="Arial" pitchFamily="34" charset="-120"/>
+              </a:rPr>
+              <a:t>: התורים שלי</a:t>
             </a:r>
             <a:endParaRPr lang="en-US" sz="1450" dirty="0"/>
           </a:p>
@@ -3591,7 +3767,7 @@
         </p:nvSpPr>
         <p:spPr>
           <a:xfrm>
-            <a:off x="11210544" y="4567047"/>
+            <a:off x="11210544" y="4427392"/>
             <a:ext cx="82296" cy="82296"/>
           </a:xfrm>
           <a:prstGeom prst="ellipse">
@@ -3611,7 +3787,7 @@
         </p:nvSpPr>
         <p:spPr>
           <a:xfrm>
-            <a:off x="6638544" y="4489704"/>
+            <a:off x="6638544" y="4350049"/>
             <a:ext cx="4443984" cy="411480"/>
           </a:xfrm>
           <a:prstGeom prst="rect">
@@ -3631,24 +3807,34 @@
               <a:buNone/>
             </a:pPr>
             <a:r>
+              <a:rPr lang="en-US" sz="1450" dirty="0">
+                <a:solidFill>
+                  <a:srgbClr val="1F2933"/>
+                </a:solidFill>
+                <a:ea typeface="Arial" pitchFamily="34" charset="-122"/>
+                <a:cs typeface="Arial" pitchFamily="34" charset="-120"/>
+              </a:rPr>
+              <a:t>סטטוס </a:t>
+            </a:r>
+            <a:r>
               <a:rPr lang="he-IL" sz="1450" dirty="0">
                 <a:solidFill>
                   <a:srgbClr val="1F2933"/>
                 </a:solidFill>
-                <a:latin typeface="Arial" pitchFamily="34" charset="0"/>
-                <a:cs typeface="Arial" pitchFamily="34" charset="-120"/>
-              </a:rPr>
-              <a:t>סטטוס תור: </a:t>
+                <a:ea typeface="Arial" pitchFamily="34" charset="-122"/>
+                <a:cs typeface="Arial" pitchFamily="34" charset="-120"/>
+              </a:rPr>
+              <a:t>תור: </a:t>
             </a:r>
             <a:r>
               <a:rPr lang="en-US" sz="1450" dirty="0">
                 <a:solidFill>
                   <a:srgbClr val="1F2933"/>
                 </a:solidFill>
-                <a:latin typeface="Arial" pitchFamily="34" charset="0"/>
-                <a:cs typeface="Arial" pitchFamily="34" charset="-120"/>
-              </a:rPr>
-              <a:t>Confirmed, Canceled, Pending</a:t>
+                <a:ea typeface="Arial" pitchFamily="34" charset="-122"/>
+                <a:cs typeface="Arial" pitchFamily="34" charset="-120"/>
+              </a:rPr>
+              <a:t>Confirmed, Pending, Canceled</a:t>
             </a:r>
             <a:endParaRPr lang="en-US" sz="1450" dirty="0"/>
           </a:p>
@@ -3662,7 +3848,7 @@
         </p:nvSpPr>
         <p:spPr>
           <a:xfrm>
-            <a:off x="548640" y="1536192"/>
+            <a:off x="548640" y="1396537"/>
             <a:ext cx="5349240" cy="3401568"/>
           </a:xfrm>
           <a:prstGeom prst="roundRect">
@@ -3684,7 +3870,7 @@
         </p:nvSpPr>
         <p:spPr>
           <a:xfrm>
-            <a:off x="5001768" y="1792224"/>
+            <a:off x="5001768" y="1652569"/>
             <a:ext cx="603504" cy="603504"/>
           </a:xfrm>
           <a:prstGeom prst="ellipse">
@@ -3712,7 +3898,7 @@
         </p:blipFill>
         <p:spPr>
           <a:xfrm>
-            <a:off x="5164714" y="1955170"/>
+            <a:off x="5164714" y="1815515"/>
             <a:ext cx="277612" cy="277612"/>
           </a:xfrm>
           <a:prstGeom prst="rect">
@@ -3728,7 +3914,7 @@
         </p:nvSpPr>
         <p:spPr>
           <a:xfrm>
-            <a:off x="896112" y="1810512"/>
+            <a:off x="896112" y="1670857"/>
             <a:ext cx="3977640" cy="384048"/>
           </a:xfrm>
           <a:prstGeom prst="rect">
@@ -3749,7 +3935,6 @@
                 <a:solidFill>
                   <a:srgbClr val="F5F1EA"/>
                 </a:solidFill>
-                <a:latin typeface="Arial" pitchFamily="34" charset="0"/>
                 <a:ea typeface="Arial" pitchFamily="34" charset="-122"/>
                 <a:cs typeface="Arial" pitchFamily="34" charset="-120"/>
               </a:rPr>
@@ -3767,7 +3952,7 @@
         </p:nvSpPr>
         <p:spPr>
           <a:xfrm>
-            <a:off x="5468112" y="2509647"/>
+            <a:off x="5468112" y="2369992"/>
             <a:ext cx="82296" cy="82296"/>
           </a:xfrm>
           <a:prstGeom prst="ellipse">
@@ -3787,7 +3972,7 @@
         </p:nvSpPr>
         <p:spPr>
           <a:xfrm>
-            <a:off x="896112" y="2432304"/>
+            <a:off x="896112" y="2292649"/>
             <a:ext cx="4443984" cy="411480"/>
           </a:xfrm>
           <a:prstGeom prst="rect">
@@ -3811,7 +3996,6 @@
                 <a:solidFill>
                   <a:srgbClr val="E8E4DC"/>
                 </a:solidFill>
-                <a:latin typeface="Arial" pitchFamily="34" charset="0"/>
                 <a:ea typeface="Arial" pitchFamily="34" charset="-122"/>
                 <a:cs typeface="Arial" pitchFamily="34" charset="-120"/>
               </a:rPr>
@@ -3829,7 +4013,7 @@
         </p:nvSpPr>
         <p:spPr>
           <a:xfrm>
-            <a:off x="5468112" y="2921127"/>
+            <a:off x="5468112" y="2781472"/>
             <a:ext cx="82296" cy="82296"/>
           </a:xfrm>
           <a:prstGeom prst="ellipse">
@@ -3849,7 +4033,7 @@
         </p:nvSpPr>
         <p:spPr>
           <a:xfrm>
-            <a:off x="896112" y="2843784"/>
+            <a:off x="896112" y="2704129"/>
             <a:ext cx="4443984" cy="411480"/>
           </a:xfrm>
           <a:prstGeom prst="rect">
@@ -3873,7 +4057,6 @@
                 <a:solidFill>
                   <a:srgbClr val="E8E4DC"/>
                 </a:solidFill>
-                <a:latin typeface="Arial" pitchFamily="34" charset="0"/>
                 <a:ea typeface="Arial" pitchFamily="34" charset="-122"/>
                 <a:cs typeface="Arial" pitchFamily="34" charset="-120"/>
               </a:rPr>
@@ -3891,7 +4074,7 @@
         </p:nvSpPr>
         <p:spPr>
           <a:xfrm>
-            <a:off x="5468112" y="3332607"/>
+            <a:off x="5468112" y="3192952"/>
             <a:ext cx="82296" cy="82296"/>
           </a:xfrm>
           <a:prstGeom prst="ellipse">
@@ -3911,7 +4094,7 @@
         </p:nvSpPr>
         <p:spPr>
           <a:xfrm>
-            <a:off x="896112" y="3255264"/>
+            <a:off x="896112" y="3115609"/>
             <a:ext cx="4443984" cy="411480"/>
           </a:xfrm>
           <a:prstGeom prst="rect">
@@ -3935,7 +4118,6 @@
                 <a:solidFill>
                   <a:srgbClr val="E8E4DC"/>
                 </a:solidFill>
-                <a:latin typeface="Arial" pitchFamily="34" charset="0"/>
                 <a:ea typeface="Arial" pitchFamily="34" charset="-122"/>
                 <a:cs typeface="Arial" pitchFamily="34" charset="-120"/>
               </a:rPr>
@@ -3953,7 +4135,7 @@
         </p:nvSpPr>
         <p:spPr>
           <a:xfrm>
-            <a:off x="5468112" y="3744087"/>
+            <a:off x="5468112" y="3604432"/>
             <a:ext cx="82296" cy="82296"/>
           </a:xfrm>
           <a:prstGeom prst="ellipse">
@@ -3973,7 +4155,7 @@
         </p:nvSpPr>
         <p:spPr>
           <a:xfrm>
-            <a:off x="896112" y="3666744"/>
+            <a:off x="896112" y="3527089"/>
             <a:ext cx="4443984" cy="411480"/>
           </a:xfrm>
           <a:prstGeom prst="rect">
@@ -3993,14 +4175,24 @@
               <a:buNone/>
             </a:pPr>
             <a:r>
+              <a:rPr lang="en-US" sz="1450" dirty="0">
+                <a:solidFill>
+                  <a:srgbClr val="E8E4DC"/>
+                </a:solidFill>
+                <a:ea typeface="Arial" pitchFamily="34" charset="-122"/>
+                <a:cs typeface="Arial" pitchFamily="34" charset="-120"/>
+              </a:rPr>
+              <a:t>תורים להיום,</a:t>
+            </a:r>
+            <a:r>
               <a:rPr lang="he-IL" sz="1450" dirty="0">
                 <a:solidFill>
                   <a:srgbClr val="E8E4DC"/>
                 </a:solidFill>
-                <a:latin typeface="Arial" pitchFamily="34" charset="0"/>
-                <a:cs typeface="Arial" pitchFamily="34" charset="-120"/>
-              </a:rPr>
-              <a:t>תורים להיום, עתידיים ומבוטלים</a:t>
+                <a:ea typeface="Arial" pitchFamily="34" charset="-122"/>
+                <a:cs typeface="Arial" pitchFamily="34" charset="-120"/>
+              </a:rPr>
+              <a:t> עתידיים ומבוטלים</a:t>
             </a:r>
             <a:endParaRPr lang="en-US" sz="1450" dirty="0"/>
           </a:p>
@@ -4014,7 +4206,7 @@
         </p:nvSpPr>
         <p:spPr>
           <a:xfrm>
-            <a:off x="5468112" y="4155567"/>
+            <a:off x="5468112" y="4015912"/>
             <a:ext cx="82296" cy="82296"/>
           </a:xfrm>
           <a:prstGeom prst="ellipse">
@@ -4034,7 +4226,7 @@
         </p:nvSpPr>
         <p:spPr>
           <a:xfrm>
-            <a:off x="896112" y="4078224"/>
+            <a:off x="896112" y="3938569"/>
             <a:ext cx="4443984" cy="411480"/>
           </a:xfrm>
           <a:prstGeom prst="rect">
@@ -4058,7 +4250,6 @@
                 <a:solidFill>
                   <a:srgbClr val="E8E4DC"/>
                 </a:solidFill>
-                <a:latin typeface="Arial" pitchFamily="34" charset="0"/>
                 <a:ea typeface="Arial" pitchFamily="34" charset="-122"/>
                 <a:cs typeface="Arial" pitchFamily="34" charset="-120"/>
               </a:rPr>
@@ -4076,7 +4267,7 @@
         </p:nvSpPr>
         <p:spPr>
           <a:xfrm>
-            <a:off x="5468112" y="4567047"/>
+            <a:off x="5468112" y="4427392"/>
             <a:ext cx="82296" cy="82296"/>
           </a:xfrm>
           <a:prstGeom prst="ellipse">
@@ -4096,7 +4287,7 @@
         </p:nvSpPr>
         <p:spPr>
           <a:xfrm>
-            <a:off x="896112" y="4489704"/>
+            <a:off x="896112" y="4350049"/>
             <a:ext cx="4443984" cy="411480"/>
           </a:xfrm>
           <a:prstGeom prst="rect">
@@ -4116,14 +4307,24 @@
               <a:buNone/>
             </a:pPr>
             <a:r>
+              <a:rPr lang="en-US" sz="1450" dirty="0">
+                <a:solidFill>
+                  <a:srgbClr val="E8E4DC"/>
+                </a:solidFill>
+                <a:ea typeface="Arial" pitchFamily="34" charset="-122"/>
+                <a:cs typeface="Arial" pitchFamily="34" charset="-120"/>
+              </a:rPr>
+              <a:t>חסימת ימים</a:t>
+            </a:r>
+            <a:r>
               <a:rPr lang="he-IL" sz="1450" dirty="0">
                 <a:solidFill>
                   <a:srgbClr val="E8E4DC"/>
                 </a:solidFill>
-                <a:latin typeface="Arial" pitchFamily="34" charset="0"/>
-                <a:cs typeface="Arial" pitchFamily="34" charset="-120"/>
-              </a:rPr>
-              <a:t>חסימת ימים, טווחי תאריכים ושעות</a:t>
+                <a:ea typeface="Arial" pitchFamily="34" charset="-122"/>
+                <a:cs typeface="Arial" pitchFamily="34" charset="-120"/>
+              </a:rPr>
+              <a:t>, טווחי תאריכים ושעות</a:t>
             </a:r>
             <a:endParaRPr lang="en-US" sz="1450" dirty="0"/>
           </a:p>
@@ -4219,51 +4420,13 @@
             <a:pPr marL="0" indent="0" algn="r" rtl="1">
               <a:buNone/>
             </a:pPr>
-            <a:r>
-              <a:rPr lang="en-US" sz="1400" b="1" dirty="0">
-                <a:solidFill>
-                  <a:srgbClr val="6B5426"/>
-                </a:solidFill>
-                <a:latin typeface="Arial" pitchFamily="34" charset="0"/>
-                <a:ea typeface="Arial" pitchFamily="34" charset="-122"/>
-                <a:cs typeface="Arial" pitchFamily="34" charset="-120"/>
-              </a:rPr>
-              <a:t>בחרנו MVP</a:t>
-            </a:r>
-            <a:r>
-              <a:rPr lang="he-IL" sz="1400" b="1" dirty="0">
-                <a:solidFill>
-                  <a:srgbClr val="6B5426"/>
-                </a:solidFill>
-                <a:latin typeface="Arial" pitchFamily="34" charset="0"/>
-                <a:ea typeface="Arial" pitchFamily="34" charset="-122"/>
-                <a:cs typeface="Arial" pitchFamily="34" charset="-120"/>
-              </a:rPr>
-              <a:t> ממוקד </a:t>
-            </a:r>
-            <a:r>
-              <a:rPr lang="en-US" sz="1400" b="1" dirty="0">
-                <a:solidFill>
-                  <a:srgbClr val="6B5426"/>
-                </a:solidFill>
-                <a:latin typeface="Arial" pitchFamily="34" charset="0"/>
-                <a:ea typeface="Arial" pitchFamily="34" charset="-122"/>
-                <a:cs typeface="Arial" pitchFamily="34" charset="-120"/>
-              </a:rPr>
-              <a:t>ולא מערכת מפלצתית </a:t>
-            </a:r>
-            <a:r>
-              <a:rPr lang="he-IL" sz="1400" b="1" dirty="0">
-                <a:solidFill>
-                  <a:srgbClr val="6B5426"/>
-                </a:solidFill>
-                <a:latin typeface="Arial" pitchFamily="34" charset="0"/>
-                <a:ea typeface="Arial" pitchFamily="34" charset="-122"/>
-                <a:cs typeface="Arial" pitchFamily="34" charset="-120"/>
-              </a:rPr>
-              <a:t>כדי להציג מוצר יציב, ברור ועובד</a:t>
-            </a:r>
-            <a:endParaRPr lang="en-US" sz="1400" dirty="0"/>
+            <a:endParaRPr lang="he-IL" sz="1400" b="1" dirty="0">
+              <a:solidFill>
+                <a:srgbClr val="6B5426"/>
+              </a:solidFill>
+              <a:ea typeface="Arial" pitchFamily="34" charset="-122"/>
+              <a:cs typeface="Arial" pitchFamily="34" charset="-120"/>
+            </a:endParaRPr>
           </a:p>
         </p:txBody>
       </p:sp>
@@ -4347,7 +4510,6 @@
                 <a:solidFill>
                   <a:srgbClr val="6B7280"/>
                 </a:solidFill>
-                <a:latin typeface="Arial" pitchFamily="34" charset="0"/>
                 <a:ea typeface="Arial" pitchFamily="34" charset="-122"/>
                 <a:cs typeface="Arial" pitchFamily="34" charset="-120"/>
               </a:rPr>
@@ -4357,6 +4519,94 @@
           </a:p>
         </p:txBody>
       </p:sp>
+      <p:pic>
+        <p:nvPicPr>
+          <p:cNvPr id="44" name="Picture 43">
+            <a:extLst>
+              <a:ext uri="{FF2B5EF4-FFF2-40B4-BE49-F238E27FC236}">
+                <a16:creationId xmlns:a16="http://schemas.microsoft.com/office/drawing/2014/main" id="{6350826B-80A0-B9E4-C544-EFFDCC7F01EA}"/>
+              </a:ext>
+            </a:extLst>
+          </p:cNvPr>
+          <p:cNvPicPr>
+            <a:picLocks noChangeAspect="1"/>
+          </p:cNvPicPr>
+          <p:nvPr/>
+        </p:nvPicPr>
+        <p:blipFill>
+          <a:blip r:embed="rId7"/>
+          <a:stretch>
+            <a:fillRect/>
+          </a:stretch>
+        </p:blipFill>
+        <p:spPr>
+          <a:xfrm>
+            <a:off x="6291072" y="4932806"/>
+            <a:ext cx="5481440" cy="1795797"/>
+          </a:xfrm>
+          <a:prstGeom prst="rect">
+            <a:avLst/>
+          </a:prstGeom>
+          <a:ln w="38100" cap="sq">
+            <a:solidFill>
+              <a:srgbClr val="000000"/>
+            </a:solidFill>
+            <a:prstDash val="solid"/>
+            <a:miter lim="800000"/>
+          </a:ln>
+          <a:effectLst>
+            <a:outerShdw blurRad="50800" dist="38100" dir="2700000" algn="tl" rotWithShape="0">
+              <a:srgbClr val="000000">
+                <a:alpha val="43000"/>
+              </a:srgbClr>
+            </a:outerShdw>
+          </a:effectLst>
+        </p:spPr>
+      </p:pic>
+      <p:pic>
+        <p:nvPicPr>
+          <p:cNvPr id="46" name="Picture 45">
+            <a:extLst>
+              <a:ext uri="{FF2B5EF4-FFF2-40B4-BE49-F238E27FC236}">
+                <a16:creationId xmlns:a16="http://schemas.microsoft.com/office/drawing/2014/main" id="{54F916E2-A57A-04BA-E989-2C1C5BE456A1}"/>
+              </a:ext>
+            </a:extLst>
+          </p:cNvPr>
+          <p:cNvPicPr>
+            <a:picLocks noChangeAspect="1"/>
+          </p:cNvPicPr>
+          <p:nvPr/>
+        </p:nvPicPr>
+        <p:blipFill>
+          <a:blip r:embed="rId8"/>
+          <a:stretch>
+            <a:fillRect/>
+          </a:stretch>
+        </p:blipFill>
+        <p:spPr>
+          <a:xfrm>
+            <a:off x="548640" y="4962428"/>
+            <a:ext cx="5481440" cy="1766176"/>
+          </a:xfrm>
+          <a:prstGeom prst="rect">
+            <a:avLst/>
+          </a:prstGeom>
+          <a:ln w="38100" cap="sq">
+            <a:solidFill>
+              <a:srgbClr val="000000"/>
+            </a:solidFill>
+            <a:prstDash val="solid"/>
+            <a:miter lim="800000"/>
+          </a:ln>
+          <a:effectLst>
+            <a:outerShdw blurRad="50800" dist="38100" dir="2700000" algn="tl" rotWithShape="0">
+              <a:srgbClr val="000000">
+                <a:alpha val="43000"/>
+              </a:srgbClr>
+            </a:outerShdw>
+          </a:effectLst>
+        </p:spPr>
+      </p:pic>
     </p:spTree>
   </p:cSld>
   <p:clrMapOvr>
@@ -4398,8 +4648,8 @@
         </p:nvSpPr>
         <p:spPr>
           <a:xfrm>
-            <a:off x="548640" y="411480"/>
-            <a:ext cx="11091672" cy="548640"/>
+            <a:off x="3168396" y="338328"/>
+            <a:ext cx="6016752" cy="548640"/>
           </a:xfrm>
           <a:prstGeom prst="rect">
             <a:avLst/>
@@ -4415,17 +4665,26 @@
               <a:buNone/>
             </a:pPr>
             <a:r>
-              <a:rPr lang="en-US" sz="3800" b="1" dirty="0">
+              <a:rPr lang="he-IL" sz="3500" b="1" dirty="0">
                 <a:solidFill>
                   <a:srgbClr val="F5F1EA"/>
                 </a:solidFill>
                 <a:latin typeface="Arial" pitchFamily="34" charset="0"/>
-                <a:ea typeface="Arial" pitchFamily="34" charset="-122"/>
-                <a:cs typeface="Arial" pitchFamily="34" charset="-120"/>
-              </a:rPr>
-              <a:t>תהליך Vibe Coding מקצועי</a:t>
-            </a:r>
-            <a:endParaRPr lang="en-US" sz="3800" dirty="0"/>
+                <a:cs typeface="Arial" pitchFamily="34" charset="-120"/>
+              </a:rPr>
+              <a:t>תהליך עבודה ב- </a:t>
+            </a:r>
+            <a:r>
+              <a:rPr lang="en-US" sz="3500" b="1" dirty="0">
+                <a:solidFill>
+                  <a:srgbClr val="F5F1EA"/>
+                </a:solidFill>
+                <a:latin typeface="Arial" pitchFamily="34" charset="0"/>
+                <a:cs typeface="Arial" pitchFamily="34" charset="-120"/>
+              </a:rPr>
+              <a:t>Vibe Coding</a:t>
+            </a:r>
+            <a:endParaRPr lang="en-US" sz="3500" dirty="0"/>
           </a:p>
         </p:txBody>
       </p:sp>
@@ -4437,8 +4696,8 @@
         </p:nvSpPr>
         <p:spPr>
           <a:xfrm>
-            <a:off x="548640" y="987552"/>
-            <a:ext cx="11091672" cy="329184"/>
+            <a:off x="3322320" y="978408"/>
+            <a:ext cx="5544312" cy="329184"/>
           </a:xfrm>
           <a:prstGeom prst="rect">
             <a:avLst/>
@@ -4450,80 +4709,102 @@
           <a:bodyPr wrap="square" lIns="0" tIns="0" rIns="0" bIns="0" rtlCol="0" anchor="ctr"/>
           <a:lstStyle/>
           <a:p>
+            <a:pPr algn="r" rtl="1"/>
+            <a:r>
+              <a:rPr lang="he-IL" sz="1400" b="1" dirty="0">
+                <a:solidFill>
+                  <a:srgbClr val="C5A25B"/>
+                </a:solidFill>
+                <a:ea typeface="Arial" pitchFamily="34" charset="-122"/>
+                <a:cs typeface="Arial" pitchFamily="34" charset="-120"/>
+              </a:rPr>
+              <a:t>תכנון לפי קוד |</a:t>
+            </a:r>
+            <a:r>
+              <a:rPr lang="en-US" sz="1400" b="1" dirty="0">
+                <a:solidFill>
+                  <a:srgbClr val="C5A25B"/>
+                </a:solidFill>
+                <a:ea typeface="Arial" pitchFamily="34" charset="-122"/>
+                <a:cs typeface="Arial" pitchFamily="34" charset="-120"/>
+              </a:rPr>
+              <a:t> </a:t>
+            </a:r>
+            <a:r>
+              <a:rPr lang="he-IL" sz="1400" b="1" dirty="0">
+                <a:solidFill>
+                  <a:srgbClr val="C5A25B"/>
+                </a:solidFill>
+                <a:ea typeface="Arial" pitchFamily="34" charset="-122"/>
+                <a:cs typeface="Arial" pitchFamily="34" charset="-120"/>
+              </a:rPr>
+              <a:t>תיעוד כל לוגיקת עבודה | תיעוד בדיקות | דגשים לכל תפקיד</a:t>
+            </a:r>
+          </a:p>
+          <a:p>
             <a:pPr marL="0" indent="0" algn="r" rtl="1">
               <a:buNone/>
             </a:pPr>
-            <a:r>
-              <a:rPr lang="en-US" sz="1500" dirty="0">
-                <a:solidFill>
-                  <a:srgbClr val="9BA3AE"/>
+            <a:endParaRPr lang="en-US" sz="1450" dirty="0"/>
+          </a:p>
+        </p:txBody>
+      </p:sp>
+      <p:sp>
+        <p:nvSpPr>
+          <p:cNvPr id="4" name="Shape 2"/>
+          <p:cNvSpPr/>
+          <p:nvPr/>
+        </p:nvSpPr>
+        <p:spPr>
+          <a:xfrm>
+            <a:off x="10602468" y="1572768"/>
+            <a:ext cx="475488" cy="475488"/>
+          </a:xfrm>
+          <a:prstGeom prst="ellipse">
+            <a:avLst/>
+          </a:prstGeom>
+          <a:solidFill>
+            <a:srgbClr val="C9A96A"/>
+          </a:solidFill>
+          <a:ln/>
+        </p:spPr>
+      </p:sp>
+      <p:sp>
+        <p:nvSpPr>
+          <p:cNvPr id="5" name="Text 3"/>
+          <p:cNvSpPr/>
+          <p:nvPr/>
+        </p:nvSpPr>
+        <p:spPr>
+          <a:xfrm>
+            <a:off x="10602468" y="1572768"/>
+            <a:ext cx="475488" cy="475488"/>
+          </a:xfrm>
+          <a:prstGeom prst="rect">
+            <a:avLst/>
+          </a:prstGeom>
+          <a:noFill/>
+          <a:ln/>
+        </p:spPr>
+        <p:txBody>
+          <a:bodyPr wrap="square" lIns="0" tIns="0" rIns="0" bIns="0" rtlCol="0" anchor="ctr"/>
+          <a:lstStyle/>
+          <a:p>
+            <a:pPr marL="0" indent="0" algn="ctr">
+              <a:buNone/>
+            </a:pPr>
+            <a:r>
+              <a:rPr lang="en-US" sz="1600" b="1" dirty="0">
+                <a:solidFill>
+                  <a:srgbClr val="1A1F26"/>
                 </a:solidFill>
                 <a:latin typeface="Arial" pitchFamily="34" charset="0"/>
                 <a:ea typeface="Arial" pitchFamily="34" charset="-122"/>
                 <a:cs typeface="Arial" pitchFamily="34" charset="-120"/>
               </a:rPr>
-              <a:t>תכנון לפני קוד, עבודה בשלבים קטנים, בדיקה לפני המשך</a:t>
-            </a:r>
-            <a:endParaRPr lang="en-US" sz="1500" dirty="0"/>
-          </a:p>
-        </p:txBody>
-      </p:sp>
-      <p:sp>
-        <p:nvSpPr>
-          <p:cNvPr id="4" name="Shape 2"/>
-          <p:cNvSpPr/>
-          <p:nvPr/>
-        </p:nvSpPr>
-        <p:spPr>
-          <a:xfrm>
-            <a:off x="10575036" y="2084832"/>
-            <a:ext cx="530352" cy="530352"/>
-          </a:xfrm>
-          <a:prstGeom prst="ellipse">
-            <a:avLst/>
-          </a:prstGeom>
-          <a:solidFill>
-            <a:srgbClr val="C9A96A"/>
-          </a:solidFill>
-          <a:ln/>
-        </p:spPr>
-      </p:sp>
-      <p:sp>
-        <p:nvSpPr>
-          <p:cNvPr id="5" name="Text 3"/>
-          <p:cNvSpPr/>
-          <p:nvPr/>
-        </p:nvSpPr>
-        <p:spPr>
-          <a:xfrm>
-            <a:off x="10575036" y="2084832"/>
-            <a:ext cx="530352" cy="530352"/>
-          </a:xfrm>
-          <a:prstGeom prst="rect">
-            <a:avLst/>
-          </a:prstGeom>
-          <a:noFill/>
-          <a:ln/>
-        </p:spPr>
-        <p:txBody>
-          <a:bodyPr wrap="square" lIns="0" tIns="0" rIns="0" bIns="0" rtlCol="0" anchor="ctr"/>
-          <a:lstStyle/>
-          <a:p>
-            <a:pPr marL="0" indent="0" algn="ctr">
-              <a:buNone/>
-            </a:pPr>
-            <a:r>
-              <a:rPr lang="en-US" sz="1700" b="1" dirty="0">
-                <a:solidFill>
-                  <a:srgbClr val="1A1F26"/>
-                </a:solidFill>
-                <a:latin typeface="Arial" pitchFamily="34" charset="0"/>
-                <a:ea typeface="Arial" pitchFamily="34" charset="-122"/>
-                <a:cs typeface="Arial" pitchFamily="34" charset="-120"/>
-              </a:rPr>
               <a:t>1</a:t>
             </a:r>
-            <a:endParaRPr lang="en-US" sz="1700" dirty="0"/>
+            <a:endParaRPr lang="en-US" sz="1600" dirty="0"/>
           </a:p>
         </p:txBody>
       </p:sp>
@@ -4535,8 +4816,8 @@
         </p:nvSpPr>
         <p:spPr>
           <a:xfrm>
-            <a:off x="10099548" y="2743200"/>
-            <a:ext cx="1481328" cy="658368"/>
+            <a:off x="10099548" y="2139696"/>
+            <a:ext cx="1481328" cy="566928"/>
           </a:xfrm>
           <a:prstGeom prst="rect">
             <a:avLst/>
@@ -4550,12 +4831,12 @@
           <a:p>
             <a:pPr marL="0" indent="0" algn="ctr" rtl="1">
               <a:lnSpc>
-                <a:spcPts val="1500"/>
+                <a:spcPts val="1400"/>
               </a:lnSpc>
               <a:buNone/>
             </a:pPr>
             <a:r>
-              <a:rPr lang="en-US" sz="1200" dirty="0">
+              <a:rPr lang="en-US" sz="1150" dirty="0">
                 <a:solidFill>
                   <a:srgbClr val="E8E4DC"/>
                 </a:solidFill>
@@ -4565,7 +4846,7 @@
               </a:rPr>
               <a:t>הגדרת בעיה אמיתית</a:t>
             </a:r>
-            <a:endParaRPr lang="en-US" sz="1200" dirty="0"/>
+            <a:endParaRPr lang="en-US" sz="1150" dirty="0"/>
           </a:p>
         </p:txBody>
       </p:sp>
@@ -4577,8 +4858,8 @@
         </p:nvSpPr>
         <p:spPr>
           <a:xfrm>
-            <a:off x="8993124" y="2084832"/>
-            <a:ext cx="530352" cy="530352"/>
+            <a:off x="9020556" y="1572768"/>
+            <a:ext cx="475488" cy="475488"/>
           </a:xfrm>
           <a:prstGeom prst="ellipse">
             <a:avLst/>
@@ -4597,8 +4878,8 @@
         </p:nvSpPr>
         <p:spPr>
           <a:xfrm>
-            <a:off x="8993124" y="2084832"/>
-            <a:ext cx="530352" cy="530352"/>
+            <a:off x="9020556" y="1572768"/>
+            <a:ext cx="475488" cy="475488"/>
           </a:xfrm>
           <a:prstGeom prst="rect">
             <a:avLst/>
@@ -4614,7 +4895,7 @@
               <a:buNone/>
             </a:pPr>
             <a:r>
-              <a:rPr lang="en-US" sz="1700" b="1" dirty="0">
+              <a:rPr lang="en-US" sz="1600" b="1" dirty="0">
                 <a:solidFill>
                   <a:srgbClr val="1A1F26"/>
                 </a:solidFill>
@@ -4624,7 +4905,7 @@
               </a:rPr>
               <a:t>2</a:t>
             </a:r>
-            <a:endParaRPr lang="en-US" sz="1700" dirty="0"/>
+            <a:endParaRPr lang="en-US" sz="1600" dirty="0"/>
           </a:p>
         </p:txBody>
       </p:sp>
@@ -4636,8 +4917,8 @@
         </p:nvSpPr>
         <p:spPr>
           <a:xfrm>
-            <a:off x="8517636" y="2743200"/>
-            <a:ext cx="1481328" cy="658368"/>
+            <a:off x="8517636" y="2139696"/>
+            <a:ext cx="1481328" cy="566928"/>
           </a:xfrm>
           <a:prstGeom prst="rect">
             <a:avLst/>
@@ -4651,12 +4932,12 @@
           <a:p>
             <a:pPr marL="0" indent="0" algn="ctr" rtl="1">
               <a:lnSpc>
-                <a:spcPts val="1500"/>
+                <a:spcPts val="1400"/>
               </a:lnSpc>
               <a:buNone/>
             </a:pPr>
             <a:r>
-              <a:rPr lang="en-US" sz="1200" dirty="0">
+              <a:rPr lang="en-US" sz="1150" dirty="0">
                 <a:solidFill>
                   <a:srgbClr val="E8E4DC"/>
                 </a:solidFill>
@@ -4666,7 +4947,7 @@
               </a:rPr>
               <a:t>כתיבת PRD</a:t>
             </a:r>
-            <a:endParaRPr lang="en-US" sz="1200" dirty="0"/>
+            <a:endParaRPr lang="en-US" sz="1150" dirty="0"/>
           </a:p>
         </p:txBody>
       </p:sp>
@@ -4678,8 +4959,8 @@
         </p:nvSpPr>
         <p:spPr>
           <a:xfrm>
-            <a:off x="7411212" y="2084832"/>
-            <a:ext cx="530352" cy="530352"/>
+            <a:off x="7438644" y="1572768"/>
+            <a:ext cx="475488" cy="475488"/>
           </a:xfrm>
           <a:prstGeom prst="ellipse">
             <a:avLst/>
@@ -4698,8 +4979,8 @@
         </p:nvSpPr>
         <p:spPr>
           <a:xfrm>
-            <a:off x="7411212" y="2084832"/>
-            <a:ext cx="530352" cy="530352"/>
+            <a:off x="7438644" y="1572768"/>
+            <a:ext cx="475488" cy="475488"/>
           </a:xfrm>
           <a:prstGeom prst="rect">
             <a:avLst/>
@@ -4715,7 +4996,7 @@
               <a:buNone/>
             </a:pPr>
             <a:r>
-              <a:rPr lang="en-US" sz="1700" b="1" dirty="0">
+              <a:rPr lang="en-US" sz="1600" b="1" dirty="0">
                 <a:solidFill>
                   <a:srgbClr val="1A1F26"/>
                 </a:solidFill>
@@ -4725,7 +5006,7 @@
               </a:rPr>
               <a:t>3</a:t>
             </a:r>
-            <a:endParaRPr lang="en-US" sz="1700" dirty="0"/>
+            <a:endParaRPr lang="en-US" sz="1600" dirty="0"/>
           </a:p>
         </p:txBody>
       </p:sp>
@@ -4737,8 +5018,8 @@
         </p:nvSpPr>
         <p:spPr>
           <a:xfrm>
-            <a:off x="6935724" y="2743200"/>
-            <a:ext cx="1481328" cy="658368"/>
+            <a:off x="6935724" y="2139696"/>
+            <a:ext cx="1481328" cy="566928"/>
           </a:xfrm>
           <a:prstGeom prst="rect">
             <a:avLst/>
@@ -4752,12 +5033,12 @@
           <a:p>
             <a:pPr marL="0" indent="0" algn="ctr" rtl="1">
               <a:lnSpc>
-                <a:spcPts val="1500"/>
+                <a:spcPts val="1400"/>
               </a:lnSpc>
               <a:buNone/>
             </a:pPr>
             <a:r>
-              <a:rPr lang="en-US" sz="1200" dirty="0">
+              <a:rPr lang="en-US" sz="1150" dirty="0">
                 <a:solidFill>
                   <a:srgbClr val="E8E4DC"/>
                 </a:solidFill>
@@ -4767,7 +5048,7 @@
               </a:rPr>
               <a:t>חלוקת תפקידים</a:t>
             </a:r>
-            <a:endParaRPr lang="en-US" sz="1200" dirty="0"/>
+            <a:endParaRPr lang="en-US" sz="1150" dirty="0"/>
           </a:p>
         </p:txBody>
       </p:sp>
@@ -4779,8 +5060,8 @@
         </p:nvSpPr>
         <p:spPr>
           <a:xfrm>
-            <a:off x="5829300" y="2084832"/>
-            <a:ext cx="530352" cy="530352"/>
+            <a:off x="5856732" y="1572768"/>
+            <a:ext cx="475488" cy="475488"/>
           </a:xfrm>
           <a:prstGeom prst="ellipse">
             <a:avLst/>
@@ -4799,8 +5080,8 @@
         </p:nvSpPr>
         <p:spPr>
           <a:xfrm>
-            <a:off x="5829300" y="2084832"/>
-            <a:ext cx="530352" cy="530352"/>
+            <a:off x="5856732" y="1572768"/>
+            <a:ext cx="475488" cy="475488"/>
           </a:xfrm>
           <a:prstGeom prst="rect">
             <a:avLst/>
@@ -4816,7 +5097,7 @@
               <a:buNone/>
             </a:pPr>
             <a:r>
-              <a:rPr lang="en-US" sz="1700" b="1" dirty="0">
+              <a:rPr lang="en-US" sz="1600" b="1" dirty="0">
                 <a:solidFill>
                   <a:srgbClr val="1A1F26"/>
                 </a:solidFill>
@@ -4826,7 +5107,7 @@
               </a:rPr>
               <a:t>4</a:t>
             </a:r>
-            <a:endParaRPr lang="en-US" sz="1700" dirty="0"/>
+            <a:endParaRPr lang="en-US" sz="1600" dirty="0"/>
           </a:p>
         </p:txBody>
       </p:sp>
@@ -4838,8 +5119,8 @@
         </p:nvSpPr>
         <p:spPr>
           <a:xfrm>
-            <a:off x="5353812" y="2743200"/>
-            <a:ext cx="1481328" cy="658368"/>
+            <a:off x="5353812" y="2139696"/>
+            <a:ext cx="1481328" cy="566928"/>
           </a:xfrm>
           <a:prstGeom prst="rect">
             <a:avLst/>
@@ -4853,12 +5134,12 @@
           <a:p>
             <a:pPr marL="0" indent="0" algn="ctr" rtl="1">
               <a:lnSpc>
-                <a:spcPts val="1500"/>
+                <a:spcPts val="1400"/>
               </a:lnSpc>
               <a:buNone/>
             </a:pPr>
             <a:r>
-              <a:rPr lang="en-US" sz="1200" dirty="0">
+              <a:rPr lang="en-US" sz="1150" dirty="0">
                 <a:solidFill>
                   <a:srgbClr val="E8E4DC"/>
                 </a:solidFill>
@@ -4868,7 +5149,7 @@
               </a:rPr>
               <a:t>בניית MVP</a:t>
             </a:r>
-            <a:endParaRPr lang="en-US" sz="1200" dirty="0"/>
+            <a:endParaRPr lang="en-US" sz="1150" dirty="0"/>
           </a:p>
         </p:txBody>
       </p:sp>
@@ -4880,8 +5161,8 @@
         </p:nvSpPr>
         <p:spPr>
           <a:xfrm>
-            <a:off x="4247388" y="2084832"/>
-            <a:ext cx="530352" cy="530352"/>
+            <a:off x="4274820" y="1572768"/>
+            <a:ext cx="475488" cy="475488"/>
           </a:xfrm>
           <a:prstGeom prst="ellipse">
             <a:avLst/>
@@ -4900,8 +5181,8 @@
         </p:nvSpPr>
         <p:spPr>
           <a:xfrm>
-            <a:off x="4247388" y="2084832"/>
-            <a:ext cx="530352" cy="530352"/>
+            <a:off x="4274820" y="1572768"/>
+            <a:ext cx="475488" cy="475488"/>
           </a:xfrm>
           <a:prstGeom prst="rect">
             <a:avLst/>
@@ -4917,7 +5198,7 @@
               <a:buNone/>
             </a:pPr>
             <a:r>
-              <a:rPr lang="en-US" sz="1700" b="1" dirty="0">
+              <a:rPr lang="en-US" sz="1600" b="1" dirty="0">
                 <a:solidFill>
                   <a:srgbClr val="1A1F26"/>
                 </a:solidFill>
@@ -4927,7 +5208,7 @@
               </a:rPr>
               <a:t>5</a:t>
             </a:r>
-            <a:endParaRPr lang="en-US" sz="1700" dirty="0"/>
+            <a:endParaRPr lang="en-US" sz="1600" dirty="0"/>
           </a:p>
         </p:txBody>
       </p:sp>
@@ -4939,8 +5220,8 @@
         </p:nvSpPr>
         <p:spPr>
           <a:xfrm>
-            <a:off x="3771900" y="2743200"/>
-            <a:ext cx="1481328" cy="658368"/>
+            <a:off x="3771900" y="2139696"/>
+            <a:ext cx="1481328" cy="566928"/>
           </a:xfrm>
           <a:prstGeom prst="rect">
             <a:avLst/>
@@ -4954,12 +5235,12 @@
           <a:p>
             <a:pPr marL="0" indent="0" algn="ctr" rtl="1">
               <a:lnSpc>
-                <a:spcPts val="1500"/>
+                <a:spcPts val="1400"/>
               </a:lnSpc>
               <a:buNone/>
             </a:pPr>
             <a:r>
-              <a:rPr lang="en-US" sz="1200" dirty="0">
+              <a:rPr lang="en-US" sz="1150" dirty="0">
                 <a:solidFill>
                   <a:srgbClr val="E8E4DC"/>
                 </a:solidFill>
@@ -4969,7 +5250,7 @@
               </a:rPr>
               <a:t>בדיקות ושיפורים</a:t>
             </a:r>
-            <a:endParaRPr lang="en-US" sz="1200" dirty="0"/>
+            <a:endParaRPr lang="en-US" sz="1150" dirty="0"/>
           </a:p>
         </p:txBody>
       </p:sp>
@@ -4981,8 +5262,8 @@
         </p:nvSpPr>
         <p:spPr>
           <a:xfrm>
-            <a:off x="2665476" y="2084832"/>
-            <a:ext cx="530352" cy="530352"/>
+            <a:off x="2692908" y="1572768"/>
+            <a:ext cx="475488" cy="475488"/>
           </a:xfrm>
           <a:prstGeom prst="ellipse">
             <a:avLst/>
@@ -5001,8 +5282,8 @@
         </p:nvSpPr>
         <p:spPr>
           <a:xfrm>
-            <a:off x="2665476" y="2084832"/>
-            <a:ext cx="530352" cy="530352"/>
+            <a:off x="2692908" y="1572768"/>
+            <a:ext cx="475488" cy="475488"/>
           </a:xfrm>
           <a:prstGeom prst="rect">
             <a:avLst/>
@@ -5018,7 +5299,7 @@
               <a:buNone/>
             </a:pPr>
             <a:r>
-              <a:rPr lang="en-US" sz="1700" b="1" dirty="0">
+              <a:rPr lang="en-US" sz="1600" b="1" dirty="0">
                 <a:solidFill>
                   <a:srgbClr val="1A1F26"/>
                 </a:solidFill>
@@ -5028,7 +5309,7 @@
               </a:rPr>
               <a:t>6</a:t>
             </a:r>
-            <a:endParaRPr lang="en-US" sz="1700" dirty="0"/>
+            <a:endParaRPr lang="en-US" sz="1600" dirty="0"/>
           </a:p>
         </p:txBody>
       </p:sp>
@@ -5040,8 +5321,8 @@
         </p:nvSpPr>
         <p:spPr>
           <a:xfrm>
-            <a:off x="2189988" y="2743200"/>
-            <a:ext cx="1481328" cy="658368"/>
+            <a:off x="2189988" y="2139696"/>
+            <a:ext cx="1481328" cy="566928"/>
           </a:xfrm>
           <a:prstGeom prst="rect">
             <a:avLst/>
@@ -5055,12 +5336,12 @@
           <a:p>
             <a:pPr marL="0" indent="0" algn="ctr" rtl="1">
               <a:lnSpc>
-                <a:spcPts val="1500"/>
+                <a:spcPts val="1400"/>
               </a:lnSpc>
               <a:buNone/>
             </a:pPr>
             <a:r>
-              <a:rPr lang="en-US" sz="1200" dirty="0">
+              <a:rPr lang="en-US" sz="1150" dirty="0">
                 <a:solidFill>
                   <a:srgbClr val="E8E4DC"/>
                 </a:solidFill>
@@ -5070,7 +5351,7 @@
               </a:rPr>
               <a:t>תיעוד החלטות</a:t>
             </a:r>
-            <a:endParaRPr lang="en-US" sz="1200" dirty="0"/>
+            <a:endParaRPr lang="en-US" sz="1150" dirty="0"/>
           </a:p>
         </p:txBody>
       </p:sp>
@@ -5082,8 +5363,8 @@
         </p:nvSpPr>
         <p:spPr>
           <a:xfrm>
-            <a:off x="1083564" y="2084832"/>
-            <a:ext cx="530352" cy="530352"/>
+            <a:off x="1110996" y="1572768"/>
+            <a:ext cx="475488" cy="475488"/>
           </a:xfrm>
           <a:prstGeom prst="ellipse">
             <a:avLst/>
@@ -5102,8 +5383,8 @@
         </p:nvSpPr>
         <p:spPr>
           <a:xfrm>
-            <a:off x="1083564" y="2084832"/>
-            <a:ext cx="530352" cy="530352"/>
+            <a:off x="1110996" y="1572768"/>
+            <a:ext cx="475488" cy="475488"/>
           </a:xfrm>
           <a:prstGeom prst="rect">
             <a:avLst/>
@@ -5119,7 +5400,7 @@
               <a:buNone/>
             </a:pPr>
             <a:r>
-              <a:rPr lang="en-US" sz="1700" b="1" dirty="0">
+              <a:rPr lang="en-US" sz="1600" b="1" dirty="0">
                 <a:solidFill>
                   <a:srgbClr val="1A1F26"/>
                 </a:solidFill>
@@ -5129,7 +5410,7 @@
               </a:rPr>
               <a:t>7</a:t>
             </a:r>
-            <a:endParaRPr lang="en-US" sz="1700" dirty="0"/>
+            <a:endParaRPr lang="en-US" sz="1600" dirty="0"/>
           </a:p>
         </p:txBody>
       </p:sp>
@@ -5141,8 +5422,8 @@
         </p:nvSpPr>
         <p:spPr>
           <a:xfrm>
-            <a:off x="608076" y="2743200"/>
-            <a:ext cx="1481328" cy="658368"/>
+            <a:off x="608076" y="2139696"/>
+            <a:ext cx="1481328" cy="566928"/>
           </a:xfrm>
           <a:prstGeom prst="rect">
             <a:avLst/>
@@ -5156,12 +5437,12 @@
           <a:p>
             <a:pPr marL="0" indent="0" algn="ctr" rtl="1">
               <a:lnSpc>
-                <a:spcPts val="1500"/>
+                <a:spcPts val="1400"/>
               </a:lnSpc>
               <a:buNone/>
             </a:pPr>
             <a:r>
-              <a:rPr lang="en-US" sz="1200" dirty="0">
+              <a:rPr lang="en-US" sz="1150" dirty="0">
                 <a:solidFill>
                   <a:srgbClr val="E8E4DC"/>
                 </a:solidFill>
@@ -5171,74 +5452,62 @@
               </a:rPr>
               <a:t>הכנה להצגה</a:t>
             </a:r>
-            <a:endParaRPr lang="en-US" sz="1200" dirty="0"/>
-          </a:p>
-        </p:txBody>
-      </p:sp>
-      <p:sp>
-        <p:nvSpPr>
-          <p:cNvPr id="25" name="Text 23"/>
-          <p:cNvSpPr/>
-          <p:nvPr/>
-        </p:nvSpPr>
-        <p:spPr>
-          <a:xfrm>
-            <a:off x="548640" y="3639312"/>
-            <a:ext cx="11091672" cy="365760"/>
-          </a:xfrm>
-          <a:prstGeom prst="rect">
-            <a:avLst/>
-          </a:prstGeom>
-          <a:noFill/>
-          <a:ln/>
-        </p:spPr>
-        <p:txBody>
-          <a:bodyPr wrap="square" lIns="0" tIns="0" rIns="0" bIns="0" rtlCol="0" anchor="ctr"/>
-          <a:lstStyle/>
-          <a:p>
-            <a:pPr marL="0" indent="0" algn="r" rtl="1">
-              <a:buNone/>
-            </a:pPr>
-            <a:r>
-              <a:rPr lang="en-US" sz="2000" b="1" dirty="0">
-                <a:solidFill>
-                  <a:srgbClr val="C9A96A"/>
-                </a:solidFill>
-                <a:latin typeface="Arial" pitchFamily="34" charset="0"/>
-                <a:ea typeface="Arial" pitchFamily="34" charset="-122"/>
-                <a:cs typeface="Arial" pitchFamily="34" charset="-120"/>
-              </a:rPr>
-              <a:t>החלטות מוצר מרכזיות</a:t>
-            </a:r>
-            <a:endParaRPr lang="en-US" sz="2000" dirty="0"/>
-          </a:p>
-        </p:txBody>
-      </p:sp>
-      <p:sp>
-        <p:nvSpPr>
-          <p:cNvPr id="26" name="Shape 24"/>
-          <p:cNvSpPr/>
-          <p:nvPr/>
-        </p:nvSpPr>
-        <p:spPr>
-          <a:xfrm>
-            <a:off x="8115300" y="4114800"/>
-            <a:ext cx="3602736" cy="1133856"/>
+            <a:endParaRPr lang="en-US" sz="1150" dirty="0"/>
+          </a:p>
+        </p:txBody>
+      </p:sp>
+      <p:sp>
+        <p:nvSpPr>
+          <p:cNvPr id="25" name="Shape 23"/>
+          <p:cNvSpPr/>
+          <p:nvPr/>
+        </p:nvSpPr>
+        <p:spPr>
+          <a:xfrm>
+            <a:off x="6291072" y="3017520"/>
+            <a:ext cx="5349240" cy="3291840"/>
           </a:xfrm>
           <a:prstGeom prst="roundRect">
             <a:avLst>
-              <a:gd name="adj" fmla="val 8065"/>
+              <a:gd name="adj" fmla="val 3333"/>
             </a:avLst>
           </a:prstGeom>
           <a:solidFill>
             <a:srgbClr val="252C36"/>
+          </a:solidFill>
+          <a:ln w="12700">
+            <a:solidFill>
+              <a:srgbClr val="C9A96A">
+                <a:alpha val="45000"/>
+              </a:srgbClr>
+            </a:solidFill>
+            <a:prstDash val="solid"/>
+          </a:ln>
+        </p:spPr>
+      </p:sp>
+      <p:sp>
+        <p:nvSpPr>
+          <p:cNvPr id="26" name="Shape 24"/>
+          <p:cNvSpPr/>
+          <p:nvPr/>
+        </p:nvSpPr>
+        <p:spPr>
+          <a:xfrm>
+            <a:off x="10853928" y="3218688"/>
+            <a:ext cx="512064" cy="512064"/>
+          </a:xfrm>
+          <a:prstGeom prst="ellipse">
+            <a:avLst/>
+          </a:prstGeom>
+          <a:solidFill>
+            <a:srgbClr val="C9A96A"/>
           </a:solidFill>
           <a:ln/>
         </p:spPr>
       </p:sp>
       <p:pic>
         <p:nvPicPr>
-          <p:cNvPr id="27" name="Image 0" descr="/home/claude/deck/icons/scissors_gold.png"/>
+          <p:cNvPr id="27" name="Image 0" descr="/home/claude/deck/icons/folder_dark.png"/>
           <p:cNvPicPr>
             <a:picLocks noChangeAspect="1"/>
           </p:cNvPicPr>
@@ -5252,8 +5521,8 @@
         </p:blipFill>
         <p:spPr>
           <a:xfrm>
-            <a:off x="11004804" y="4370832"/>
-            <a:ext cx="329184" cy="329184"/>
+            <a:off x="10981944" y="3346704"/>
+            <a:ext cx="256032" cy="256032"/>
           </a:xfrm>
           <a:prstGeom prst="rect">
             <a:avLst/>
@@ -5268,8 +5537,8 @@
         </p:nvSpPr>
         <p:spPr>
           <a:xfrm>
-            <a:off x="8407908" y="4297680"/>
-            <a:ext cx="2596896" cy="384048"/>
+            <a:off x="6601968" y="3236976"/>
+            <a:ext cx="4160520" cy="475488"/>
           </a:xfrm>
           <a:prstGeom prst="rect">
             <a:avLst/>
@@ -5285,7 +5554,7 @@
               <a:buNone/>
             </a:pPr>
             <a:r>
-              <a:rPr lang="en-US" sz="1400" b="1" dirty="0">
+              <a:rPr lang="en-US" sz="1700" b="1" dirty="0">
                 <a:solidFill>
                   <a:srgbClr val="F5F1EA"/>
                 </a:solidFill>
@@ -5293,9 +5562,9 @@
                 <a:ea typeface="Arial" pitchFamily="34" charset="-122"/>
                 <a:cs typeface="Arial" pitchFamily="34" charset="-120"/>
               </a:rPr>
-              <a:t>מספרה אחת בלבד</a:t>
-            </a:r>
-            <a:endParaRPr lang="en-US" sz="1400" dirty="0"/>
+              <a:t>התיעוד שליווה כל שלב</a:t>
+            </a:r>
+            <a:endParaRPr lang="en-US" sz="1700" dirty="0"/>
           </a:p>
         </p:txBody>
       </p:sp>
@@ -5307,62 +5576,40 @@
         </p:nvSpPr>
         <p:spPr>
           <a:xfrm>
-            <a:off x="8407908" y="4718304"/>
-            <a:ext cx="3017520" cy="347472"/>
-          </a:xfrm>
-          <a:prstGeom prst="rect">
-            <a:avLst/>
-          </a:prstGeom>
-          <a:noFill/>
-          <a:ln/>
-        </p:spPr>
-        <p:txBody>
-          <a:bodyPr wrap="square" lIns="0" tIns="0" rIns="0" bIns="0" rtlCol="0" anchor="t"/>
-          <a:lstStyle/>
-          <a:p>
-            <a:pPr marL="0" indent="0" algn="r" rtl="1">
-              <a:buNone/>
-            </a:pPr>
-            <a:r>
-              <a:rPr lang="en-US" sz="1200" dirty="0">
-                <a:solidFill>
-                  <a:srgbClr val="9BA3AE"/>
-                </a:solidFill>
-                <a:latin typeface="Arial" pitchFamily="34" charset="0"/>
-                <a:ea typeface="Arial" pitchFamily="34" charset="-122"/>
-                <a:cs typeface="Arial" pitchFamily="34" charset="-120"/>
-              </a:rPr>
-              <a:t>מיקוד במקום התפזרות</a:t>
-            </a:r>
-            <a:endParaRPr lang="en-US" sz="1200" dirty="0"/>
-          </a:p>
-        </p:txBody>
-      </p:sp>
-      <p:sp>
-        <p:nvSpPr>
-          <p:cNvPr id="30" name="Shape 27"/>
-          <p:cNvSpPr/>
-          <p:nvPr/>
-        </p:nvSpPr>
-        <p:spPr>
-          <a:xfrm>
-            <a:off x="4293108" y="4114800"/>
-            <a:ext cx="3602736" cy="1133856"/>
-          </a:xfrm>
-          <a:prstGeom prst="roundRect">
-            <a:avLst>
-              <a:gd name="adj" fmla="val 8065"/>
-            </a:avLst>
-          </a:prstGeom>
-          <a:solidFill>
-            <a:srgbClr val="252C36"/>
-          </a:solidFill>
-          <a:ln/>
-        </p:spPr>
+            <a:off x="6601968" y="3730752"/>
+            <a:ext cx="2377440" cy="274320"/>
+          </a:xfrm>
+          <a:prstGeom prst="rect">
+            <a:avLst/>
+          </a:prstGeom>
+          <a:noFill/>
+          <a:ln/>
+        </p:spPr>
+        <p:txBody>
+          <a:bodyPr wrap="square" lIns="0" tIns="0" rIns="0" bIns="0" rtlCol="0" anchor="ctr"/>
+          <a:lstStyle/>
+          <a:p>
+            <a:pPr marL="0" indent="0" algn="l">
+              <a:buNone/>
+            </a:pPr>
+            <a:r>
+              <a:rPr lang="en-US" sz="1100" b="1" dirty="0">
+                <a:solidFill>
+                  <a:srgbClr val="C9A96A"/>
+                </a:solidFill>
+                <a:latin typeface="Courier New" pitchFamily="34" charset="0"/>
+                <a:ea typeface="Courier New" pitchFamily="34" charset="-122"/>
+                <a:cs typeface="Courier New" pitchFamily="34" charset="-120"/>
+              </a:rPr>
+              <a:t>VIBE_CODING/</a:t>
+            </a:r>
+            <a:endParaRPr lang="en-US" sz="1100" dirty="0"/>
+          </a:p>
+        </p:txBody>
       </p:sp>
       <p:pic>
         <p:nvPicPr>
-          <p:cNvPr id="31" name="Image 1" descr="/home/claude/deck/icons/database_gold.png"/>
+          <p:cNvPr id="30" name="Image 1" descr="/home/claude/deck/icons/filelines_gold.png"/>
           <p:cNvPicPr>
             <a:picLocks noChangeAspect="1"/>
           </p:cNvPicPr>
@@ -5376,8 +5623,8 @@
         </p:blipFill>
         <p:spPr>
           <a:xfrm>
-            <a:off x="7182612" y="4370832"/>
-            <a:ext cx="329184" cy="329184"/>
+            <a:off x="11137392" y="4114800"/>
+            <a:ext cx="146304" cy="146304"/>
           </a:xfrm>
           <a:prstGeom prst="rect">
             <a:avLst/>
@@ -5386,14 +5633,53 @@
       </p:pic>
       <p:sp>
         <p:nvSpPr>
+          <p:cNvPr id="31" name="Text 27"/>
+          <p:cNvSpPr/>
+          <p:nvPr/>
+        </p:nvSpPr>
+        <p:spPr>
+          <a:xfrm>
+            <a:off x="8686800" y="4059936"/>
+            <a:ext cx="2313432" cy="310896"/>
+          </a:xfrm>
+          <a:prstGeom prst="rect">
+            <a:avLst/>
+          </a:prstGeom>
+          <a:noFill/>
+          <a:ln/>
+        </p:spPr>
+        <p:txBody>
+          <a:bodyPr wrap="square" lIns="0" tIns="0" rIns="0" bIns="0" rtlCol="0" anchor="ctr"/>
+          <a:lstStyle/>
+          <a:p>
+            <a:pPr marL="0" indent="0" algn="r" rtl="1">
+              <a:buNone/>
+            </a:pPr>
+            <a:r>
+              <a:rPr lang="en-US" sz="1150" dirty="0">
+                <a:solidFill>
+                  <a:srgbClr val="E8E4DC"/>
+                </a:solidFill>
+                <a:latin typeface="Arial" pitchFamily="34" charset="0"/>
+                <a:ea typeface="Arial" pitchFamily="34" charset="-122"/>
+                <a:cs typeface="Arial" pitchFamily="34" charset="-120"/>
+              </a:rPr>
+              <a:t>דרישות וAcceptance Criteria</a:t>
+            </a:r>
+            <a:endParaRPr lang="en-US" sz="1150" dirty="0"/>
+          </a:p>
+        </p:txBody>
+      </p:sp>
+      <p:sp>
+        <p:nvSpPr>
           <p:cNvPr id="32" name="Text 28"/>
           <p:cNvSpPr/>
           <p:nvPr/>
         </p:nvSpPr>
         <p:spPr>
           <a:xfrm>
-            <a:off x="4585716" y="4297680"/>
-            <a:ext cx="2596896" cy="384048"/>
+            <a:off x="6601968" y="4059936"/>
+            <a:ext cx="2011680" cy="310896"/>
           </a:xfrm>
           <a:prstGeom prst="rect">
             <a:avLst/>
@@ -5405,88 +5691,579 @@
           <a:bodyPr wrap="square" lIns="0" tIns="0" rIns="0" bIns="0" rtlCol="0" anchor="ctr"/>
           <a:lstStyle/>
           <a:p>
+            <a:pPr marL="0" indent="0" algn="l">
+              <a:buNone/>
+            </a:pPr>
+            <a:r>
+              <a:rPr lang="en-US" sz="1000" dirty="0">
+                <a:solidFill>
+                  <a:srgbClr val="C9A96A"/>
+                </a:solidFill>
+                <a:latin typeface="Courier New" pitchFamily="34" charset="0"/>
+                <a:ea typeface="Courier New" pitchFamily="34" charset="-122"/>
+                <a:cs typeface="Courier New" pitchFamily="34" charset="-120"/>
+              </a:rPr>
+              <a:t>QueueLess_PRD.md</a:t>
+            </a:r>
+            <a:endParaRPr lang="en-US" sz="1000" dirty="0"/>
+          </a:p>
+        </p:txBody>
+      </p:sp>
+      <p:pic>
+        <p:nvPicPr>
+          <p:cNvPr id="33" name="Image 2" descr="/home/claude/deck/icons/filelines_gold.png"/>
+          <p:cNvPicPr>
+            <a:picLocks noChangeAspect="1"/>
+          </p:cNvPicPr>
+          <p:nvPr/>
+        </p:nvPicPr>
+        <p:blipFill>
+          <a:blip r:embed="rId4"/>
+          <a:stretch>
+            <a:fillRect/>
+          </a:stretch>
+        </p:blipFill>
+        <p:spPr>
+          <a:xfrm>
+            <a:off x="11137392" y="4480560"/>
+            <a:ext cx="146304" cy="146304"/>
+          </a:xfrm>
+          <a:prstGeom prst="rect">
+            <a:avLst/>
+          </a:prstGeom>
+        </p:spPr>
+      </p:pic>
+      <p:sp>
+        <p:nvSpPr>
+          <p:cNvPr id="34" name="Text 29"/>
+          <p:cNvSpPr/>
+          <p:nvPr/>
+        </p:nvSpPr>
+        <p:spPr>
+          <a:xfrm>
+            <a:off x="8686800" y="4425696"/>
+            <a:ext cx="2313432" cy="310896"/>
+          </a:xfrm>
+          <a:prstGeom prst="rect">
+            <a:avLst/>
+          </a:prstGeom>
+          <a:noFill/>
+          <a:ln/>
+        </p:spPr>
+        <p:txBody>
+          <a:bodyPr wrap="square" lIns="0" tIns="0" rIns="0" bIns="0" rtlCol="0" anchor="ctr"/>
+          <a:lstStyle/>
+          <a:p>
             <a:pPr marL="0" indent="0" algn="r" rtl="1">
               <a:buNone/>
             </a:pPr>
             <a:r>
-              <a:rPr lang="en-US" sz="1400" b="1" dirty="0">
-                <a:solidFill>
-                  <a:srgbClr val="F5F1EA"/>
+              <a:rPr lang="en-US" sz="1150" dirty="0">
+                <a:solidFill>
+                  <a:srgbClr val="E8E4DC"/>
                 </a:solidFill>
                 <a:latin typeface="Arial" pitchFamily="34" charset="0"/>
                 <a:ea typeface="Arial" pitchFamily="34" charset="-122"/>
                 <a:cs typeface="Arial" pitchFamily="34" charset="-120"/>
               </a:rPr>
-              <a:t>localStorage ולא DB חיצוני</a:t>
-            </a:r>
-            <a:endParaRPr lang="en-US" sz="1400" dirty="0"/>
-          </a:p>
-        </p:txBody>
-      </p:sp>
-      <p:sp>
-        <p:nvSpPr>
-          <p:cNvPr id="33" name="Text 29"/>
-          <p:cNvSpPr/>
-          <p:nvPr/>
-        </p:nvSpPr>
-        <p:spPr>
-          <a:xfrm>
-            <a:off x="4585716" y="4718304"/>
-            <a:ext cx="3017520" cy="347472"/>
-          </a:xfrm>
-          <a:prstGeom prst="rect">
-            <a:avLst/>
-          </a:prstGeom>
-          <a:noFill/>
-          <a:ln/>
-        </p:spPr>
-        <p:txBody>
-          <a:bodyPr wrap="square" lIns="0" tIns="0" rIns="0" bIns="0" rtlCol="0" anchor="t"/>
+              <a:t>נימוק לכל החלטת מוצר</a:t>
+            </a:r>
+            <a:endParaRPr lang="en-US" sz="1150" dirty="0"/>
+          </a:p>
+        </p:txBody>
+      </p:sp>
+      <p:sp>
+        <p:nvSpPr>
+          <p:cNvPr id="35" name="Text 30"/>
+          <p:cNvSpPr/>
+          <p:nvPr/>
+        </p:nvSpPr>
+        <p:spPr>
+          <a:xfrm>
+            <a:off x="6601968" y="4425696"/>
+            <a:ext cx="2011680" cy="310896"/>
+          </a:xfrm>
+          <a:prstGeom prst="rect">
+            <a:avLst/>
+          </a:prstGeom>
+          <a:noFill/>
+          <a:ln/>
+        </p:spPr>
+        <p:txBody>
+          <a:bodyPr wrap="square" lIns="0" tIns="0" rIns="0" bIns="0" rtlCol="0" anchor="ctr"/>
+          <a:lstStyle/>
+          <a:p>
+            <a:pPr marL="0" indent="0" algn="l">
+              <a:buNone/>
+            </a:pPr>
+            <a:r>
+              <a:rPr lang="en-US" sz="1000" dirty="0">
+                <a:solidFill>
+                  <a:srgbClr val="C9A96A"/>
+                </a:solidFill>
+                <a:latin typeface="Courier New" pitchFamily="34" charset="0"/>
+                <a:ea typeface="Courier New" pitchFamily="34" charset="-122"/>
+                <a:cs typeface="Courier New" pitchFamily="34" charset="-120"/>
+              </a:rPr>
+              <a:t>WORK_LOGIC.md</a:t>
+            </a:r>
+            <a:endParaRPr lang="en-US" sz="1000" dirty="0"/>
+          </a:p>
+        </p:txBody>
+      </p:sp>
+      <p:pic>
+        <p:nvPicPr>
+          <p:cNvPr id="36" name="Image 3" descr="/home/claude/deck/icons/filelines_gold.png"/>
+          <p:cNvPicPr>
+            <a:picLocks noChangeAspect="1"/>
+          </p:cNvPicPr>
+          <p:nvPr/>
+        </p:nvPicPr>
+        <p:blipFill>
+          <a:blip r:embed="rId4"/>
+          <a:stretch>
+            <a:fillRect/>
+          </a:stretch>
+        </p:blipFill>
+        <p:spPr>
+          <a:xfrm>
+            <a:off x="11137392" y="4846320"/>
+            <a:ext cx="146304" cy="146304"/>
+          </a:xfrm>
+          <a:prstGeom prst="rect">
+            <a:avLst/>
+          </a:prstGeom>
+        </p:spPr>
+      </p:pic>
+      <p:sp>
+        <p:nvSpPr>
+          <p:cNvPr id="37" name="Text 31"/>
+          <p:cNvSpPr/>
+          <p:nvPr/>
+        </p:nvSpPr>
+        <p:spPr>
+          <a:xfrm>
+            <a:off x="8686800" y="4791456"/>
+            <a:ext cx="2313432" cy="310896"/>
+          </a:xfrm>
+          <a:prstGeom prst="rect">
+            <a:avLst/>
+          </a:prstGeom>
+          <a:noFill/>
+          <a:ln/>
+        </p:spPr>
+        <p:txBody>
+          <a:bodyPr wrap="square" lIns="0" tIns="0" rIns="0" bIns="0" rtlCol="0" anchor="ctr"/>
           <a:lstStyle/>
           <a:p>
             <a:pPr marL="0" indent="0" algn="r" rtl="1">
               <a:buNone/>
             </a:pPr>
             <a:r>
-              <a:rPr lang="en-US" sz="1200" dirty="0">
-                <a:solidFill>
-                  <a:srgbClr val="9BA3AE"/>
+              <a:rPr lang="en-US" sz="1150" dirty="0">
+                <a:solidFill>
+                  <a:srgbClr val="E8E4DC"/>
                 </a:solidFill>
                 <a:latin typeface="Arial" pitchFamily="34" charset="0"/>
                 <a:ea typeface="Arial" pitchFamily="34" charset="-122"/>
                 <a:cs typeface="Arial" pitchFamily="34" charset="-120"/>
               </a:rPr>
-              <a:t>פחות נקודות כשל בדמו</a:t>
-            </a:r>
-            <a:endParaRPr lang="en-US" sz="1200" dirty="0"/>
-          </a:p>
-        </p:txBody>
-      </p:sp>
-      <p:sp>
-        <p:nvSpPr>
-          <p:cNvPr id="34" name="Shape 30"/>
-          <p:cNvSpPr/>
-          <p:nvPr/>
-        </p:nvSpPr>
-        <p:spPr>
-          <a:xfrm>
-            <a:off x="470916" y="4114800"/>
-            <a:ext cx="3602736" cy="1133856"/>
+              <a:t>תרחישי בדיקה מול הדרישות</a:t>
+            </a:r>
+            <a:endParaRPr lang="en-US" sz="1150" dirty="0"/>
+          </a:p>
+        </p:txBody>
+      </p:sp>
+      <p:sp>
+        <p:nvSpPr>
+          <p:cNvPr id="38" name="Text 32"/>
+          <p:cNvSpPr/>
+          <p:nvPr/>
+        </p:nvSpPr>
+        <p:spPr>
+          <a:xfrm>
+            <a:off x="6601968" y="4791456"/>
+            <a:ext cx="2011680" cy="310896"/>
+          </a:xfrm>
+          <a:prstGeom prst="rect">
+            <a:avLst/>
+          </a:prstGeom>
+          <a:noFill/>
+          <a:ln/>
+        </p:spPr>
+        <p:txBody>
+          <a:bodyPr wrap="square" lIns="0" tIns="0" rIns="0" bIns="0" rtlCol="0" anchor="ctr"/>
+          <a:lstStyle/>
+          <a:p>
+            <a:pPr marL="0" indent="0" algn="l">
+              <a:buNone/>
+            </a:pPr>
+            <a:r>
+              <a:rPr lang="en-US" sz="1000" dirty="0">
+                <a:solidFill>
+                  <a:srgbClr val="C9A96A"/>
+                </a:solidFill>
+                <a:latin typeface="Courier New" pitchFamily="34" charset="0"/>
+                <a:ea typeface="Courier New" pitchFamily="34" charset="-122"/>
+                <a:cs typeface="Courier New" pitchFamily="34" charset="-120"/>
+              </a:rPr>
+              <a:t>TESTING.md</a:t>
+            </a:r>
+            <a:endParaRPr lang="en-US" sz="1000" dirty="0"/>
+          </a:p>
+        </p:txBody>
+      </p:sp>
+      <p:pic>
+        <p:nvPicPr>
+          <p:cNvPr id="39" name="Image 4" descr="/home/claude/deck/icons/filelines_gold.png"/>
+          <p:cNvPicPr>
+            <a:picLocks noChangeAspect="1"/>
+          </p:cNvPicPr>
+          <p:nvPr/>
+        </p:nvPicPr>
+        <p:blipFill>
+          <a:blip r:embed="rId4"/>
+          <a:stretch>
+            <a:fillRect/>
+          </a:stretch>
+        </p:blipFill>
+        <p:spPr>
+          <a:xfrm>
+            <a:off x="11137392" y="5212080"/>
+            <a:ext cx="146304" cy="146304"/>
+          </a:xfrm>
+          <a:prstGeom prst="rect">
+            <a:avLst/>
+          </a:prstGeom>
+        </p:spPr>
+      </p:pic>
+      <p:sp>
+        <p:nvSpPr>
+          <p:cNvPr id="40" name="Text 33"/>
+          <p:cNvSpPr/>
+          <p:nvPr/>
+        </p:nvSpPr>
+        <p:spPr>
+          <a:xfrm>
+            <a:off x="8686800" y="5157216"/>
+            <a:ext cx="2313432" cy="310896"/>
+          </a:xfrm>
+          <a:prstGeom prst="rect">
+            <a:avLst/>
+          </a:prstGeom>
+          <a:noFill/>
+          <a:ln/>
+        </p:spPr>
+        <p:txBody>
+          <a:bodyPr wrap="square" lIns="0" tIns="0" rIns="0" bIns="0" rtlCol="0" anchor="ctr"/>
+          <a:lstStyle/>
+          <a:p>
+            <a:pPr marL="0" indent="0" algn="r" rtl="1">
+              <a:buNone/>
+            </a:pPr>
+            <a:r>
+              <a:rPr lang="en-US" sz="1150" dirty="0">
+                <a:solidFill>
+                  <a:srgbClr val="E8E4DC"/>
+                </a:solidFill>
+                <a:latin typeface="Arial" pitchFamily="34" charset="0"/>
+                <a:ea typeface="Arial" pitchFamily="34" charset="-122"/>
+                <a:cs typeface="Arial" pitchFamily="34" charset="-120"/>
+              </a:rPr>
+              <a:t>פרומפט בנייה מובנה</a:t>
+            </a:r>
+            <a:endParaRPr lang="en-US" sz="1150" dirty="0"/>
+          </a:p>
+        </p:txBody>
+      </p:sp>
+      <p:sp>
+        <p:nvSpPr>
+          <p:cNvPr id="41" name="Text 34"/>
+          <p:cNvSpPr/>
+          <p:nvPr/>
+        </p:nvSpPr>
+        <p:spPr>
+          <a:xfrm>
+            <a:off x="6601968" y="5157216"/>
+            <a:ext cx="2011680" cy="310896"/>
+          </a:xfrm>
+          <a:prstGeom prst="rect">
+            <a:avLst/>
+          </a:prstGeom>
+          <a:noFill/>
+          <a:ln/>
+        </p:spPr>
+        <p:txBody>
+          <a:bodyPr wrap="square" lIns="0" tIns="0" rIns="0" bIns="0" rtlCol="0" anchor="ctr"/>
+          <a:lstStyle/>
+          <a:p>
+            <a:pPr marL="0" indent="0" algn="l">
+              <a:buNone/>
+            </a:pPr>
+            <a:r>
+              <a:rPr lang="en-US" sz="1000" dirty="0">
+                <a:solidFill>
+                  <a:srgbClr val="C9A96A"/>
+                </a:solidFill>
+                <a:latin typeface="Courier New" pitchFamily="34" charset="0"/>
+                <a:ea typeface="Courier New" pitchFamily="34" charset="-122"/>
+                <a:cs typeface="Courier New" pitchFamily="34" charset="-120"/>
+              </a:rPr>
+              <a:t>CLAUDE_BUILD_PROMPT.md</a:t>
+            </a:r>
+            <a:endParaRPr lang="en-US" sz="1000" dirty="0"/>
+          </a:p>
+        </p:txBody>
+      </p:sp>
+      <p:pic>
+        <p:nvPicPr>
+          <p:cNvPr id="42" name="Image 5" descr="/home/claude/deck/icons/filelines_gold.png"/>
+          <p:cNvPicPr>
+            <a:picLocks noChangeAspect="1"/>
+          </p:cNvPicPr>
+          <p:nvPr/>
+        </p:nvPicPr>
+        <p:blipFill>
+          <a:blip r:embed="rId4"/>
+          <a:stretch>
+            <a:fillRect/>
+          </a:stretch>
+        </p:blipFill>
+        <p:spPr>
+          <a:xfrm>
+            <a:off x="11137392" y="5577840"/>
+            <a:ext cx="146304" cy="146304"/>
+          </a:xfrm>
+          <a:prstGeom prst="rect">
+            <a:avLst/>
+          </a:prstGeom>
+        </p:spPr>
+      </p:pic>
+      <p:sp>
+        <p:nvSpPr>
+          <p:cNvPr id="43" name="Text 35"/>
+          <p:cNvSpPr/>
+          <p:nvPr/>
+        </p:nvSpPr>
+        <p:spPr>
+          <a:xfrm>
+            <a:off x="8686800" y="5522976"/>
+            <a:ext cx="2313432" cy="310896"/>
+          </a:xfrm>
+          <a:prstGeom prst="rect">
+            <a:avLst/>
+          </a:prstGeom>
+          <a:noFill/>
+          <a:ln/>
+        </p:spPr>
+        <p:txBody>
+          <a:bodyPr wrap="square" lIns="0" tIns="0" rIns="0" bIns="0" rtlCol="0" anchor="ctr"/>
+          <a:lstStyle/>
+          <a:p>
+            <a:pPr marL="0" indent="0" algn="r" rtl="1">
+              <a:buNone/>
+            </a:pPr>
+            <a:r>
+              <a:rPr lang="en-US" sz="1150" dirty="0">
+                <a:solidFill>
+                  <a:srgbClr val="E8E4DC"/>
+                </a:solidFill>
+                <a:latin typeface="Arial" pitchFamily="34" charset="0"/>
+                <a:ea typeface="Arial" pitchFamily="34" charset="-122"/>
+                <a:cs typeface="Arial" pitchFamily="34" charset="-120"/>
+              </a:rPr>
+              <a:t>הוראות הרצה ופרטי דמו</a:t>
+            </a:r>
+            <a:endParaRPr lang="en-US" sz="1150" dirty="0"/>
+          </a:p>
+        </p:txBody>
+      </p:sp>
+      <p:sp>
+        <p:nvSpPr>
+          <p:cNvPr id="44" name="Text 36"/>
+          <p:cNvSpPr/>
+          <p:nvPr/>
+        </p:nvSpPr>
+        <p:spPr>
+          <a:xfrm>
+            <a:off x="6601968" y="5522976"/>
+            <a:ext cx="2011680" cy="310896"/>
+          </a:xfrm>
+          <a:prstGeom prst="rect">
+            <a:avLst/>
+          </a:prstGeom>
+          <a:noFill/>
+          <a:ln/>
+        </p:spPr>
+        <p:txBody>
+          <a:bodyPr wrap="square" lIns="0" tIns="0" rIns="0" bIns="0" rtlCol="0" anchor="ctr"/>
+          <a:lstStyle/>
+          <a:p>
+            <a:pPr marL="0" indent="0" algn="l">
+              <a:buNone/>
+            </a:pPr>
+            <a:r>
+              <a:rPr lang="en-US" sz="1000" dirty="0">
+                <a:solidFill>
+                  <a:srgbClr val="C9A96A"/>
+                </a:solidFill>
+                <a:latin typeface="Courier New" pitchFamily="34" charset="0"/>
+                <a:ea typeface="Courier New" pitchFamily="34" charset="-122"/>
+                <a:cs typeface="Courier New" pitchFamily="34" charset="-120"/>
+              </a:rPr>
+              <a:t>README.md</a:t>
+            </a:r>
+            <a:endParaRPr lang="en-US" sz="1000" dirty="0"/>
+          </a:p>
+        </p:txBody>
+      </p:sp>
+      <p:pic>
+        <p:nvPicPr>
+          <p:cNvPr id="45" name="Image 6" descr="/home/claude/deck/icons/filelines_gold.png"/>
+          <p:cNvPicPr>
+            <a:picLocks noChangeAspect="1"/>
+          </p:cNvPicPr>
+          <p:nvPr/>
+        </p:nvPicPr>
+        <p:blipFill>
+          <a:blip r:embed="rId4"/>
+          <a:stretch>
+            <a:fillRect/>
+          </a:stretch>
+        </p:blipFill>
+        <p:spPr>
+          <a:xfrm>
+            <a:off x="11137392" y="5943600"/>
+            <a:ext cx="146304" cy="146304"/>
+          </a:xfrm>
+          <a:prstGeom prst="rect">
+            <a:avLst/>
+          </a:prstGeom>
+        </p:spPr>
+      </p:pic>
+      <p:sp>
+        <p:nvSpPr>
+          <p:cNvPr id="46" name="Text 37"/>
+          <p:cNvSpPr/>
+          <p:nvPr/>
+        </p:nvSpPr>
+        <p:spPr>
+          <a:xfrm>
+            <a:off x="8686800" y="5888736"/>
+            <a:ext cx="2313432" cy="310896"/>
+          </a:xfrm>
+          <a:prstGeom prst="rect">
+            <a:avLst/>
+          </a:prstGeom>
+          <a:noFill/>
+          <a:ln/>
+        </p:spPr>
+        <p:txBody>
+          <a:bodyPr wrap="square" lIns="0" tIns="0" rIns="0" bIns="0" rtlCol="0" anchor="ctr"/>
+          <a:lstStyle/>
+          <a:p>
+            <a:pPr marL="0" indent="0" algn="r" rtl="1">
+              <a:buNone/>
+            </a:pPr>
+            <a:r>
+              <a:rPr lang="en-US" sz="1150" dirty="0">
+                <a:solidFill>
+                  <a:srgbClr val="E8E4DC"/>
+                </a:solidFill>
+                <a:latin typeface="Arial" pitchFamily="34" charset="0"/>
+                <a:ea typeface="Arial" pitchFamily="34" charset="-122"/>
+                <a:cs typeface="Arial" pitchFamily="34" charset="-120"/>
+              </a:rPr>
+              <a:t>דגשים לכל תפקיד בצוות</a:t>
+            </a:r>
+            <a:endParaRPr lang="en-US" sz="1150" dirty="0"/>
+          </a:p>
+        </p:txBody>
+      </p:sp>
+      <p:sp>
+        <p:nvSpPr>
+          <p:cNvPr id="47" name="Text 38"/>
+          <p:cNvSpPr/>
+          <p:nvPr/>
+        </p:nvSpPr>
+        <p:spPr>
+          <a:xfrm>
+            <a:off x="6601968" y="5888736"/>
+            <a:ext cx="2011680" cy="310896"/>
+          </a:xfrm>
+          <a:prstGeom prst="rect">
+            <a:avLst/>
+          </a:prstGeom>
+          <a:noFill/>
+          <a:ln/>
+        </p:spPr>
+        <p:txBody>
+          <a:bodyPr wrap="square" lIns="0" tIns="0" rIns="0" bIns="0" rtlCol="0" anchor="ctr"/>
+          <a:lstStyle/>
+          <a:p>
+            <a:pPr marL="0" indent="0" algn="l">
+              <a:buNone/>
+            </a:pPr>
+            <a:r>
+              <a:rPr lang="en-US" sz="1000" dirty="0">
+                <a:solidFill>
+                  <a:srgbClr val="C9A96A"/>
+                </a:solidFill>
+                <a:latin typeface="Courier New" pitchFamily="34" charset="0"/>
+                <a:ea typeface="Courier New" pitchFamily="34" charset="-122"/>
+                <a:cs typeface="Courier New" pitchFamily="34" charset="-120"/>
+              </a:rPr>
+              <a:t>Name.md</a:t>
+            </a:r>
+            <a:endParaRPr lang="en-US" sz="1000" dirty="0"/>
+          </a:p>
+        </p:txBody>
+      </p:sp>
+      <p:sp>
+        <p:nvSpPr>
+          <p:cNvPr id="48" name="Shape 39"/>
+          <p:cNvSpPr/>
+          <p:nvPr/>
+        </p:nvSpPr>
+        <p:spPr>
+          <a:xfrm>
+            <a:off x="548640" y="3017520"/>
+            <a:ext cx="5349240" cy="3291840"/>
           </a:xfrm>
           <a:prstGeom prst="roundRect">
             <a:avLst>
-              <a:gd name="adj" fmla="val 8065"/>
+              <a:gd name="adj" fmla="val 3333"/>
             </a:avLst>
           </a:prstGeom>
           <a:solidFill>
             <a:srgbClr val="252C36"/>
+          </a:solidFill>
+          <a:ln/>
+        </p:spPr>
+      </p:sp>
+      <p:sp>
+        <p:nvSpPr>
+          <p:cNvPr id="49" name="Shape 40"/>
+          <p:cNvSpPr/>
+          <p:nvPr/>
+        </p:nvSpPr>
+        <p:spPr>
+          <a:xfrm>
+            <a:off x="5111496" y="3218688"/>
+            <a:ext cx="512064" cy="512064"/>
+          </a:xfrm>
+          <a:prstGeom prst="ellipse">
+            <a:avLst/>
+          </a:prstGeom>
+          <a:solidFill>
+            <a:srgbClr val="C9A96A"/>
           </a:solidFill>
           <a:ln/>
         </p:spPr>
       </p:sp>
       <p:pic>
         <p:nvPicPr>
-          <p:cNvPr id="35" name="Image 2" descr="/home/claude/deck/icons/shield_gold.png"/>
+          <p:cNvPr id="50" name="Image 7" descr="/home/claude/deck/icons/lightbulb_dark.png"/>
           <p:cNvPicPr>
             <a:picLocks noChangeAspect="1"/>
           </p:cNvPicPr>
@@ -5500,8 +6277,8 @@
         </p:blipFill>
         <p:spPr>
           <a:xfrm>
-            <a:off x="3360420" y="4370832"/>
-            <a:ext cx="329184" cy="329184"/>
+            <a:off x="5248656" y="3355848"/>
+            <a:ext cx="237744" cy="237744"/>
           </a:xfrm>
           <a:prstGeom prst="rect">
             <a:avLst/>
@@ -5510,14 +6287,14 @@
       </p:pic>
       <p:sp>
         <p:nvSpPr>
-          <p:cNvPr id="36" name="Text 31"/>
-          <p:cNvSpPr/>
-          <p:nvPr/>
-        </p:nvSpPr>
-        <p:spPr>
-          <a:xfrm>
-            <a:off x="763524" y="4297680"/>
-            <a:ext cx="2596896" cy="384048"/>
+          <p:cNvPr id="51" name="Text 41"/>
+          <p:cNvSpPr/>
+          <p:nvPr/>
+        </p:nvSpPr>
+        <p:spPr>
+          <a:xfrm>
+            <a:off x="859536" y="3236976"/>
+            <a:ext cx="4160520" cy="475488"/>
           </a:xfrm>
           <a:prstGeom prst="rect">
             <a:avLst/>
@@ -5533,7 +6310,7 @@
               <a:buNone/>
             </a:pPr>
             <a:r>
-              <a:rPr lang="en-US" sz="1400" b="1" dirty="0">
+              <a:rPr lang="en-US" sz="1700" b="1" dirty="0">
                 <a:solidFill>
                   <a:srgbClr val="F5F1EA"/>
                 </a:solidFill>
@@ -5541,22 +6318,92 @@
                 <a:ea typeface="Arial" pitchFamily="34" charset="-122"/>
                 <a:cs typeface="Arial" pitchFamily="34" charset="-120"/>
               </a:rPr>
-              <a:t>OTP דמו בהרשמה ובכניסה</a:t>
-            </a:r>
-            <a:endParaRPr lang="en-US" sz="1400" dirty="0"/>
-          </a:p>
-        </p:txBody>
-      </p:sp>
-      <p:sp>
-        <p:nvSpPr>
-          <p:cNvPr id="37" name="Text 32"/>
-          <p:cNvSpPr/>
-          <p:nvPr/>
-        </p:nvSpPr>
-        <p:spPr>
-          <a:xfrm>
-            <a:off x="763524" y="4718304"/>
-            <a:ext cx="3017520" cy="347472"/>
+              <a:t>החלטות מוצר מרכזיות</a:t>
+            </a:r>
+            <a:endParaRPr lang="en-US" sz="1700" dirty="0"/>
+          </a:p>
+        </p:txBody>
+      </p:sp>
+      <p:sp>
+        <p:nvSpPr>
+          <p:cNvPr id="52" name="Text 42"/>
+          <p:cNvSpPr/>
+          <p:nvPr/>
+        </p:nvSpPr>
+        <p:spPr>
+          <a:xfrm>
+            <a:off x="859536" y="3730752"/>
+            <a:ext cx="4160520" cy="274320"/>
+          </a:xfrm>
+          <a:prstGeom prst="rect">
+            <a:avLst/>
+          </a:prstGeom>
+          <a:noFill/>
+          <a:ln/>
+        </p:spPr>
+        <p:txBody>
+          <a:bodyPr wrap="square" lIns="0" tIns="0" rIns="0" bIns="0" rtlCol="0" anchor="ctr"/>
+          <a:lstStyle/>
+          <a:p>
+            <a:pPr marL="0" indent="0" algn="r" rtl="1">
+              <a:buNone/>
+            </a:pPr>
+            <a:r>
+              <a:rPr lang="en-US" sz="1100" dirty="0">
+                <a:solidFill>
+                  <a:srgbClr val="C9A96A"/>
+                </a:solidFill>
+                <a:latin typeface="Arial" pitchFamily="34" charset="0"/>
+                <a:ea typeface="Arial" pitchFamily="34" charset="-122"/>
+                <a:cs typeface="Arial" pitchFamily="34" charset="-120"/>
+              </a:rPr>
+              <a:t>כל החלטה נבחנה</a:t>
+            </a:r>
+            <a:r>
+              <a:rPr lang="he-IL" sz="1100" dirty="0">
+                <a:solidFill>
+                  <a:srgbClr val="C9A96A"/>
+                </a:solidFill>
+                <a:latin typeface="Arial" pitchFamily="34" charset="0"/>
+                <a:ea typeface="Arial" pitchFamily="34" charset="-122"/>
+                <a:cs typeface="Arial" pitchFamily="34" charset="-120"/>
+              </a:rPr>
+              <a:t>, נבחרה ותועדה</a:t>
+            </a:r>
+            <a:endParaRPr lang="en-US" sz="1100" dirty="0"/>
+          </a:p>
+        </p:txBody>
+      </p:sp>
+      <p:sp>
+        <p:nvSpPr>
+          <p:cNvPr id="53" name="Shape 43"/>
+          <p:cNvSpPr/>
+          <p:nvPr/>
+        </p:nvSpPr>
+        <p:spPr>
+          <a:xfrm>
+            <a:off x="5513832" y="4126611"/>
+            <a:ext cx="73152" cy="73152"/>
+          </a:xfrm>
+          <a:prstGeom prst="ellipse">
+            <a:avLst/>
+          </a:prstGeom>
+          <a:solidFill>
+            <a:srgbClr val="C9A96A"/>
+          </a:solidFill>
+          <a:ln/>
+        </p:spPr>
+      </p:sp>
+      <p:sp>
+        <p:nvSpPr>
+          <p:cNvPr id="54" name="Text 44"/>
+          <p:cNvSpPr/>
+          <p:nvPr/>
+        </p:nvSpPr>
+        <p:spPr>
+          <a:xfrm>
+            <a:off x="859536" y="4059936"/>
+            <a:ext cx="4526280" cy="365760"/>
           </a:xfrm>
           <a:prstGeom prst="rect">
             <a:avLst/>
@@ -5569,118 +6416,285 @@
           <a:lstStyle/>
           <a:p>
             <a:pPr marL="0" indent="0" algn="r" rtl="1">
-              <a:buNone/>
-            </a:pPr>
-            <a:r>
-              <a:rPr lang="en-US" sz="1200" dirty="0">
-                <a:solidFill>
-                  <a:srgbClr val="9BA3AE"/>
+              <a:lnSpc>
+                <a:spcPts val="1600"/>
+              </a:lnSpc>
+              <a:buNone/>
+            </a:pPr>
+            <a:r>
+              <a:rPr lang="he-IL" sz="1250" dirty="0">
+                <a:solidFill>
+                  <a:srgbClr val="E8E4DC"/>
                 </a:solidFill>
                 <a:latin typeface="Arial" pitchFamily="34" charset="0"/>
-                <a:ea typeface="Arial" pitchFamily="34" charset="-122"/>
-                <a:cs typeface="Arial" pitchFamily="34" charset="-120"/>
-              </a:rPr>
-              <a:t>חשיבה אבטחתית מהתחלה</a:t>
-            </a:r>
-            <a:endParaRPr lang="en-US" sz="1200" dirty="0"/>
-          </a:p>
-        </p:txBody>
-      </p:sp>
-      <p:sp>
-        <p:nvSpPr>
-          <p:cNvPr id="38" name="Shape 33"/>
-          <p:cNvSpPr/>
-          <p:nvPr/>
-        </p:nvSpPr>
-        <p:spPr>
-          <a:xfrm>
-            <a:off x="8115300" y="5431536"/>
-            <a:ext cx="3602736" cy="1133856"/>
-          </a:xfrm>
-          <a:prstGeom prst="roundRect">
-            <a:avLst>
-              <a:gd name="adj" fmla="val 8065"/>
-            </a:avLst>
-          </a:prstGeom>
-          <a:solidFill>
-            <a:srgbClr val="252C36"/>
-          </a:solidFill>
-          <a:ln/>
-        </p:spPr>
-      </p:sp>
-      <p:pic>
-        <p:nvPicPr>
-          <p:cNvPr id="39" name="Image 3" descr="/home/claude/deck/icons/lock_gold.png"/>
-          <p:cNvPicPr>
-            <a:picLocks noChangeAspect="1"/>
-          </p:cNvPicPr>
-          <p:nvPr/>
-        </p:nvPicPr>
-        <p:blipFill>
-          <a:blip r:embed="rId6"/>
-          <a:stretch>
-            <a:fillRect/>
-          </a:stretch>
-        </p:blipFill>
-        <p:spPr>
-          <a:xfrm>
-            <a:off x="11004804" y="5687568"/>
-            <a:ext cx="329184" cy="329184"/>
-          </a:xfrm>
-          <a:prstGeom prst="rect">
-            <a:avLst/>
-          </a:prstGeom>
-        </p:spPr>
-      </p:pic>
-      <p:sp>
-        <p:nvSpPr>
-          <p:cNvPr id="40" name="Text 34"/>
-          <p:cNvSpPr/>
-          <p:nvPr/>
-        </p:nvSpPr>
-        <p:spPr>
-          <a:xfrm>
-            <a:off x="8407908" y="5614416"/>
-            <a:ext cx="2596896" cy="384048"/>
-          </a:xfrm>
-          <a:prstGeom prst="rect">
-            <a:avLst/>
-          </a:prstGeom>
-          <a:noFill/>
-          <a:ln/>
-        </p:spPr>
-        <p:txBody>
-          <a:bodyPr wrap="square" lIns="0" tIns="0" rIns="0" bIns="0" rtlCol="0" anchor="ctr"/>
+                <a:cs typeface="Arial" pitchFamily="34" charset="-120"/>
+              </a:rPr>
+              <a:t>מספרה אחת בלבד, בלי להתפזר לעסקים שונים</a:t>
+            </a:r>
+            <a:endParaRPr lang="en-US" sz="1250" dirty="0"/>
+          </a:p>
+        </p:txBody>
+      </p:sp>
+      <p:sp>
+        <p:nvSpPr>
+          <p:cNvPr id="55" name="Shape 45"/>
+          <p:cNvSpPr/>
+          <p:nvPr/>
+        </p:nvSpPr>
+        <p:spPr>
+          <a:xfrm>
+            <a:off x="5513832" y="4492371"/>
+            <a:ext cx="73152" cy="73152"/>
+          </a:xfrm>
+          <a:prstGeom prst="ellipse">
+            <a:avLst/>
+          </a:prstGeom>
+          <a:solidFill>
+            <a:srgbClr val="C9A96A"/>
+          </a:solidFill>
+          <a:ln/>
+        </p:spPr>
+      </p:sp>
+      <p:sp>
+        <p:nvSpPr>
+          <p:cNvPr id="56" name="Text 46"/>
+          <p:cNvSpPr/>
+          <p:nvPr/>
+        </p:nvSpPr>
+        <p:spPr>
+          <a:xfrm>
+            <a:off x="859536" y="4425696"/>
+            <a:ext cx="4526280" cy="365760"/>
+          </a:xfrm>
+          <a:prstGeom prst="rect">
+            <a:avLst/>
+          </a:prstGeom>
+          <a:noFill/>
+          <a:ln/>
+        </p:spPr>
+        <p:txBody>
+          <a:bodyPr wrap="square" lIns="0" tIns="0" rIns="0" bIns="0" rtlCol="0" anchor="t"/>
           <a:lstStyle/>
           <a:p>
             <a:pPr marL="0" indent="0" algn="r" rtl="1">
-              <a:buNone/>
-            </a:pPr>
-            <a:r>
-              <a:rPr lang="en-US" sz="1400" b="1" dirty="0">
-                <a:solidFill>
-                  <a:srgbClr val="F5F1EA"/>
+              <a:lnSpc>
+                <a:spcPts val="1600"/>
+              </a:lnSpc>
+              <a:buNone/>
+            </a:pPr>
+            <a:r>
+              <a:rPr lang="en-US" sz="1250" dirty="0">
+                <a:solidFill>
+                  <a:srgbClr val="E8E4DC"/>
                 </a:solidFill>
                 <a:latin typeface="Arial" pitchFamily="34" charset="0"/>
                 <a:ea typeface="Arial" pitchFamily="34" charset="-122"/>
                 <a:cs typeface="Arial" pitchFamily="34" charset="-120"/>
               </a:rPr>
+              <a:t>localStorage </a:t>
+            </a:r>
+            <a:r>
+              <a:rPr lang="he-IL" sz="1250" dirty="0">
+                <a:solidFill>
+                  <a:srgbClr val="E8E4DC"/>
+                </a:solidFill>
+                <a:latin typeface="Arial" pitchFamily="34" charset="0"/>
+                <a:ea typeface="Arial" pitchFamily="34" charset="-122"/>
+                <a:cs typeface="Arial" pitchFamily="34" charset="-120"/>
+              </a:rPr>
+              <a:t> ולא </a:t>
+            </a:r>
+            <a:r>
+              <a:rPr lang="en-US" sz="1250" dirty="0">
+                <a:solidFill>
+                  <a:srgbClr val="E8E4DC"/>
+                </a:solidFill>
+                <a:latin typeface="Arial" pitchFamily="34" charset="0"/>
+                <a:ea typeface="Arial" pitchFamily="34" charset="-122"/>
+                <a:cs typeface="Arial" pitchFamily="34" charset="-120"/>
+              </a:rPr>
+              <a:t>DB</a:t>
+            </a:r>
+            <a:r>
+              <a:rPr lang="he-IL" sz="1250" dirty="0">
+                <a:solidFill>
+                  <a:srgbClr val="E8E4DC"/>
+                </a:solidFill>
+                <a:latin typeface="Arial" pitchFamily="34" charset="0"/>
+                <a:ea typeface="Arial" pitchFamily="34" charset="-122"/>
+                <a:cs typeface="Arial" pitchFamily="34" charset="-120"/>
+              </a:rPr>
+              <a:t> חיצוני להימנעות מנקודת כשל</a:t>
+            </a:r>
+            <a:endParaRPr lang="en-US" sz="1250" dirty="0"/>
+          </a:p>
+        </p:txBody>
+      </p:sp>
+      <p:sp>
+        <p:nvSpPr>
+          <p:cNvPr id="57" name="Shape 47"/>
+          <p:cNvSpPr/>
+          <p:nvPr/>
+        </p:nvSpPr>
+        <p:spPr>
+          <a:xfrm>
+            <a:off x="5513832" y="4858131"/>
+            <a:ext cx="73152" cy="73152"/>
+          </a:xfrm>
+          <a:prstGeom prst="ellipse">
+            <a:avLst/>
+          </a:prstGeom>
+          <a:solidFill>
+            <a:srgbClr val="C9A96A"/>
+          </a:solidFill>
+          <a:ln/>
+        </p:spPr>
+      </p:sp>
+      <p:sp>
+        <p:nvSpPr>
+          <p:cNvPr id="58" name="Text 48"/>
+          <p:cNvSpPr/>
+          <p:nvPr/>
+        </p:nvSpPr>
+        <p:spPr>
+          <a:xfrm>
+            <a:off x="859536" y="4791456"/>
+            <a:ext cx="4526280" cy="365760"/>
+          </a:xfrm>
+          <a:prstGeom prst="rect">
+            <a:avLst/>
+          </a:prstGeom>
+          <a:noFill/>
+          <a:ln/>
+        </p:spPr>
+        <p:txBody>
+          <a:bodyPr wrap="square" lIns="0" tIns="0" rIns="0" bIns="0" rtlCol="0" anchor="t"/>
+          <a:lstStyle/>
+          <a:p>
+            <a:pPr marL="0" indent="0" algn="r" rtl="1">
+              <a:lnSpc>
+                <a:spcPts val="1600"/>
+              </a:lnSpc>
+              <a:buNone/>
+            </a:pPr>
+            <a:r>
+              <a:rPr lang="en-US" sz="1250" dirty="0">
+                <a:solidFill>
+                  <a:srgbClr val="E8E4DC"/>
+                </a:solidFill>
+                <a:latin typeface="Arial" pitchFamily="34" charset="0"/>
+                <a:ea typeface="Arial" pitchFamily="34" charset="-122"/>
+                <a:cs typeface="Arial" pitchFamily="34" charset="-120"/>
+              </a:rPr>
+              <a:t>OTP</a:t>
+            </a:r>
+            <a:r>
+              <a:rPr lang="he-IL" sz="1250" dirty="0">
+                <a:solidFill>
+                  <a:srgbClr val="E8E4DC"/>
+                </a:solidFill>
+                <a:latin typeface="Arial" pitchFamily="34" charset="0"/>
+                <a:ea typeface="Arial" pitchFamily="34" charset="-122"/>
+                <a:cs typeface="Arial" pitchFamily="34" charset="-120"/>
+              </a:rPr>
+              <a:t> דמו בהרשמה וכניסה</a:t>
+            </a:r>
+            <a:endParaRPr lang="en-US" sz="1250" dirty="0"/>
+          </a:p>
+        </p:txBody>
+      </p:sp>
+      <p:sp>
+        <p:nvSpPr>
+          <p:cNvPr id="59" name="Shape 49"/>
+          <p:cNvSpPr/>
+          <p:nvPr/>
+        </p:nvSpPr>
+        <p:spPr>
+          <a:xfrm>
+            <a:off x="5513832" y="5223891"/>
+            <a:ext cx="73152" cy="73152"/>
+          </a:xfrm>
+          <a:prstGeom prst="ellipse">
+            <a:avLst/>
+          </a:prstGeom>
+          <a:solidFill>
+            <a:srgbClr val="C9A96A"/>
+          </a:solidFill>
+          <a:ln/>
+        </p:spPr>
+      </p:sp>
+      <p:sp>
+        <p:nvSpPr>
+          <p:cNvPr id="60" name="Text 50"/>
+          <p:cNvSpPr/>
+          <p:nvPr/>
+        </p:nvSpPr>
+        <p:spPr>
+          <a:xfrm>
+            <a:off x="859536" y="5157216"/>
+            <a:ext cx="4526280" cy="365760"/>
+          </a:xfrm>
+          <a:prstGeom prst="rect">
+            <a:avLst/>
+          </a:prstGeom>
+          <a:noFill/>
+          <a:ln/>
+        </p:spPr>
+        <p:txBody>
+          <a:bodyPr wrap="square" lIns="0" tIns="0" rIns="0" bIns="0" rtlCol="0" anchor="t"/>
+          <a:lstStyle/>
+          <a:p>
+            <a:pPr marL="0" indent="0" algn="r" rtl="1">
+              <a:lnSpc>
+                <a:spcPts val="1600"/>
+              </a:lnSpc>
+              <a:buNone/>
+            </a:pPr>
+            <a:r>
+              <a:rPr lang="en-US" sz="1250" dirty="0">
+                <a:solidFill>
+                  <a:srgbClr val="E8E4DC"/>
+                </a:solidFill>
+                <a:latin typeface="Arial" pitchFamily="34" charset="0"/>
+                <a:ea typeface="Arial" pitchFamily="34" charset="-122"/>
+                <a:cs typeface="Arial" pitchFamily="34" charset="-120"/>
+              </a:rPr>
               <a:t>קשירת שם לתעודת זהות</a:t>
             </a:r>
-            <a:endParaRPr lang="en-US" sz="1400" dirty="0"/>
-          </a:p>
-        </p:txBody>
-      </p:sp>
-      <p:sp>
-        <p:nvSpPr>
-          <p:cNvPr id="41" name="Text 35"/>
-          <p:cNvSpPr/>
-          <p:nvPr/>
-        </p:nvSpPr>
-        <p:spPr>
-          <a:xfrm>
-            <a:off x="8407908" y="6035040"/>
-            <a:ext cx="3017520" cy="347472"/>
+            <a:endParaRPr lang="en-US" sz="1250" dirty="0"/>
+          </a:p>
+        </p:txBody>
+      </p:sp>
+      <p:sp>
+        <p:nvSpPr>
+          <p:cNvPr id="61" name="Shape 51"/>
+          <p:cNvSpPr/>
+          <p:nvPr/>
+        </p:nvSpPr>
+        <p:spPr>
+          <a:xfrm>
+            <a:off x="5513832" y="5589651"/>
+            <a:ext cx="73152" cy="73152"/>
+          </a:xfrm>
+          <a:prstGeom prst="ellipse">
+            <a:avLst/>
+          </a:prstGeom>
+          <a:solidFill>
+            <a:srgbClr val="C9A96A"/>
+          </a:solidFill>
+          <a:ln/>
+        </p:spPr>
+      </p:sp>
+      <p:sp>
+        <p:nvSpPr>
+          <p:cNvPr id="62" name="Text 52"/>
+          <p:cNvSpPr/>
+          <p:nvPr/>
+        </p:nvSpPr>
+        <p:spPr>
+          <a:xfrm>
+            <a:off x="859536" y="5522976"/>
+            <a:ext cx="4526280" cy="365760"/>
           </a:xfrm>
           <a:prstGeom prst="rect">
             <a:avLst/>
@@ -5693,268 +6707,95 @@
           <a:lstStyle/>
           <a:p>
             <a:pPr marL="0" indent="0" algn="r" rtl="1">
-              <a:buNone/>
-            </a:pPr>
-            <a:r>
-              <a:rPr lang="en-US" sz="1200" dirty="0">
-                <a:solidFill>
-                  <a:srgbClr val="9BA3AE"/>
+              <a:lnSpc>
+                <a:spcPts val="1600"/>
+              </a:lnSpc>
+              <a:buNone/>
+            </a:pPr>
+            <a:r>
+              <a:rPr lang="en-US" sz="1250" dirty="0">
+                <a:solidFill>
+                  <a:srgbClr val="E8E4DC"/>
                 </a:solidFill>
                 <a:latin typeface="Arial" pitchFamily="34" charset="0"/>
                 <a:ea typeface="Arial" pitchFamily="34" charset="-122"/>
                 <a:cs typeface="Arial" pitchFamily="34" charset="-120"/>
               </a:rPr>
-              <a:t>מניעת התחזות בסיסית</a:t>
-            </a:r>
-            <a:endParaRPr lang="en-US" sz="1200" dirty="0"/>
-          </a:p>
-        </p:txBody>
-      </p:sp>
-      <p:sp>
-        <p:nvSpPr>
-          <p:cNvPr id="42" name="Shape 36"/>
-          <p:cNvSpPr/>
-          <p:nvPr/>
-        </p:nvSpPr>
-        <p:spPr>
-          <a:xfrm>
-            <a:off x="4293108" y="5431536"/>
-            <a:ext cx="3602736" cy="1133856"/>
-          </a:xfrm>
-          <a:prstGeom prst="roundRect">
-            <a:avLst>
-              <a:gd name="adj" fmla="val 8065"/>
-            </a:avLst>
-          </a:prstGeom>
-          <a:solidFill>
-            <a:srgbClr val="252C36"/>
-          </a:solidFill>
-          <a:ln/>
-        </p:spPr>
-      </p:sp>
-      <p:pic>
-        <p:nvPicPr>
-          <p:cNvPr id="43" name="Image 4" descr="/home/claude/deck/icons/calendar_gold.png"/>
-          <p:cNvPicPr>
-            <a:picLocks noChangeAspect="1"/>
-          </p:cNvPicPr>
-          <p:nvPr/>
-        </p:nvPicPr>
-        <p:blipFill>
-          <a:blip r:embed="rId7"/>
-          <a:stretch>
-            <a:fillRect/>
-          </a:stretch>
-        </p:blipFill>
-        <p:spPr>
-          <a:xfrm>
-            <a:off x="7182612" y="5687568"/>
-            <a:ext cx="329184" cy="329184"/>
-          </a:xfrm>
-          <a:prstGeom prst="rect">
-            <a:avLst/>
-          </a:prstGeom>
-        </p:spPr>
-      </p:pic>
-      <p:sp>
-        <p:nvSpPr>
-          <p:cNvPr id="44" name="Text 37"/>
-          <p:cNvSpPr/>
-          <p:nvPr/>
-        </p:nvSpPr>
-        <p:spPr>
-          <a:xfrm>
-            <a:off x="4585716" y="5614416"/>
-            <a:ext cx="2596896" cy="384048"/>
-          </a:xfrm>
-          <a:prstGeom prst="rect">
-            <a:avLst/>
-          </a:prstGeom>
-          <a:noFill/>
-          <a:ln/>
-        </p:spPr>
-        <p:txBody>
-          <a:bodyPr wrap="square" lIns="0" tIns="0" rIns="0" bIns="0" rtlCol="0" anchor="ctr"/>
+              <a:t>חסימת ימים</a:t>
+            </a:r>
+            <a:r>
+              <a:rPr lang="he-IL" sz="1250" dirty="0">
+                <a:solidFill>
+                  <a:srgbClr val="E8E4DC"/>
+                </a:solidFill>
+                <a:latin typeface="Arial" pitchFamily="34" charset="0"/>
+                <a:ea typeface="Arial" pitchFamily="34" charset="-122"/>
+                <a:cs typeface="Arial" pitchFamily="34" charset="-120"/>
+              </a:rPr>
+              <a:t>, תאריכים ושעות</a:t>
+            </a:r>
+            <a:endParaRPr lang="en-US" sz="1250" dirty="0"/>
+          </a:p>
+        </p:txBody>
+      </p:sp>
+      <p:sp>
+        <p:nvSpPr>
+          <p:cNvPr id="63" name="Shape 53"/>
+          <p:cNvSpPr/>
+          <p:nvPr/>
+        </p:nvSpPr>
+        <p:spPr>
+          <a:xfrm>
+            <a:off x="5513832" y="5955411"/>
+            <a:ext cx="73152" cy="73152"/>
+          </a:xfrm>
+          <a:prstGeom prst="ellipse">
+            <a:avLst/>
+          </a:prstGeom>
+          <a:solidFill>
+            <a:srgbClr val="C9A96A"/>
+          </a:solidFill>
+          <a:ln/>
+        </p:spPr>
+      </p:sp>
+      <p:sp>
+        <p:nvSpPr>
+          <p:cNvPr id="64" name="Text 54"/>
+          <p:cNvSpPr/>
+          <p:nvPr/>
+        </p:nvSpPr>
+        <p:spPr>
+          <a:xfrm>
+            <a:off x="859536" y="5888736"/>
+            <a:ext cx="4526280" cy="365760"/>
+          </a:xfrm>
+          <a:prstGeom prst="rect">
+            <a:avLst/>
+          </a:prstGeom>
+          <a:noFill/>
+          <a:ln/>
+        </p:spPr>
+        <p:txBody>
+          <a:bodyPr wrap="square" lIns="0" tIns="0" rIns="0" bIns="0" rtlCol="0" anchor="t"/>
           <a:lstStyle/>
           <a:p>
             <a:pPr marL="0" indent="0" algn="r" rtl="1">
-              <a:buNone/>
-            </a:pPr>
-            <a:r>
-              <a:rPr lang="en-US" sz="1400" b="1" dirty="0">
-                <a:solidFill>
-                  <a:srgbClr val="F5F1EA"/>
+              <a:lnSpc>
+                <a:spcPts val="1600"/>
+              </a:lnSpc>
+              <a:buNone/>
+            </a:pPr>
+            <a:r>
+              <a:rPr lang="he-IL" sz="1250" dirty="0">
+                <a:solidFill>
+                  <a:srgbClr val="E8E4DC"/>
                 </a:solidFill>
                 <a:latin typeface="Arial" pitchFamily="34" charset="0"/>
-                <a:ea typeface="Arial" pitchFamily="34" charset="-122"/>
-                <a:cs typeface="Arial" pitchFamily="34" charset="-120"/>
-              </a:rPr>
-              <a:t>חסימת ימים ושעות</a:t>
-            </a:r>
-            <a:endParaRPr lang="en-US" sz="1400" dirty="0"/>
-          </a:p>
-        </p:txBody>
-      </p:sp>
-      <p:sp>
-        <p:nvSpPr>
-          <p:cNvPr id="45" name="Text 38"/>
-          <p:cNvSpPr/>
-          <p:nvPr/>
-        </p:nvSpPr>
-        <p:spPr>
-          <a:xfrm>
-            <a:off x="4585716" y="6035040"/>
-            <a:ext cx="3017520" cy="347472"/>
-          </a:xfrm>
-          <a:prstGeom prst="rect">
-            <a:avLst/>
-          </a:prstGeom>
-          <a:noFill/>
-          <a:ln/>
-        </p:spPr>
-        <p:txBody>
-          <a:bodyPr wrap="square" lIns="0" tIns="0" rIns="0" bIns="0" rtlCol="0" anchor="t"/>
-          <a:lstStyle/>
-          <a:p>
-            <a:pPr marL="0" indent="0" algn="r" rtl="1">
-              <a:buNone/>
-            </a:pPr>
-            <a:r>
-              <a:rPr lang="en-US" sz="1200" dirty="0">
-                <a:solidFill>
-                  <a:srgbClr val="9BA3AE"/>
-                </a:solidFill>
-                <a:latin typeface="Arial" pitchFamily="34" charset="0"/>
-                <a:ea typeface="Arial" pitchFamily="34" charset="-122"/>
-                <a:cs typeface="Arial" pitchFamily="34" charset="-120"/>
-              </a:rPr>
-              <a:t>ניהול יומן קרוב למציאות</a:t>
-            </a:r>
-            <a:endParaRPr lang="en-US" sz="1200" dirty="0"/>
-          </a:p>
-        </p:txBody>
-      </p:sp>
-      <p:sp>
-        <p:nvSpPr>
-          <p:cNvPr id="46" name="Shape 39"/>
-          <p:cNvSpPr/>
-          <p:nvPr/>
-        </p:nvSpPr>
-        <p:spPr>
-          <a:xfrm>
-            <a:off x="470916" y="5431536"/>
-            <a:ext cx="3602736" cy="1133856"/>
-          </a:xfrm>
-          <a:prstGeom prst="roundRect">
-            <a:avLst>
-              <a:gd name="adj" fmla="val 8065"/>
-            </a:avLst>
-          </a:prstGeom>
-          <a:solidFill>
-            <a:srgbClr val="252C36"/>
-          </a:solidFill>
-          <a:ln/>
-        </p:spPr>
-      </p:sp>
-      <p:pic>
-        <p:nvPicPr>
-          <p:cNvPr id="47" name="Image 5" descr="/home/claude/deck/icons/check_gold.png"/>
-          <p:cNvPicPr>
-            <a:picLocks noChangeAspect="1"/>
-          </p:cNvPicPr>
-          <p:nvPr/>
-        </p:nvPicPr>
-        <p:blipFill>
-          <a:blip r:embed="rId8"/>
-          <a:stretch>
-            <a:fillRect/>
-          </a:stretch>
-        </p:blipFill>
-        <p:spPr>
-          <a:xfrm>
-            <a:off x="3360420" y="5687568"/>
-            <a:ext cx="329184" cy="329184"/>
-          </a:xfrm>
-          <a:prstGeom prst="rect">
-            <a:avLst/>
-          </a:prstGeom>
-        </p:spPr>
-      </p:pic>
-      <p:sp>
-        <p:nvSpPr>
-          <p:cNvPr id="48" name="Text 40"/>
-          <p:cNvSpPr/>
-          <p:nvPr/>
-        </p:nvSpPr>
-        <p:spPr>
-          <a:xfrm>
-            <a:off x="763524" y="5614416"/>
-            <a:ext cx="2596896" cy="384048"/>
-          </a:xfrm>
-          <a:prstGeom prst="rect">
-            <a:avLst/>
-          </a:prstGeom>
-          <a:noFill/>
-          <a:ln/>
-        </p:spPr>
-        <p:txBody>
-          <a:bodyPr wrap="square" lIns="0" tIns="0" rIns="0" bIns="0" rtlCol="0" anchor="ctr"/>
-          <a:lstStyle/>
-          <a:p>
-            <a:pPr marL="0" indent="0" algn="r" rtl="1">
-              <a:buNone/>
-            </a:pPr>
-            <a:r>
-              <a:rPr lang="en-US" sz="1400" b="1" dirty="0">
-                <a:solidFill>
-                  <a:srgbClr val="F5F1EA"/>
-                </a:solidFill>
-                <a:latin typeface="Arial" pitchFamily="34" charset="0"/>
-                <a:ea typeface="Arial" pitchFamily="34" charset="-122"/>
-                <a:cs typeface="Arial" pitchFamily="34" charset="-120"/>
-              </a:rPr>
-              <a:t>עברית, RTL ומובייל</a:t>
-            </a:r>
-            <a:endParaRPr lang="en-US" sz="1400" dirty="0"/>
-          </a:p>
-        </p:txBody>
-      </p:sp>
-      <p:sp>
-        <p:nvSpPr>
-          <p:cNvPr id="49" name="Text 41"/>
-          <p:cNvSpPr/>
-          <p:nvPr/>
-        </p:nvSpPr>
-        <p:spPr>
-          <a:xfrm>
-            <a:off x="763524" y="6035040"/>
-            <a:ext cx="3017520" cy="347472"/>
-          </a:xfrm>
-          <a:prstGeom prst="rect">
-            <a:avLst/>
-          </a:prstGeom>
-          <a:noFill/>
-          <a:ln/>
-        </p:spPr>
-        <p:txBody>
-          <a:bodyPr wrap="square" lIns="0" tIns="0" rIns="0" bIns="0" rtlCol="0" anchor="t"/>
-          <a:lstStyle/>
-          <a:p>
-            <a:pPr marL="0" indent="0" algn="r" rtl="1">
-              <a:buNone/>
-            </a:pPr>
-            <a:r>
-              <a:rPr lang="en-US" sz="1200" dirty="0">
-                <a:solidFill>
-                  <a:srgbClr val="9BA3AE"/>
-                </a:solidFill>
-                <a:latin typeface="Arial" pitchFamily="34" charset="0"/>
-                <a:ea typeface="Arial" pitchFamily="34" charset="-122"/>
-                <a:cs typeface="Arial" pitchFamily="34" charset="-120"/>
-              </a:rPr>
-              <a:t>חוויית משתמש פשוטה</a:t>
-            </a:r>
-            <a:endParaRPr lang="en-US" sz="1200" dirty="0"/>
+                <a:cs typeface="Arial" pitchFamily="34" charset="-120"/>
+              </a:rPr>
+              <a:t>מערכת פשוטה לתפעול משתמש</a:t>
+            </a:r>
+            <a:endParaRPr lang="en-US" sz="1250" dirty="0"/>
           </a:p>
         </p:txBody>
       </p:sp>
@@ -5967,6 +6808,1697 @@
 </file>
 
 <file path=ppt/slides/slide5.xml><?xml version="1.0" encoding="utf-8"?>
+<p:sld xmlns:a="http://schemas.openxmlformats.org/drawingml/2006/main" xmlns:r="http://schemas.openxmlformats.org/officeDocument/2006/relationships" xmlns:p="http://schemas.openxmlformats.org/presentationml/2006/main">
+  <p:cSld>
+    <p:bg>
+      <p:bgPr>
+        <a:solidFill>
+          <a:srgbClr val="F5F1EA"/>
+        </a:solidFill>
+        <a:effectLst/>
+      </p:bgPr>
+    </p:bg>
+    <p:spTree>
+      <p:nvGrpSpPr>
+        <p:cNvPr id="1" name=""/>
+        <p:cNvGrpSpPr/>
+        <p:nvPr/>
+      </p:nvGrpSpPr>
+      <p:grpSpPr>
+        <a:xfrm>
+          <a:off x="0" y="0"/>
+          <a:ext cx="0" cy="0"/>
+          <a:chOff x="0" y="0"/>
+          <a:chExt cx="0" cy="0"/>
+        </a:xfrm>
+      </p:grpSpPr>
+      <p:sp>
+        <p:nvSpPr>
+          <p:cNvPr id="63" name="Text 0">
+            <a:extLst>
+              <a:ext uri="{FF2B5EF4-FFF2-40B4-BE49-F238E27FC236}">
+                <a16:creationId xmlns:a16="http://schemas.microsoft.com/office/drawing/2014/main" id="{A2C2D987-8DB1-4C51-29BB-2CB0EB0C2044}"/>
+              </a:ext>
+            </a:extLst>
+          </p:cNvPr>
+          <p:cNvSpPr/>
+          <p:nvPr/>
+        </p:nvSpPr>
+        <p:spPr>
+          <a:xfrm>
+            <a:off x="3164586" y="356616"/>
+            <a:ext cx="5658612" cy="530352"/>
+          </a:xfrm>
+          <a:prstGeom prst="rect">
+            <a:avLst/>
+          </a:prstGeom>
+          <a:noFill/>
+          <a:ln/>
+        </p:spPr>
+        <p:txBody>
+          <a:bodyPr wrap="square" lIns="0" tIns="0" rIns="0" bIns="0" rtlCol="0" anchor="ctr"/>
+          <a:lstStyle/>
+          <a:p>
+            <a:pPr marL="0" indent="0" algn="r" rtl="1">
+              <a:buNone/>
+            </a:pPr>
+            <a:r>
+              <a:rPr lang="en-US" sz="3500" b="1" dirty="0">
+                <a:solidFill>
+                  <a:srgbClr val="1F2933"/>
+                </a:solidFill>
+                <a:ea typeface="Arial" pitchFamily="34" charset="-122"/>
+                <a:cs typeface="Arial" pitchFamily="34" charset="-120"/>
+              </a:rPr>
+              <a:t>בעיות, מגבלות ואיך התמודדנו</a:t>
+            </a:r>
+            <a:endParaRPr lang="en-US" sz="3500" dirty="0"/>
+          </a:p>
+        </p:txBody>
+      </p:sp>
+      <p:sp>
+        <p:nvSpPr>
+          <p:cNvPr id="64" name="Text 1">
+            <a:extLst>
+              <a:ext uri="{FF2B5EF4-FFF2-40B4-BE49-F238E27FC236}">
+                <a16:creationId xmlns:a16="http://schemas.microsoft.com/office/drawing/2014/main" id="{59CE2C30-73BC-25B3-4B53-550D9384F282}"/>
+              </a:ext>
+            </a:extLst>
+          </p:cNvPr>
+          <p:cNvSpPr/>
+          <p:nvPr/>
+        </p:nvSpPr>
+        <p:spPr>
+          <a:xfrm>
+            <a:off x="4103370" y="1006221"/>
+            <a:ext cx="3781044" cy="310896"/>
+          </a:xfrm>
+          <a:prstGeom prst="rect">
+            <a:avLst/>
+          </a:prstGeom>
+          <a:noFill/>
+          <a:ln/>
+        </p:spPr>
+        <p:txBody>
+          <a:bodyPr wrap="square" lIns="0" tIns="0" rIns="0" bIns="0" rtlCol="0" anchor="ctr"/>
+          <a:lstStyle/>
+          <a:p>
+            <a:pPr algn="r" rtl="1"/>
+            <a:r>
+              <a:rPr lang="he-IL" sz="1400" b="1" dirty="0">
+                <a:solidFill>
+                  <a:srgbClr val="6B5426"/>
+                </a:solidFill>
+                <a:ea typeface="Arial" pitchFamily="34" charset="-122"/>
+                <a:cs typeface="Arial" pitchFamily="34" charset="-120"/>
+              </a:rPr>
+              <a:t>כל תקלה שעלתה בפיתוח תועדה, נותחה ותוקנה</a:t>
+            </a:r>
+          </a:p>
+          <a:p>
+            <a:pPr marL="0" indent="0" algn="r" rtl="1">
+              <a:buNone/>
+            </a:pPr>
+            <a:endParaRPr lang="en-US" sz="1450" dirty="0"/>
+          </a:p>
+        </p:txBody>
+      </p:sp>
+      <p:sp>
+        <p:nvSpPr>
+          <p:cNvPr id="65" name="Shape 2">
+            <a:extLst>
+              <a:ext uri="{FF2B5EF4-FFF2-40B4-BE49-F238E27FC236}">
+                <a16:creationId xmlns:a16="http://schemas.microsoft.com/office/drawing/2014/main" id="{E5DC9108-4FDC-7408-9940-547776D55AD6}"/>
+              </a:ext>
+            </a:extLst>
+          </p:cNvPr>
+          <p:cNvSpPr/>
+          <p:nvPr/>
+        </p:nvSpPr>
+        <p:spPr>
+          <a:xfrm>
+            <a:off x="8078724" y="1572768"/>
+            <a:ext cx="3529584" cy="1426464"/>
+          </a:xfrm>
+          <a:prstGeom prst="roundRect">
+            <a:avLst>
+              <a:gd name="adj" fmla="val 7051"/>
+            </a:avLst>
+          </a:prstGeom>
+          <a:solidFill>
+            <a:srgbClr val="FFFFFF"/>
+          </a:solidFill>
+          <a:ln w="12700">
+            <a:solidFill>
+              <a:srgbClr val="E3DCD1"/>
+            </a:solidFill>
+            <a:prstDash val="solid"/>
+          </a:ln>
+        </p:spPr>
+      </p:sp>
+      <p:sp>
+        <p:nvSpPr>
+          <p:cNvPr id="66" name="Shape 3">
+            <a:extLst>
+              <a:ext uri="{FF2B5EF4-FFF2-40B4-BE49-F238E27FC236}">
+                <a16:creationId xmlns:a16="http://schemas.microsoft.com/office/drawing/2014/main" id="{66C71ED8-952D-6098-49F6-2ECFF0FC48EF}"/>
+              </a:ext>
+            </a:extLst>
+          </p:cNvPr>
+          <p:cNvSpPr/>
+          <p:nvPr/>
+        </p:nvSpPr>
+        <p:spPr>
+          <a:xfrm>
+            <a:off x="10949940" y="1755648"/>
+            <a:ext cx="420624" cy="420624"/>
+          </a:xfrm>
+          <a:prstGeom prst="ellipse">
+            <a:avLst/>
+          </a:prstGeom>
+          <a:solidFill>
+            <a:srgbClr val="EFE4CE"/>
+          </a:solidFill>
+          <a:ln/>
+        </p:spPr>
+      </p:sp>
+      <p:pic>
+        <p:nvPicPr>
+          <p:cNvPr id="67" name="Image 0" descr="/home/claude/deck/icons/bug_dark.png">
+            <a:extLst>
+              <a:ext uri="{FF2B5EF4-FFF2-40B4-BE49-F238E27FC236}">
+                <a16:creationId xmlns:a16="http://schemas.microsoft.com/office/drawing/2014/main" id="{39CE8A39-BDB0-EFA8-81C9-5F5EB0107182}"/>
+              </a:ext>
+            </a:extLst>
+          </p:cNvPr>
+          <p:cNvPicPr>
+            <a:picLocks noChangeAspect="1"/>
+          </p:cNvPicPr>
+          <p:nvPr/>
+        </p:nvPicPr>
+        <p:blipFill>
+          <a:blip r:embed="rId3"/>
+          <a:stretch>
+            <a:fillRect/>
+          </a:stretch>
+        </p:blipFill>
+        <p:spPr>
+          <a:xfrm>
+            <a:off x="11059668" y="1865376"/>
+            <a:ext cx="201168" cy="201168"/>
+          </a:xfrm>
+          <a:prstGeom prst="rect">
+            <a:avLst/>
+          </a:prstGeom>
+        </p:spPr>
+      </p:pic>
+      <p:sp>
+        <p:nvSpPr>
+          <p:cNvPr id="68" name="Text 4">
+            <a:extLst>
+              <a:ext uri="{FF2B5EF4-FFF2-40B4-BE49-F238E27FC236}">
+                <a16:creationId xmlns:a16="http://schemas.microsoft.com/office/drawing/2014/main" id="{A98416DE-6658-8933-C47D-8B752D3D4C73}"/>
+              </a:ext>
+            </a:extLst>
+          </p:cNvPr>
+          <p:cNvSpPr/>
+          <p:nvPr/>
+        </p:nvSpPr>
+        <p:spPr>
+          <a:xfrm>
+            <a:off x="8316468" y="1755648"/>
+            <a:ext cx="2560320" cy="420624"/>
+          </a:xfrm>
+          <a:prstGeom prst="rect">
+            <a:avLst/>
+          </a:prstGeom>
+          <a:noFill/>
+          <a:ln/>
+        </p:spPr>
+        <p:txBody>
+          <a:bodyPr wrap="square" lIns="0" tIns="0" rIns="0" bIns="0" rtlCol="0" anchor="ctr"/>
+          <a:lstStyle/>
+          <a:p>
+            <a:pPr marL="0" indent="0" algn="r" rtl="1">
+              <a:buNone/>
+            </a:pPr>
+            <a:r>
+              <a:rPr lang="en-US" sz="1300" b="1" dirty="0">
+                <a:solidFill>
+                  <a:srgbClr val="1F2933"/>
+                </a:solidFill>
+                <a:ea typeface="Arial" pitchFamily="34" charset="-122"/>
+                <a:cs typeface="Arial" pitchFamily="34" charset="-120"/>
+              </a:rPr>
+              <a:t>דף לבן בהרצה הראשונה</a:t>
+            </a:r>
+            <a:endParaRPr lang="en-US" sz="1300" dirty="0"/>
+          </a:p>
+        </p:txBody>
+      </p:sp>
+      <p:sp>
+        <p:nvSpPr>
+          <p:cNvPr id="69" name="Text 5">
+            <a:extLst>
+              <a:ext uri="{FF2B5EF4-FFF2-40B4-BE49-F238E27FC236}">
+                <a16:creationId xmlns:a16="http://schemas.microsoft.com/office/drawing/2014/main" id="{8DE29BC6-A8BC-0D5C-24DA-9B8D8B962E0C}"/>
+              </a:ext>
+            </a:extLst>
+          </p:cNvPr>
+          <p:cNvSpPr/>
+          <p:nvPr/>
+        </p:nvSpPr>
+        <p:spPr>
+          <a:xfrm>
+            <a:off x="8316468" y="2231136"/>
+            <a:ext cx="3054096" cy="658368"/>
+          </a:xfrm>
+          <a:prstGeom prst="rect">
+            <a:avLst/>
+          </a:prstGeom>
+          <a:noFill/>
+          <a:ln/>
+        </p:spPr>
+        <p:txBody>
+          <a:bodyPr wrap="square" lIns="0" tIns="0" rIns="0" bIns="0" rtlCol="0" anchor="t"/>
+          <a:lstStyle/>
+          <a:p>
+            <a:pPr marL="0" indent="0" algn="r" rtl="1">
+              <a:lnSpc>
+                <a:spcPts val="1400"/>
+              </a:lnSpc>
+              <a:buNone/>
+            </a:pPr>
+            <a:r>
+              <a:rPr lang="en-US" sz="1100" dirty="0">
+                <a:ea typeface="Arial" pitchFamily="34" charset="-122"/>
+                <a:cs typeface="Arial" pitchFamily="34" charset="-120"/>
+              </a:rPr>
+              <a:t>התלות בספריות </a:t>
+            </a:r>
+            <a:r>
+              <a:rPr lang="he-IL" sz="1100" dirty="0">
+                <a:ea typeface="Arial" pitchFamily="34" charset="-122"/>
+                <a:cs typeface="Arial" pitchFamily="34" charset="-120"/>
+              </a:rPr>
+              <a:t>חיצוניות </a:t>
+            </a:r>
+            <a:r>
+              <a:rPr lang="en-US" sz="1100" dirty="0">
+                <a:ea typeface="Arial" pitchFamily="34" charset="-122"/>
+                <a:cs typeface="Arial" pitchFamily="34" charset="-120"/>
+              </a:rPr>
+              <a:t>שברה את האפליקציה. כתבנו מחדש כקובץ יחיד ללא תלויות</a:t>
+            </a:r>
+            <a:r>
+              <a:rPr lang="he-IL" sz="1100" dirty="0">
+                <a:ea typeface="Arial" pitchFamily="34" charset="-122"/>
+                <a:cs typeface="Arial" pitchFamily="34" charset="-120"/>
+              </a:rPr>
+              <a:t>.</a:t>
+            </a:r>
+            <a:endParaRPr lang="en-US" sz="1100" dirty="0"/>
+          </a:p>
+        </p:txBody>
+      </p:sp>
+      <p:sp>
+        <p:nvSpPr>
+          <p:cNvPr id="70" name="Shape 6">
+            <a:extLst>
+              <a:ext uri="{FF2B5EF4-FFF2-40B4-BE49-F238E27FC236}">
+                <a16:creationId xmlns:a16="http://schemas.microsoft.com/office/drawing/2014/main" id="{A5FABDD1-2F1B-4256-5738-1DB6EA575504}"/>
+              </a:ext>
+            </a:extLst>
+          </p:cNvPr>
+          <p:cNvSpPr/>
+          <p:nvPr/>
+        </p:nvSpPr>
+        <p:spPr>
+          <a:xfrm>
+            <a:off x="4329684" y="1572768"/>
+            <a:ext cx="3529584" cy="1426464"/>
+          </a:xfrm>
+          <a:prstGeom prst="roundRect">
+            <a:avLst>
+              <a:gd name="adj" fmla="val 7051"/>
+            </a:avLst>
+          </a:prstGeom>
+          <a:solidFill>
+            <a:srgbClr val="FFFFFF"/>
+          </a:solidFill>
+          <a:ln w="12700">
+            <a:solidFill>
+              <a:srgbClr val="E3DCD1"/>
+            </a:solidFill>
+            <a:prstDash val="solid"/>
+          </a:ln>
+        </p:spPr>
+      </p:sp>
+      <p:sp>
+        <p:nvSpPr>
+          <p:cNvPr id="71" name="Shape 7">
+            <a:extLst>
+              <a:ext uri="{FF2B5EF4-FFF2-40B4-BE49-F238E27FC236}">
+                <a16:creationId xmlns:a16="http://schemas.microsoft.com/office/drawing/2014/main" id="{EDAEF2CA-6EED-F9BD-8D4D-BA0477335866}"/>
+              </a:ext>
+            </a:extLst>
+          </p:cNvPr>
+          <p:cNvSpPr/>
+          <p:nvPr/>
+        </p:nvSpPr>
+        <p:spPr>
+          <a:xfrm>
+            <a:off x="7200900" y="1755648"/>
+            <a:ext cx="420624" cy="420624"/>
+          </a:xfrm>
+          <a:prstGeom prst="ellipse">
+            <a:avLst/>
+          </a:prstGeom>
+          <a:solidFill>
+            <a:srgbClr val="EFE4CE"/>
+          </a:solidFill>
+          <a:ln/>
+        </p:spPr>
+      </p:sp>
+      <p:pic>
+        <p:nvPicPr>
+          <p:cNvPr id="72" name="Image 1" descr="/home/claude/deck/icons/clock2_dark.png">
+            <a:extLst>
+              <a:ext uri="{FF2B5EF4-FFF2-40B4-BE49-F238E27FC236}">
+                <a16:creationId xmlns:a16="http://schemas.microsoft.com/office/drawing/2014/main" id="{6FFF74D9-C763-05B7-2AAA-AAE8B49D732E}"/>
+              </a:ext>
+            </a:extLst>
+          </p:cNvPr>
+          <p:cNvPicPr>
+            <a:picLocks noChangeAspect="1"/>
+          </p:cNvPicPr>
+          <p:nvPr/>
+        </p:nvPicPr>
+        <p:blipFill>
+          <a:blip r:embed="rId4"/>
+          <a:stretch>
+            <a:fillRect/>
+          </a:stretch>
+        </p:blipFill>
+        <p:spPr>
+          <a:xfrm>
+            <a:off x="7310628" y="1865376"/>
+            <a:ext cx="201168" cy="201168"/>
+          </a:xfrm>
+          <a:prstGeom prst="rect">
+            <a:avLst/>
+          </a:prstGeom>
+        </p:spPr>
+      </p:pic>
+      <p:sp>
+        <p:nvSpPr>
+          <p:cNvPr id="73" name="Text 8">
+            <a:extLst>
+              <a:ext uri="{FF2B5EF4-FFF2-40B4-BE49-F238E27FC236}">
+                <a16:creationId xmlns:a16="http://schemas.microsoft.com/office/drawing/2014/main" id="{02374618-A99B-247E-2165-F163970DC338}"/>
+              </a:ext>
+            </a:extLst>
+          </p:cNvPr>
+          <p:cNvSpPr/>
+          <p:nvPr/>
+        </p:nvSpPr>
+        <p:spPr>
+          <a:xfrm>
+            <a:off x="4567428" y="1755648"/>
+            <a:ext cx="2560320" cy="420624"/>
+          </a:xfrm>
+          <a:prstGeom prst="rect">
+            <a:avLst/>
+          </a:prstGeom>
+          <a:noFill/>
+          <a:ln/>
+        </p:spPr>
+        <p:txBody>
+          <a:bodyPr wrap="square" lIns="0" tIns="0" rIns="0" bIns="0" rtlCol="0" anchor="ctr"/>
+          <a:lstStyle/>
+          <a:p>
+            <a:pPr marL="0" indent="0" algn="r" rtl="1">
+              <a:buNone/>
+            </a:pPr>
+            <a:r>
+              <a:rPr lang="en-US" sz="1300" b="1" dirty="0">
+                <a:solidFill>
+                  <a:srgbClr val="1F2933"/>
+                </a:solidFill>
+                <a:ea typeface="Arial" pitchFamily="34" charset="-122"/>
+                <a:cs typeface="Arial" pitchFamily="34" charset="-120"/>
+              </a:rPr>
+              <a:t>שעה תפוסה הוצגה כפנויה</a:t>
+            </a:r>
+            <a:endParaRPr lang="en-US" sz="1300" dirty="0"/>
+          </a:p>
+        </p:txBody>
+      </p:sp>
+      <p:sp>
+        <p:nvSpPr>
+          <p:cNvPr id="74" name="Text 9">
+            <a:extLst>
+              <a:ext uri="{FF2B5EF4-FFF2-40B4-BE49-F238E27FC236}">
+                <a16:creationId xmlns:a16="http://schemas.microsoft.com/office/drawing/2014/main" id="{B8AC51D3-9726-40C9-828F-8DEE145316E2}"/>
+              </a:ext>
+            </a:extLst>
+          </p:cNvPr>
+          <p:cNvSpPr/>
+          <p:nvPr/>
+        </p:nvSpPr>
+        <p:spPr>
+          <a:xfrm>
+            <a:off x="4567428" y="2231136"/>
+            <a:ext cx="3054096" cy="658368"/>
+          </a:xfrm>
+          <a:prstGeom prst="rect">
+            <a:avLst/>
+          </a:prstGeom>
+          <a:noFill/>
+          <a:ln/>
+        </p:spPr>
+        <p:txBody>
+          <a:bodyPr wrap="square" lIns="0" tIns="0" rIns="0" bIns="0" rtlCol="0" anchor="t"/>
+          <a:lstStyle/>
+          <a:p>
+            <a:pPr marL="0" indent="0" algn="r" rtl="1">
+              <a:lnSpc>
+                <a:spcPts val="1400"/>
+              </a:lnSpc>
+              <a:buNone/>
+            </a:pPr>
+            <a:r>
+              <a:rPr lang="en-US" sz="1100" dirty="0">
+                <a:ea typeface="Arial" pitchFamily="34" charset="-122"/>
+                <a:cs typeface="Arial" pitchFamily="34" charset="-120"/>
+              </a:rPr>
+              <a:t>תור שממתין לאישור לא נעל את השעה</a:t>
+            </a:r>
+            <a:r>
+              <a:rPr lang="he-IL" sz="1100" dirty="0">
+                <a:ea typeface="Arial" pitchFamily="34" charset="-122"/>
+                <a:cs typeface="Arial" pitchFamily="34" charset="-120"/>
+              </a:rPr>
+              <a:t> והיה זמין לעוד משתמשים. </a:t>
+            </a:r>
+            <a:r>
+              <a:rPr lang="en-US" sz="1100" dirty="0">
+                <a:ea typeface="Arial" pitchFamily="34" charset="-122"/>
+                <a:cs typeface="Arial" pitchFamily="34" charset="-120"/>
+              </a:rPr>
+              <a:t>עברנו לנעילה מיידית ברגע ההזמנה</a:t>
+            </a:r>
+            <a:endParaRPr lang="en-US" sz="1100" dirty="0"/>
+          </a:p>
+        </p:txBody>
+      </p:sp>
+      <p:sp>
+        <p:nvSpPr>
+          <p:cNvPr id="75" name="Shape 10">
+            <a:extLst>
+              <a:ext uri="{FF2B5EF4-FFF2-40B4-BE49-F238E27FC236}">
+                <a16:creationId xmlns:a16="http://schemas.microsoft.com/office/drawing/2014/main" id="{208E1D29-AE65-FF80-A4B0-B5C73571E26F}"/>
+              </a:ext>
+            </a:extLst>
+          </p:cNvPr>
+          <p:cNvSpPr/>
+          <p:nvPr/>
+        </p:nvSpPr>
+        <p:spPr>
+          <a:xfrm>
+            <a:off x="580644" y="1572768"/>
+            <a:ext cx="3529584" cy="1426464"/>
+          </a:xfrm>
+          <a:prstGeom prst="roundRect">
+            <a:avLst>
+              <a:gd name="adj" fmla="val 7051"/>
+            </a:avLst>
+          </a:prstGeom>
+          <a:solidFill>
+            <a:srgbClr val="FFFFFF"/>
+          </a:solidFill>
+          <a:ln w="12700">
+            <a:solidFill>
+              <a:srgbClr val="E3DCD1"/>
+            </a:solidFill>
+            <a:prstDash val="solid"/>
+          </a:ln>
+        </p:spPr>
+      </p:sp>
+      <p:sp>
+        <p:nvSpPr>
+          <p:cNvPr id="76" name="Shape 11">
+            <a:extLst>
+              <a:ext uri="{FF2B5EF4-FFF2-40B4-BE49-F238E27FC236}">
+                <a16:creationId xmlns:a16="http://schemas.microsoft.com/office/drawing/2014/main" id="{65A443B5-F281-0FD3-BB18-3889C79CBB5C}"/>
+              </a:ext>
+            </a:extLst>
+          </p:cNvPr>
+          <p:cNvSpPr/>
+          <p:nvPr/>
+        </p:nvSpPr>
+        <p:spPr>
+          <a:xfrm>
+            <a:off x="3451860" y="1755648"/>
+            <a:ext cx="420624" cy="420624"/>
+          </a:xfrm>
+          <a:prstGeom prst="ellipse">
+            <a:avLst/>
+          </a:prstGeom>
+          <a:solidFill>
+            <a:srgbClr val="EFE4CE"/>
+          </a:solidFill>
+          <a:ln/>
+        </p:spPr>
+      </p:sp>
+      <p:pic>
+        <p:nvPicPr>
+          <p:cNvPr id="77" name="Image 2" descr="/home/claude/deck/icons/usershield_dark.png">
+            <a:extLst>
+              <a:ext uri="{FF2B5EF4-FFF2-40B4-BE49-F238E27FC236}">
+                <a16:creationId xmlns:a16="http://schemas.microsoft.com/office/drawing/2014/main" id="{7F72ABBC-5FEF-EA8F-445C-CDC7573D5EA4}"/>
+              </a:ext>
+            </a:extLst>
+          </p:cNvPr>
+          <p:cNvPicPr>
+            <a:picLocks noChangeAspect="1"/>
+          </p:cNvPicPr>
+          <p:nvPr/>
+        </p:nvPicPr>
+        <p:blipFill>
+          <a:blip r:embed="rId5"/>
+          <a:stretch>
+            <a:fillRect/>
+          </a:stretch>
+        </p:blipFill>
+        <p:spPr>
+          <a:xfrm>
+            <a:off x="3561588" y="1865376"/>
+            <a:ext cx="201168" cy="201168"/>
+          </a:xfrm>
+          <a:prstGeom prst="rect">
+            <a:avLst/>
+          </a:prstGeom>
+        </p:spPr>
+      </p:pic>
+      <p:sp>
+        <p:nvSpPr>
+          <p:cNvPr id="78" name="Text 12">
+            <a:extLst>
+              <a:ext uri="{FF2B5EF4-FFF2-40B4-BE49-F238E27FC236}">
+                <a16:creationId xmlns:a16="http://schemas.microsoft.com/office/drawing/2014/main" id="{102B6996-8EFA-28F8-DE73-5A4BDF9E15CE}"/>
+              </a:ext>
+            </a:extLst>
+          </p:cNvPr>
+          <p:cNvSpPr/>
+          <p:nvPr/>
+        </p:nvSpPr>
+        <p:spPr>
+          <a:xfrm>
+            <a:off x="818388" y="1755648"/>
+            <a:ext cx="2560320" cy="420624"/>
+          </a:xfrm>
+          <a:prstGeom prst="rect">
+            <a:avLst/>
+          </a:prstGeom>
+          <a:noFill/>
+          <a:ln/>
+        </p:spPr>
+        <p:txBody>
+          <a:bodyPr wrap="square" lIns="0" tIns="0" rIns="0" bIns="0" rtlCol="0" anchor="ctr"/>
+          <a:lstStyle/>
+          <a:p>
+            <a:pPr marL="0" indent="0" algn="r" rtl="1">
+              <a:buNone/>
+            </a:pPr>
+            <a:r>
+              <a:rPr lang="en-US" sz="1300" b="1" dirty="0">
+                <a:solidFill>
+                  <a:srgbClr val="1F2933"/>
+                </a:solidFill>
+                <a:ea typeface="Arial" pitchFamily="34" charset="-122"/>
+                <a:cs typeface="Arial" pitchFamily="34" charset="-120"/>
+              </a:rPr>
+              <a:t>אפשר היה להתחזות ללקוח</a:t>
+            </a:r>
+            <a:endParaRPr lang="en-US" sz="1300" dirty="0"/>
+          </a:p>
+        </p:txBody>
+      </p:sp>
+      <p:sp>
+        <p:nvSpPr>
+          <p:cNvPr id="79" name="Text 13">
+            <a:extLst>
+              <a:ext uri="{FF2B5EF4-FFF2-40B4-BE49-F238E27FC236}">
+                <a16:creationId xmlns:a16="http://schemas.microsoft.com/office/drawing/2014/main" id="{6C74E06B-15D9-242F-D2EA-4BD3EDEEA828}"/>
+              </a:ext>
+            </a:extLst>
+          </p:cNvPr>
+          <p:cNvSpPr/>
+          <p:nvPr/>
+        </p:nvSpPr>
+        <p:spPr>
+          <a:xfrm>
+            <a:off x="818388" y="2231136"/>
+            <a:ext cx="3054096" cy="658368"/>
+          </a:xfrm>
+          <a:prstGeom prst="rect">
+            <a:avLst/>
+          </a:prstGeom>
+          <a:noFill/>
+          <a:ln/>
+        </p:spPr>
+        <p:txBody>
+          <a:bodyPr wrap="square" lIns="0" tIns="0" rIns="0" bIns="0" rtlCol="0" anchor="t"/>
+          <a:lstStyle/>
+          <a:p>
+            <a:pPr marL="0" indent="0" algn="r" rtl="1">
+              <a:lnSpc>
+                <a:spcPts val="1400"/>
+              </a:lnSpc>
+              <a:buNone/>
+            </a:pPr>
+            <a:r>
+              <a:rPr lang="en-US" sz="1100" dirty="0">
+                <a:ea typeface="Arial" pitchFamily="34" charset="-122"/>
+                <a:cs typeface="Arial" pitchFamily="34" charset="-120"/>
+              </a:rPr>
+              <a:t>החלפנו את לקוחות הדמו הקבועים בהרשמה מלאה עם קשירת שם לתעודת זהות</a:t>
+            </a:r>
+            <a:r>
+              <a:rPr lang="he-IL" sz="1100" dirty="0">
+                <a:ea typeface="Arial" pitchFamily="34" charset="-122"/>
+                <a:cs typeface="Arial" pitchFamily="34" charset="-120"/>
+              </a:rPr>
+              <a:t> כדי למנוע כפילות.</a:t>
+            </a:r>
+            <a:endParaRPr lang="en-US" sz="1100" dirty="0"/>
+          </a:p>
+        </p:txBody>
+      </p:sp>
+      <p:sp>
+        <p:nvSpPr>
+          <p:cNvPr id="80" name="Shape 14">
+            <a:extLst>
+              <a:ext uri="{FF2B5EF4-FFF2-40B4-BE49-F238E27FC236}">
+                <a16:creationId xmlns:a16="http://schemas.microsoft.com/office/drawing/2014/main" id="{EB7BBF08-A32B-0D2A-5251-AC0BD344FE50}"/>
+              </a:ext>
+            </a:extLst>
+          </p:cNvPr>
+          <p:cNvSpPr/>
+          <p:nvPr/>
+        </p:nvSpPr>
+        <p:spPr>
+          <a:xfrm>
+            <a:off x="8078724" y="3182112"/>
+            <a:ext cx="3529584" cy="1426464"/>
+          </a:xfrm>
+          <a:prstGeom prst="roundRect">
+            <a:avLst>
+              <a:gd name="adj" fmla="val 7051"/>
+            </a:avLst>
+          </a:prstGeom>
+          <a:solidFill>
+            <a:srgbClr val="FFFFFF"/>
+          </a:solidFill>
+          <a:ln w="12700">
+            <a:solidFill>
+              <a:srgbClr val="E3DCD1"/>
+            </a:solidFill>
+            <a:prstDash val="solid"/>
+          </a:ln>
+        </p:spPr>
+      </p:sp>
+      <p:sp>
+        <p:nvSpPr>
+          <p:cNvPr id="81" name="Shape 15">
+            <a:extLst>
+              <a:ext uri="{FF2B5EF4-FFF2-40B4-BE49-F238E27FC236}">
+                <a16:creationId xmlns:a16="http://schemas.microsoft.com/office/drawing/2014/main" id="{855948BC-A743-E5D9-BB68-FBEB20D04519}"/>
+              </a:ext>
+            </a:extLst>
+          </p:cNvPr>
+          <p:cNvSpPr/>
+          <p:nvPr/>
+        </p:nvSpPr>
+        <p:spPr>
+          <a:xfrm>
+            <a:off x="10949940" y="3364992"/>
+            <a:ext cx="420624" cy="420624"/>
+          </a:xfrm>
+          <a:prstGeom prst="ellipse">
+            <a:avLst/>
+          </a:prstGeom>
+          <a:solidFill>
+            <a:srgbClr val="EFE4CE"/>
+          </a:solidFill>
+          <a:ln/>
+        </p:spPr>
+      </p:sp>
+      <p:pic>
+        <p:nvPicPr>
+          <p:cNvPr id="82" name="Image 3" descr="/home/claude/deck/icons/key_dark.png">
+            <a:extLst>
+              <a:ext uri="{FF2B5EF4-FFF2-40B4-BE49-F238E27FC236}">
+                <a16:creationId xmlns:a16="http://schemas.microsoft.com/office/drawing/2014/main" id="{914936F9-0D76-DBB4-DFC6-D04116282A82}"/>
+              </a:ext>
+            </a:extLst>
+          </p:cNvPr>
+          <p:cNvPicPr>
+            <a:picLocks noChangeAspect="1"/>
+          </p:cNvPicPr>
+          <p:nvPr/>
+        </p:nvPicPr>
+        <p:blipFill>
+          <a:blip r:embed="rId6"/>
+          <a:stretch>
+            <a:fillRect/>
+          </a:stretch>
+        </p:blipFill>
+        <p:spPr>
+          <a:xfrm>
+            <a:off x="11059668" y="3474720"/>
+            <a:ext cx="201168" cy="201168"/>
+          </a:xfrm>
+          <a:prstGeom prst="rect">
+            <a:avLst/>
+          </a:prstGeom>
+        </p:spPr>
+      </p:pic>
+      <p:sp>
+        <p:nvSpPr>
+          <p:cNvPr id="83" name="Text 16">
+            <a:extLst>
+              <a:ext uri="{FF2B5EF4-FFF2-40B4-BE49-F238E27FC236}">
+                <a16:creationId xmlns:a16="http://schemas.microsoft.com/office/drawing/2014/main" id="{A4F1777E-588F-9673-FF56-64B4EB802A77}"/>
+              </a:ext>
+            </a:extLst>
+          </p:cNvPr>
+          <p:cNvSpPr/>
+          <p:nvPr/>
+        </p:nvSpPr>
+        <p:spPr>
+          <a:xfrm>
+            <a:off x="8316468" y="3364992"/>
+            <a:ext cx="2560320" cy="420624"/>
+          </a:xfrm>
+          <a:prstGeom prst="rect">
+            <a:avLst/>
+          </a:prstGeom>
+          <a:noFill/>
+          <a:ln/>
+        </p:spPr>
+        <p:txBody>
+          <a:bodyPr wrap="square" lIns="0" tIns="0" rIns="0" bIns="0" rtlCol="0" anchor="ctr"/>
+          <a:lstStyle/>
+          <a:p>
+            <a:pPr marL="0" indent="0" algn="r" rtl="1">
+              <a:buNone/>
+            </a:pPr>
+            <a:r>
+              <a:rPr lang="en-US" sz="1300" b="1" dirty="0">
+                <a:solidFill>
+                  <a:srgbClr val="1F2933"/>
+                </a:solidFill>
+                <a:ea typeface="Arial" pitchFamily="34" charset="-122"/>
+                <a:cs typeface="Arial" pitchFamily="34" charset="-120"/>
+              </a:rPr>
+              <a:t>אימות חלש מדי בכניסה</a:t>
+            </a:r>
+            <a:endParaRPr lang="en-US" sz="1300" dirty="0"/>
+          </a:p>
+        </p:txBody>
+      </p:sp>
+      <p:sp>
+        <p:nvSpPr>
+          <p:cNvPr id="84" name="Text 17">
+            <a:extLst>
+              <a:ext uri="{FF2B5EF4-FFF2-40B4-BE49-F238E27FC236}">
+                <a16:creationId xmlns:a16="http://schemas.microsoft.com/office/drawing/2014/main" id="{229B411E-B072-5D05-7723-F972798C73FD}"/>
+              </a:ext>
+            </a:extLst>
+          </p:cNvPr>
+          <p:cNvSpPr/>
+          <p:nvPr/>
+        </p:nvSpPr>
+        <p:spPr>
+          <a:xfrm>
+            <a:off x="8316468" y="3840480"/>
+            <a:ext cx="3054096" cy="658368"/>
+          </a:xfrm>
+          <a:prstGeom prst="rect">
+            <a:avLst/>
+          </a:prstGeom>
+          <a:noFill/>
+          <a:ln/>
+        </p:spPr>
+        <p:txBody>
+          <a:bodyPr wrap="square" lIns="0" tIns="0" rIns="0" bIns="0" rtlCol="0" anchor="t"/>
+          <a:lstStyle/>
+          <a:p>
+            <a:pPr marL="0" indent="0" algn="r" rtl="1">
+              <a:lnSpc>
+                <a:spcPts val="1400"/>
+              </a:lnSpc>
+              <a:buNone/>
+            </a:pPr>
+            <a:r>
+              <a:rPr lang="en-US" sz="1100" dirty="0">
+                <a:ea typeface="Arial" pitchFamily="34" charset="-122"/>
+                <a:cs typeface="Arial" pitchFamily="34" charset="-120"/>
+              </a:rPr>
+              <a:t>הוספנו סיסמה אישית </a:t>
+            </a:r>
+            <a:r>
+              <a:rPr lang="he-IL" sz="1100" dirty="0">
+                <a:ea typeface="Arial" pitchFamily="34" charset="-122"/>
+                <a:cs typeface="Arial" pitchFamily="34" charset="-120"/>
+              </a:rPr>
+              <a:t>ומסך </a:t>
+            </a:r>
+            <a:r>
+              <a:rPr lang="en-US" sz="1100" dirty="0">
+                <a:ea typeface="Arial" pitchFamily="34" charset="-122"/>
+                <a:cs typeface="Arial" pitchFamily="34" charset="-120"/>
+              </a:rPr>
+              <a:t>OTP</a:t>
+            </a:r>
+            <a:r>
+              <a:rPr lang="he-IL" sz="1100" dirty="0">
+                <a:ea typeface="Arial" pitchFamily="34" charset="-122"/>
+                <a:cs typeface="Arial" pitchFamily="34" charset="-120"/>
+              </a:rPr>
+              <a:t> </a:t>
+            </a:r>
+            <a:r>
+              <a:rPr lang="en-US" sz="1100" dirty="0">
+                <a:ea typeface="Arial" pitchFamily="34" charset="-122"/>
+                <a:cs typeface="Arial" pitchFamily="34" charset="-120"/>
+              </a:rPr>
+              <a:t>שחוסם כניסה עד לאימות הקוד</a:t>
+            </a:r>
+            <a:r>
+              <a:rPr lang="he-IL" sz="1100" dirty="0">
+                <a:ea typeface="Arial" pitchFamily="34" charset="-122"/>
+                <a:cs typeface="Arial" pitchFamily="34" charset="-120"/>
+              </a:rPr>
+              <a:t>.</a:t>
+            </a:r>
+            <a:endParaRPr lang="en-US" sz="1100" dirty="0"/>
+          </a:p>
+        </p:txBody>
+      </p:sp>
+      <p:sp>
+        <p:nvSpPr>
+          <p:cNvPr id="85" name="Shape 18">
+            <a:extLst>
+              <a:ext uri="{FF2B5EF4-FFF2-40B4-BE49-F238E27FC236}">
+                <a16:creationId xmlns:a16="http://schemas.microsoft.com/office/drawing/2014/main" id="{551F9A4F-80DA-080C-D791-F731542DD48B}"/>
+              </a:ext>
+            </a:extLst>
+          </p:cNvPr>
+          <p:cNvSpPr/>
+          <p:nvPr/>
+        </p:nvSpPr>
+        <p:spPr>
+          <a:xfrm>
+            <a:off x="4329684" y="3182112"/>
+            <a:ext cx="3529584" cy="1426464"/>
+          </a:xfrm>
+          <a:prstGeom prst="roundRect">
+            <a:avLst>
+              <a:gd name="adj" fmla="val 7051"/>
+            </a:avLst>
+          </a:prstGeom>
+          <a:solidFill>
+            <a:srgbClr val="FFFFFF"/>
+          </a:solidFill>
+          <a:ln w="12700">
+            <a:solidFill>
+              <a:srgbClr val="E3DCD1"/>
+            </a:solidFill>
+            <a:prstDash val="solid"/>
+          </a:ln>
+        </p:spPr>
+      </p:sp>
+      <p:sp>
+        <p:nvSpPr>
+          <p:cNvPr id="86" name="Shape 19">
+            <a:extLst>
+              <a:ext uri="{FF2B5EF4-FFF2-40B4-BE49-F238E27FC236}">
+                <a16:creationId xmlns:a16="http://schemas.microsoft.com/office/drawing/2014/main" id="{C6530493-7435-50BE-8201-96FA0EBA935E}"/>
+              </a:ext>
+            </a:extLst>
+          </p:cNvPr>
+          <p:cNvSpPr/>
+          <p:nvPr/>
+        </p:nvSpPr>
+        <p:spPr>
+          <a:xfrm>
+            <a:off x="7200900" y="3364992"/>
+            <a:ext cx="420624" cy="420624"/>
+          </a:xfrm>
+          <a:prstGeom prst="ellipse">
+            <a:avLst/>
+          </a:prstGeom>
+          <a:solidFill>
+            <a:srgbClr val="EFE4CE"/>
+          </a:solidFill>
+          <a:ln/>
+        </p:spPr>
+      </p:sp>
+      <p:pic>
+        <p:nvPicPr>
+          <p:cNvPr id="87" name="Image 4" descr="/home/claude/deck/icons/calrange_dark.png">
+            <a:extLst>
+              <a:ext uri="{FF2B5EF4-FFF2-40B4-BE49-F238E27FC236}">
+                <a16:creationId xmlns:a16="http://schemas.microsoft.com/office/drawing/2014/main" id="{DF279151-CE21-44CB-97C0-1074A89413F2}"/>
+              </a:ext>
+            </a:extLst>
+          </p:cNvPr>
+          <p:cNvPicPr>
+            <a:picLocks noChangeAspect="1"/>
+          </p:cNvPicPr>
+          <p:nvPr/>
+        </p:nvPicPr>
+        <p:blipFill>
+          <a:blip r:embed="rId7"/>
+          <a:stretch>
+            <a:fillRect/>
+          </a:stretch>
+        </p:blipFill>
+        <p:spPr>
+          <a:xfrm>
+            <a:off x="7310628" y="3474720"/>
+            <a:ext cx="201168" cy="201168"/>
+          </a:xfrm>
+          <a:prstGeom prst="rect">
+            <a:avLst/>
+          </a:prstGeom>
+        </p:spPr>
+      </p:pic>
+      <p:sp>
+        <p:nvSpPr>
+          <p:cNvPr id="88" name="Text 20">
+            <a:extLst>
+              <a:ext uri="{FF2B5EF4-FFF2-40B4-BE49-F238E27FC236}">
+                <a16:creationId xmlns:a16="http://schemas.microsoft.com/office/drawing/2014/main" id="{4D5E4361-BF1E-5FAF-2131-785265812D3F}"/>
+              </a:ext>
+            </a:extLst>
+          </p:cNvPr>
+          <p:cNvSpPr/>
+          <p:nvPr/>
+        </p:nvSpPr>
+        <p:spPr>
+          <a:xfrm>
+            <a:off x="4567428" y="3364992"/>
+            <a:ext cx="2560320" cy="420624"/>
+          </a:xfrm>
+          <a:prstGeom prst="rect">
+            <a:avLst/>
+          </a:prstGeom>
+          <a:noFill/>
+          <a:ln/>
+        </p:spPr>
+        <p:txBody>
+          <a:bodyPr wrap="square" lIns="0" tIns="0" rIns="0" bIns="0" rtlCol="0" anchor="ctr"/>
+          <a:lstStyle/>
+          <a:p>
+            <a:pPr marL="0" indent="0" algn="r" rtl="1">
+              <a:buNone/>
+            </a:pPr>
+            <a:r>
+              <a:rPr lang="en-US" sz="1300" b="1" dirty="0">
+                <a:solidFill>
+                  <a:srgbClr val="1F2933"/>
+                </a:solidFill>
+                <a:ea typeface="Arial" pitchFamily="34" charset="-122"/>
+                <a:cs typeface="Arial" pitchFamily="34" charset="-120"/>
+              </a:rPr>
+              <a:t>חסימת חופשה הייתה ידנית</a:t>
+            </a:r>
+            <a:endParaRPr lang="en-US" sz="1300" dirty="0"/>
+          </a:p>
+        </p:txBody>
+      </p:sp>
+      <p:sp>
+        <p:nvSpPr>
+          <p:cNvPr id="89" name="Text 21">
+            <a:extLst>
+              <a:ext uri="{FF2B5EF4-FFF2-40B4-BE49-F238E27FC236}">
+                <a16:creationId xmlns:a16="http://schemas.microsoft.com/office/drawing/2014/main" id="{DBCA3869-A72C-078E-D673-1CCA1FDEB47C}"/>
+              </a:ext>
+            </a:extLst>
+          </p:cNvPr>
+          <p:cNvSpPr/>
+          <p:nvPr/>
+        </p:nvSpPr>
+        <p:spPr>
+          <a:xfrm>
+            <a:off x="4567428" y="3840480"/>
+            <a:ext cx="3054096" cy="658368"/>
+          </a:xfrm>
+          <a:prstGeom prst="rect">
+            <a:avLst/>
+          </a:prstGeom>
+          <a:noFill/>
+          <a:ln/>
+        </p:spPr>
+        <p:txBody>
+          <a:bodyPr wrap="square" lIns="0" tIns="0" rIns="0" bIns="0" rtlCol="0" anchor="t"/>
+          <a:lstStyle/>
+          <a:p>
+            <a:pPr marL="0" indent="0" algn="r" rtl="1">
+              <a:lnSpc>
+                <a:spcPts val="1400"/>
+              </a:lnSpc>
+              <a:buNone/>
+            </a:pPr>
+            <a:r>
+              <a:rPr lang="en-US" sz="1100" dirty="0">
+                <a:ea typeface="Arial" pitchFamily="34" charset="-122"/>
+                <a:cs typeface="Arial" pitchFamily="34" charset="-120"/>
+              </a:rPr>
+              <a:t>היה אפשר לחסום יום בודד בלבד</a:t>
+            </a:r>
+            <a:r>
+              <a:rPr lang="he-IL" sz="1100" dirty="0">
+                <a:ea typeface="Arial" pitchFamily="34" charset="-122"/>
+                <a:cs typeface="Arial" pitchFamily="34" charset="-120"/>
+              </a:rPr>
+              <a:t>. </a:t>
+            </a:r>
+            <a:r>
+              <a:rPr lang="en-US" sz="1100" dirty="0">
+                <a:ea typeface="Arial" pitchFamily="34" charset="-122"/>
+                <a:cs typeface="Arial" pitchFamily="34" charset="-120"/>
+              </a:rPr>
+              <a:t>הוספנו חסימת טווחי תאריכים ושעות</a:t>
+            </a:r>
+            <a:endParaRPr lang="en-US" sz="1100" dirty="0"/>
+          </a:p>
+        </p:txBody>
+      </p:sp>
+      <p:sp>
+        <p:nvSpPr>
+          <p:cNvPr id="90" name="Shape 22">
+            <a:extLst>
+              <a:ext uri="{FF2B5EF4-FFF2-40B4-BE49-F238E27FC236}">
+                <a16:creationId xmlns:a16="http://schemas.microsoft.com/office/drawing/2014/main" id="{C2AD13F1-CABC-100C-EE8E-E612F0851BB4}"/>
+              </a:ext>
+            </a:extLst>
+          </p:cNvPr>
+          <p:cNvSpPr/>
+          <p:nvPr/>
+        </p:nvSpPr>
+        <p:spPr>
+          <a:xfrm>
+            <a:off x="580644" y="3182112"/>
+            <a:ext cx="3529584" cy="1426464"/>
+          </a:xfrm>
+          <a:prstGeom prst="roundRect">
+            <a:avLst>
+              <a:gd name="adj" fmla="val 7051"/>
+            </a:avLst>
+          </a:prstGeom>
+          <a:solidFill>
+            <a:srgbClr val="FFFFFF"/>
+          </a:solidFill>
+          <a:ln w="12700">
+            <a:solidFill>
+              <a:srgbClr val="E3DCD1"/>
+            </a:solidFill>
+            <a:prstDash val="solid"/>
+          </a:ln>
+        </p:spPr>
+      </p:sp>
+      <p:sp>
+        <p:nvSpPr>
+          <p:cNvPr id="91" name="Shape 23">
+            <a:extLst>
+              <a:ext uri="{FF2B5EF4-FFF2-40B4-BE49-F238E27FC236}">
+                <a16:creationId xmlns:a16="http://schemas.microsoft.com/office/drawing/2014/main" id="{250C6830-E816-D722-4589-C9A1F638DC78}"/>
+              </a:ext>
+            </a:extLst>
+          </p:cNvPr>
+          <p:cNvSpPr/>
+          <p:nvPr/>
+        </p:nvSpPr>
+        <p:spPr>
+          <a:xfrm>
+            <a:off x="3451860" y="3364992"/>
+            <a:ext cx="420624" cy="420624"/>
+          </a:xfrm>
+          <a:prstGeom prst="ellipse">
+            <a:avLst/>
+          </a:prstGeom>
+          <a:solidFill>
+            <a:srgbClr val="EFE4CE"/>
+          </a:solidFill>
+          <a:ln/>
+        </p:spPr>
+      </p:sp>
+      <p:pic>
+        <p:nvPicPr>
+          <p:cNvPr id="92" name="Image 5" descr="/home/claude/deck/icons/bell_dark.png">
+            <a:extLst>
+              <a:ext uri="{FF2B5EF4-FFF2-40B4-BE49-F238E27FC236}">
+                <a16:creationId xmlns:a16="http://schemas.microsoft.com/office/drawing/2014/main" id="{87181DCC-945C-29AA-72D4-F2974D924AA9}"/>
+              </a:ext>
+            </a:extLst>
+          </p:cNvPr>
+          <p:cNvPicPr>
+            <a:picLocks noChangeAspect="1"/>
+          </p:cNvPicPr>
+          <p:nvPr/>
+        </p:nvPicPr>
+        <p:blipFill>
+          <a:blip r:embed="rId8"/>
+          <a:stretch>
+            <a:fillRect/>
+          </a:stretch>
+        </p:blipFill>
+        <p:spPr>
+          <a:xfrm>
+            <a:off x="3561588" y="3474720"/>
+            <a:ext cx="201168" cy="201168"/>
+          </a:xfrm>
+          <a:prstGeom prst="rect">
+            <a:avLst/>
+          </a:prstGeom>
+        </p:spPr>
+      </p:pic>
+      <p:sp>
+        <p:nvSpPr>
+          <p:cNvPr id="93" name="Text 24">
+            <a:extLst>
+              <a:ext uri="{FF2B5EF4-FFF2-40B4-BE49-F238E27FC236}">
+                <a16:creationId xmlns:a16="http://schemas.microsoft.com/office/drawing/2014/main" id="{7C9CA75B-175D-AF9C-2BA2-D732FC65001A}"/>
+              </a:ext>
+            </a:extLst>
+          </p:cNvPr>
+          <p:cNvSpPr/>
+          <p:nvPr/>
+        </p:nvSpPr>
+        <p:spPr>
+          <a:xfrm>
+            <a:off x="818388" y="3364992"/>
+            <a:ext cx="2560320" cy="420624"/>
+          </a:xfrm>
+          <a:prstGeom prst="rect">
+            <a:avLst/>
+          </a:prstGeom>
+          <a:noFill/>
+          <a:ln/>
+        </p:spPr>
+        <p:txBody>
+          <a:bodyPr wrap="square" lIns="0" tIns="0" rIns="0" bIns="0" rtlCol="0" anchor="ctr"/>
+          <a:lstStyle/>
+          <a:p>
+            <a:pPr marL="0" indent="0" algn="r" rtl="1">
+              <a:buNone/>
+            </a:pPr>
+            <a:r>
+              <a:rPr lang="en-US" sz="1300" b="1" dirty="0">
+                <a:solidFill>
+                  <a:srgbClr val="1F2933"/>
+                </a:solidFill>
+                <a:ea typeface="Arial" pitchFamily="34" charset="-122"/>
+                <a:cs typeface="Arial" pitchFamily="34" charset="-120"/>
+              </a:rPr>
+              <a:t>חסימה ביטלה תורים בשקט</a:t>
+            </a:r>
+            <a:endParaRPr lang="en-US" sz="1300" dirty="0"/>
+          </a:p>
+        </p:txBody>
+      </p:sp>
+      <p:sp>
+        <p:nvSpPr>
+          <p:cNvPr id="94" name="Text 25">
+            <a:extLst>
+              <a:ext uri="{FF2B5EF4-FFF2-40B4-BE49-F238E27FC236}">
+                <a16:creationId xmlns:a16="http://schemas.microsoft.com/office/drawing/2014/main" id="{43884006-A04A-1829-8839-B7940ED03936}"/>
+              </a:ext>
+            </a:extLst>
+          </p:cNvPr>
+          <p:cNvSpPr/>
+          <p:nvPr/>
+        </p:nvSpPr>
+        <p:spPr>
+          <a:xfrm>
+            <a:off x="818388" y="3840480"/>
+            <a:ext cx="3054096" cy="658368"/>
+          </a:xfrm>
+          <a:prstGeom prst="rect">
+            <a:avLst/>
+          </a:prstGeom>
+          <a:noFill/>
+          <a:ln/>
+        </p:spPr>
+        <p:txBody>
+          <a:bodyPr wrap="square" lIns="0" tIns="0" rIns="0" bIns="0" rtlCol="0" anchor="t"/>
+          <a:lstStyle/>
+          <a:p>
+            <a:pPr marL="0" indent="0" algn="r" rtl="1">
+              <a:lnSpc>
+                <a:spcPts val="1400"/>
+              </a:lnSpc>
+              <a:buNone/>
+            </a:pPr>
+            <a:r>
+              <a:rPr lang="en-US" sz="1100" dirty="0">
+                <a:ea typeface="Arial" pitchFamily="34" charset="-122"/>
+                <a:cs typeface="Arial" pitchFamily="34" charset="-120"/>
+              </a:rPr>
+              <a:t>הוספנו אזהרה עם שם הלקוח ושעת התור לפני שהחסימה מבטלת אותו</a:t>
+            </a:r>
+            <a:endParaRPr lang="en-US" sz="1100" dirty="0"/>
+          </a:p>
+        </p:txBody>
+      </p:sp>
+      <p:sp>
+        <p:nvSpPr>
+          <p:cNvPr id="95" name="Shape 26">
+            <a:extLst>
+              <a:ext uri="{FF2B5EF4-FFF2-40B4-BE49-F238E27FC236}">
+                <a16:creationId xmlns:a16="http://schemas.microsoft.com/office/drawing/2014/main" id="{FC3DABB6-87B1-9542-0918-2156AFA67798}"/>
+              </a:ext>
+            </a:extLst>
+          </p:cNvPr>
+          <p:cNvSpPr/>
+          <p:nvPr/>
+        </p:nvSpPr>
+        <p:spPr>
+          <a:xfrm>
+            <a:off x="580644" y="4809744"/>
+            <a:ext cx="11027664" cy="1426464"/>
+          </a:xfrm>
+          <a:prstGeom prst="roundRect">
+            <a:avLst>
+              <a:gd name="adj" fmla="val 7051"/>
+            </a:avLst>
+          </a:prstGeom>
+          <a:solidFill>
+            <a:srgbClr val="EFE4CE"/>
+          </a:solidFill>
+          <a:ln/>
+        </p:spPr>
+        <p:txBody>
+          <a:bodyPr/>
+          <a:lstStyle/>
+          <a:p>
+            <a:endParaRPr lang="he-IL" dirty="0"/>
+          </a:p>
+        </p:txBody>
+      </p:sp>
+      <p:sp>
+        <p:nvSpPr>
+          <p:cNvPr id="96" name="Shape 27">
+            <a:extLst>
+              <a:ext uri="{FF2B5EF4-FFF2-40B4-BE49-F238E27FC236}">
+                <a16:creationId xmlns:a16="http://schemas.microsoft.com/office/drawing/2014/main" id="{413FE7F7-385A-DB03-B9E8-28BB9FA83B26}"/>
+              </a:ext>
+            </a:extLst>
+          </p:cNvPr>
+          <p:cNvSpPr/>
+          <p:nvPr/>
+        </p:nvSpPr>
+        <p:spPr>
+          <a:xfrm>
+            <a:off x="10895076" y="4992624"/>
+            <a:ext cx="457200" cy="457200"/>
+          </a:xfrm>
+          <a:prstGeom prst="ellipse">
+            <a:avLst/>
+          </a:prstGeom>
+          <a:solidFill>
+            <a:srgbClr val="C9A96A"/>
+          </a:solidFill>
+          <a:ln/>
+        </p:spPr>
+      </p:sp>
+      <p:pic>
+        <p:nvPicPr>
+          <p:cNvPr id="97" name="Image 6" descr="/home/claude/deck/icons/scale_dark.png">
+            <a:extLst>
+              <a:ext uri="{FF2B5EF4-FFF2-40B4-BE49-F238E27FC236}">
+                <a16:creationId xmlns:a16="http://schemas.microsoft.com/office/drawing/2014/main" id="{3B60A6AF-0972-BA53-B3C9-B86E59F1B962}"/>
+              </a:ext>
+            </a:extLst>
+          </p:cNvPr>
+          <p:cNvPicPr>
+            <a:picLocks noChangeAspect="1"/>
+          </p:cNvPicPr>
+          <p:nvPr/>
+        </p:nvPicPr>
+        <p:blipFill>
+          <a:blip r:embed="rId9"/>
+          <a:stretch>
+            <a:fillRect/>
+          </a:stretch>
+        </p:blipFill>
+        <p:spPr>
+          <a:xfrm>
+            <a:off x="11013948" y="5111496"/>
+            <a:ext cx="219456" cy="219456"/>
+          </a:xfrm>
+          <a:prstGeom prst="rect">
+            <a:avLst/>
+          </a:prstGeom>
+        </p:spPr>
+      </p:pic>
+      <p:sp>
+        <p:nvSpPr>
+          <p:cNvPr id="98" name="Text 28">
+            <a:extLst>
+              <a:ext uri="{FF2B5EF4-FFF2-40B4-BE49-F238E27FC236}">
+                <a16:creationId xmlns:a16="http://schemas.microsoft.com/office/drawing/2014/main" id="{9744CA72-1B85-5E1A-F576-08CDF2791194}"/>
+              </a:ext>
+            </a:extLst>
+          </p:cNvPr>
+          <p:cNvSpPr/>
+          <p:nvPr/>
+        </p:nvSpPr>
+        <p:spPr>
+          <a:xfrm>
+            <a:off x="854964" y="4992624"/>
+            <a:ext cx="9930384" cy="457200"/>
+          </a:xfrm>
+          <a:prstGeom prst="rect">
+            <a:avLst/>
+          </a:prstGeom>
+          <a:noFill/>
+          <a:ln/>
+        </p:spPr>
+        <p:txBody>
+          <a:bodyPr wrap="square" lIns="0" tIns="0" rIns="0" bIns="0" rtlCol="0" anchor="ctr"/>
+          <a:lstStyle/>
+          <a:p>
+            <a:pPr marL="0" indent="0" algn="r" rtl="1">
+              <a:buNone/>
+            </a:pPr>
+            <a:r>
+              <a:rPr lang="en-US" sz="1400" b="1" dirty="0">
+                <a:solidFill>
+                  <a:srgbClr val="6B5426"/>
+                </a:solidFill>
+                <a:ea typeface="Arial" pitchFamily="34" charset="-122"/>
+                <a:cs typeface="Arial" pitchFamily="34" charset="-120"/>
+              </a:rPr>
+              <a:t>מגבלות שהשארנו במודע ומתועדות ב</a:t>
+            </a:r>
+            <a:r>
+              <a:rPr lang="he-IL" sz="1400" b="1" dirty="0">
+                <a:solidFill>
+                  <a:srgbClr val="6B5426"/>
+                </a:solidFill>
+                <a:ea typeface="Arial" pitchFamily="34" charset="-122"/>
+                <a:cs typeface="Arial" pitchFamily="34" charset="-120"/>
+              </a:rPr>
+              <a:t>- </a:t>
+            </a:r>
+            <a:r>
+              <a:rPr lang="en-US" sz="1400" b="1" dirty="0">
+                <a:solidFill>
+                  <a:srgbClr val="6B5426"/>
+                </a:solidFill>
+                <a:ea typeface="Arial" pitchFamily="34" charset="-122"/>
+                <a:cs typeface="Arial" pitchFamily="34" charset="-120"/>
+              </a:rPr>
+              <a:t>Work_Logic.MD</a:t>
+            </a:r>
+            <a:endParaRPr lang="en-US" sz="1400" dirty="0"/>
+          </a:p>
+        </p:txBody>
+      </p:sp>
+      <p:sp>
+        <p:nvSpPr>
+          <p:cNvPr id="99" name="Shape 29">
+            <a:extLst>
+              <a:ext uri="{FF2B5EF4-FFF2-40B4-BE49-F238E27FC236}">
+                <a16:creationId xmlns:a16="http://schemas.microsoft.com/office/drawing/2014/main" id="{B5DDF975-0877-C469-1D0C-055540FF53A1}"/>
+              </a:ext>
+            </a:extLst>
+          </p:cNvPr>
+          <p:cNvSpPr/>
+          <p:nvPr/>
+        </p:nvSpPr>
+        <p:spPr>
+          <a:xfrm>
+            <a:off x="11361420" y="5669280"/>
+            <a:ext cx="82296" cy="82296"/>
+          </a:xfrm>
+          <a:prstGeom prst="ellipse">
+            <a:avLst/>
+          </a:prstGeom>
+          <a:solidFill>
+            <a:srgbClr val="9C7C34"/>
+          </a:solidFill>
+          <a:ln/>
+        </p:spPr>
+      </p:sp>
+      <p:sp>
+        <p:nvSpPr>
+          <p:cNvPr id="100" name="Text 30">
+            <a:extLst>
+              <a:ext uri="{FF2B5EF4-FFF2-40B4-BE49-F238E27FC236}">
+                <a16:creationId xmlns:a16="http://schemas.microsoft.com/office/drawing/2014/main" id="{8ABC729F-0294-3BE9-1E9B-7F798105A916}"/>
+              </a:ext>
+            </a:extLst>
+          </p:cNvPr>
+          <p:cNvSpPr/>
+          <p:nvPr/>
+        </p:nvSpPr>
+        <p:spPr>
+          <a:xfrm>
+            <a:off x="8060436" y="5559552"/>
+            <a:ext cx="3182112" cy="475488"/>
+          </a:xfrm>
+          <a:prstGeom prst="rect">
+            <a:avLst/>
+          </a:prstGeom>
+          <a:noFill/>
+          <a:ln/>
+        </p:spPr>
+        <p:txBody>
+          <a:bodyPr wrap="square" lIns="0" tIns="0" rIns="0" bIns="0" rtlCol="0" anchor="t"/>
+          <a:lstStyle/>
+          <a:p>
+            <a:pPr marL="0" indent="0" algn="r" rtl="1">
+              <a:lnSpc>
+                <a:spcPts val="1400"/>
+              </a:lnSpc>
+              <a:buNone/>
+            </a:pPr>
+            <a:r>
+              <a:rPr lang="en-US" sz="1150" dirty="0">
+                <a:solidFill>
+                  <a:srgbClr val="6B5426"/>
+                </a:solidFill>
+                <a:ea typeface="Arial" pitchFamily="34" charset="-122"/>
+                <a:cs typeface="Arial" pitchFamily="34" charset="-120"/>
+              </a:rPr>
+              <a:t>הנתונים נשמרים בדפדפן אחד בלבד ולא בענן</a:t>
+            </a:r>
+            <a:endParaRPr lang="en-US" sz="1150" dirty="0"/>
+          </a:p>
+        </p:txBody>
+      </p:sp>
+      <p:sp>
+        <p:nvSpPr>
+          <p:cNvPr id="101" name="Shape 31">
+            <a:extLst>
+              <a:ext uri="{FF2B5EF4-FFF2-40B4-BE49-F238E27FC236}">
+                <a16:creationId xmlns:a16="http://schemas.microsoft.com/office/drawing/2014/main" id="{BB9422E5-973C-8E28-0C0E-0B19EAB700F5}"/>
+              </a:ext>
+            </a:extLst>
+          </p:cNvPr>
+          <p:cNvSpPr/>
+          <p:nvPr/>
+        </p:nvSpPr>
+        <p:spPr>
+          <a:xfrm>
+            <a:off x="7703820" y="5669280"/>
+            <a:ext cx="82296" cy="82296"/>
+          </a:xfrm>
+          <a:prstGeom prst="ellipse">
+            <a:avLst/>
+          </a:prstGeom>
+          <a:solidFill>
+            <a:srgbClr val="9C7C34"/>
+          </a:solidFill>
+          <a:ln/>
+        </p:spPr>
+      </p:sp>
+      <p:sp>
+        <p:nvSpPr>
+          <p:cNvPr id="102" name="Text 32">
+            <a:extLst>
+              <a:ext uri="{FF2B5EF4-FFF2-40B4-BE49-F238E27FC236}">
+                <a16:creationId xmlns:a16="http://schemas.microsoft.com/office/drawing/2014/main" id="{8E091666-5545-4C68-8705-5C59217DF5F3}"/>
+              </a:ext>
+            </a:extLst>
+          </p:cNvPr>
+          <p:cNvSpPr/>
+          <p:nvPr/>
+        </p:nvSpPr>
+        <p:spPr>
+          <a:xfrm>
+            <a:off x="4402836" y="5559552"/>
+            <a:ext cx="3182112" cy="475488"/>
+          </a:xfrm>
+          <a:prstGeom prst="rect">
+            <a:avLst/>
+          </a:prstGeom>
+          <a:noFill/>
+          <a:ln/>
+        </p:spPr>
+        <p:txBody>
+          <a:bodyPr wrap="square" lIns="0" tIns="0" rIns="0" bIns="0" rtlCol="0" anchor="t"/>
+          <a:lstStyle/>
+          <a:p>
+            <a:pPr marL="0" indent="0" algn="r" rtl="1">
+              <a:lnSpc>
+                <a:spcPts val="1400"/>
+              </a:lnSpc>
+              <a:buNone/>
+            </a:pPr>
+            <a:r>
+              <a:rPr lang="he-IL" sz="1150" dirty="0">
+                <a:solidFill>
+                  <a:srgbClr val="6B5426"/>
+                </a:solidFill>
+                <a:cs typeface="Arial" pitchFamily="34" charset="-120"/>
+              </a:rPr>
+              <a:t>קוד ה- </a:t>
+            </a:r>
+            <a:r>
+              <a:rPr lang="en-US" sz="1150" dirty="0">
+                <a:solidFill>
+                  <a:srgbClr val="6B5426"/>
+                </a:solidFill>
+                <a:cs typeface="Arial" pitchFamily="34" charset="-120"/>
+              </a:rPr>
+              <a:t>OTP</a:t>
+            </a:r>
+            <a:r>
+              <a:rPr lang="he-IL" sz="1150" dirty="0">
+                <a:solidFill>
+                  <a:srgbClr val="6B5426"/>
+                </a:solidFill>
+                <a:cs typeface="Arial" pitchFamily="34" charset="-120"/>
+              </a:rPr>
+              <a:t> קבוע ולא נשלח ב- </a:t>
+            </a:r>
+            <a:r>
+              <a:rPr lang="en-US" sz="1150" dirty="0">
+                <a:solidFill>
+                  <a:srgbClr val="6B5426"/>
+                </a:solidFill>
+                <a:cs typeface="Arial" pitchFamily="34" charset="-120"/>
+              </a:rPr>
+              <a:t>SMS</a:t>
+            </a:r>
+            <a:r>
+              <a:rPr lang="he-IL" sz="1150" dirty="0">
+                <a:solidFill>
+                  <a:srgbClr val="6B5426"/>
+                </a:solidFill>
+                <a:cs typeface="Arial" pitchFamily="34" charset="-120"/>
+              </a:rPr>
+              <a:t> אמיתי</a:t>
+            </a:r>
+            <a:endParaRPr lang="en-US" sz="1150" dirty="0"/>
+          </a:p>
+        </p:txBody>
+      </p:sp>
+      <p:sp>
+        <p:nvSpPr>
+          <p:cNvPr id="103" name="Shape 33">
+            <a:extLst>
+              <a:ext uri="{FF2B5EF4-FFF2-40B4-BE49-F238E27FC236}">
+                <a16:creationId xmlns:a16="http://schemas.microsoft.com/office/drawing/2014/main" id="{1CFCC563-BE14-86A2-865F-57807CCF09E8}"/>
+              </a:ext>
+            </a:extLst>
+          </p:cNvPr>
+          <p:cNvSpPr/>
+          <p:nvPr/>
+        </p:nvSpPr>
+        <p:spPr>
+          <a:xfrm>
+            <a:off x="4046220" y="5669280"/>
+            <a:ext cx="82296" cy="82296"/>
+          </a:xfrm>
+          <a:prstGeom prst="ellipse">
+            <a:avLst/>
+          </a:prstGeom>
+          <a:solidFill>
+            <a:srgbClr val="9C7C34"/>
+          </a:solidFill>
+          <a:ln/>
+        </p:spPr>
+      </p:sp>
+      <p:sp>
+        <p:nvSpPr>
+          <p:cNvPr id="104" name="Text 34">
+            <a:extLst>
+              <a:ext uri="{FF2B5EF4-FFF2-40B4-BE49-F238E27FC236}">
+                <a16:creationId xmlns:a16="http://schemas.microsoft.com/office/drawing/2014/main" id="{C58A5401-EA55-90D6-6CA6-05366D71E360}"/>
+              </a:ext>
+            </a:extLst>
+          </p:cNvPr>
+          <p:cNvSpPr/>
+          <p:nvPr/>
+        </p:nvSpPr>
+        <p:spPr>
+          <a:xfrm>
+            <a:off x="745236" y="5559552"/>
+            <a:ext cx="3182112" cy="475488"/>
+          </a:xfrm>
+          <a:prstGeom prst="rect">
+            <a:avLst/>
+          </a:prstGeom>
+          <a:noFill/>
+          <a:ln/>
+        </p:spPr>
+        <p:txBody>
+          <a:bodyPr wrap="square" lIns="0" tIns="0" rIns="0" bIns="0" rtlCol="0" anchor="t"/>
+          <a:lstStyle/>
+          <a:p>
+            <a:pPr marL="0" indent="0" algn="r" rtl="1">
+              <a:lnSpc>
+                <a:spcPts val="1400"/>
+              </a:lnSpc>
+              <a:buNone/>
+            </a:pPr>
+            <a:r>
+              <a:rPr lang="he-IL" sz="1150" dirty="0">
+                <a:solidFill>
+                  <a:srgbClr val="6B5426"/>
+                </a:solidFill>
+                <a:ea typeface="Arial" pitchFamily="34" charset="-122"/>
+                <a:cs typeface="Arial" pitchFamily="34" charset="-120"/>
+              </a:rPr>
+              <a:t>הסיסמאות נשמרות ללא הצפנה עקב דמו</a:t>
+            </a:r>
+            <a:endParaRPr lang="en-US" sz="1150" dirty="0"/>
+          </a:p>
+        </p:txBody>
+      </p:sp>
+    </p:spTree>
+    <p:extLst>
+      <p:ext uri="{BB962C8B-B14F-4D97-AF65-F5344CB8AC3E}">
+        <p14:creationId xmlns:p14="http://schemas.microsoft.com/office/powerpoint/2010/main" val="75077602"/>
+      </p:ext>
+    </p:extLst>
+  </p:cSld>
+  <p:clrMapOvr>
+    <a:masterClrMapping/>
+  </p:clrMapOvr>
+</p:sld>
+</file>
+
+<file path=ppt/slides/slide6.xml><?xml version="1.0" encoding="utf-8"?>
 <p:sld xmlns:a="http://schemas.openxmlformats.org/drawingml/2006/main" xmlns:r="http://schemas.openxmlformats.org/officeDocument/2006/relationships" xmlns:p="http://schemas.openxmlformats.org/presentationml/2006/main">
   <p:cSld name="Slide 5">
     <p:bg>
@@ -5999,8 +8531,8 @@
         </p:nvSpPr>
         <p:spPr>
           <a:xfrm>
-            <a:off x="548640" y="411480"/>
-            <a:ext cx="11091672" cy="548640"/>
+            <a:off x="2884932" y="338328"/>
+            <a:ext cx="6412704" cy="548640"/>
           </a:xfrm>
           <a:prstGeom prst="rect">
             <a:avLst/>
@@ -6024,7 +8556,7 @@
                 <a:ea typeface="Arial" pitchFamily="34" charset="-122"/>
                 <a:cs typeface="Arial" pitchFamily="34" charset="-120"/>
               </a:rPr>
-              <a:t>Database Demo וצעדים הבאים</a:t>
+              <a:t> Database Demo וצעדים הבאים</a:t>
             </a:r>
             <a:endParaRPr lang="en-US" sz="3600" dirty="0"/>
           </a:p>
@@ -6038,8 +8570,8 @@
         </p:nvSpPr>
         <p:spPr>
           <a:xfrm>
-            <a:off x="548640" y="987552"/>
-            <a:ext cx="11091672" cy="329184"/>
+            <a:off x="3572112" y="945973"/>
+            <a:ext cx="5038344" cy="329184"/>
           </a:xfrm>
           <a:prstGeom prst="rect">
             <a:avLst/>
@@ -6051,20 +8583,22 @@
           <a:bodyPr wrap="square" lIns="0" tIns="0" rIns="0" bIns="0" rtlCol="0" anchor="ctr"/>
           <a:lstStyle/>
           <a:p>
+            <a:pPr algn="r" rtl="1"/>
+            <a:r>
+              <a:rPr lang="he-IL" sz="1600" b="1" dirty="0">
+                <a:solidFill>
+                  <a:srgbClr val="C5A25B"/>
+                </a:solidFill>
+                <a:ea typeface="Arial" pitchFamily="34" charset="-122"/>
+                <a:cs typeface="Arial" pitchFamily="34" charset="-120"/>
+              </a:rPr>
+              <a:t>איפה הנתונים נשמרים היום ולאן המערכת יכולה להתפתח</a:t>
+            </a:r>
+          </a:p>
+          <a:p>
             <a:pPr marL="0" indent="0" algn="r" rtl="1">
               <a:buNone/>
             </a:pPr>
-            <a:r>
-              <a:rPr lang="en-US" sz="1500" dirty="0">
-                <a:solidFill>
-                  <a:srgbClr val="9BA3AE"/>
-                </a:solidFill>
-                <a:latin typeface="Arial" pitchFamily="34" charset="0"/>
-                <a:ea typeface="Arial" pitchFamily="34" charset="-122"/>
-                <a:cs typeface="Arial" pitchFamily="34" charset="-120"/>
-              </a:rPr>
-              <a:t>איפה הנתונים נשמרים היום, ולאן המערכת יכולה להתפתח</a:t>
-            </a:r>
             <a:endParaRPr lang="en-US" sz="1500" dirty="0"/>
           </a:p>
         </p:txBody>
@@ -6160,6 +8694,16 @@
               <a:buNone/>
             </a:pPr>
             <a:r>
+              <a:rPr lang="he-IL" sz="1900" b="1" dirty="0">
+                <a:solidFill>
+                  <a:srgbClr val="F5F1EA"/>
+                </a:solidFill>
+                <a:latin typeface="Arial" pitchFamily="34" charset="0"/>
+                <a:cs typeface="Arial" pitchFamily="34" charset="-120"/>
+              </a:rPr>
+              <a:t>כיום - </a:t>
+            </a:r>
+            <a:r>
               <a:rPr lang="en-US" sz="1900" b="1" dirty="0">
                 <a:solidFill>
                   <a:srgbClr val="F5F1EA"/>
@@ -6168,7 +8712,7 @@
                 <a:ea typeface="Arial" pitchFamily="34" charset="-122"/>
                 <a:cs typeface="Arial" pitchFamily="34" charset="-120"/>
               </a:rPr>
-              <a:t>היום: localStorage בדפדפן</a:t>
+              <a:t>localStorage</a:t>
             </a:r>
             <a:endParaRPr lang="en-US" sz="1900" dirty="0"/>
           </a:p>
@@ -6321,7 +8865,7 @@
               <a:buNone/>
             </a:pPr>
             <a:r>
-              <a:rPr lang="en-US" sz="1150" dirty="0" err="1">
+              <a:rPr lang="en-US" sz="1150" dirty="0">
                 <a:solidFill>
                   <a:srgbClr val="C9A96A"/>
                 </a:solidFill>
@@ -6521,7 +9065,7 @@
               <a:buNone/>
             </a:pPr>
             <a:r>
-              <a:rPr lang="en-US" sz="1150" dirty="0" err="1">
+              <a:rPr lang="en-US" sz="1150" dirty="0">
                 <a:solidFill>
                   <a:srgbClr val="C9A96A"/>
                 </a:solidFill>
@@ -6673,7 +9217,29 @@
                 <a:ea typeface="Arial" pitchFamily="34" charset="-122"/>
                 <a:cs typeface="Arial" pitchFamily="34" charset="-120"/>
               </a:rPr>
-              <a:t>הצעד הבא: Production</a:t>
+              <a:t>הצעד הבא</a:t>
+            </a:r>
+            <a:r>
+              <a:rPr lang="he-IL" sz="1900" b="1" dirty="0">
+                <a:solidFill>
+                  <a:srgbClr val="1F2933"/>
+                </a:solidFill>
+                <a:latin typeface="Arial" pitchFamily="34" charset="0"/>
+                <a:ea typeface="Arial" pitchFamily="34" charset="-122"/>
+                <a:cs typeface="Arial" pitchFamily="34" charset="-120"/>
+              </a:rPr>
+              <a:t> - </a:t>
+            </a:r>
+            <a:r>
+              <a:rPr lang="en-US" sz="1900" b="1" dirty="0">
+                <a:solidFill>
+                  <a:srgbClr val="1F2933"/>
+                </a:solidFill>
+                <a:latin typeface="Arial" pitchFamily="34" charset="0"/>
+                <a:ea typeface="Arial" pitchFamily="34" charset="-122"/>
+                <a:cs typeface="Arial" pitchFamily="34" charset="-120"/>
+              </a:rPr>
+              <a:t>Production</a:t>
             </a:r>
             <a:endParaRPr lang="en-US" sz="1900" dirty="0"/>
           </a:p>
@@ -6727,6 +9293,27 @@
               <a:buNone/>
             </a:pPr>
             <a:r>
+              <a:rPr lang="he-IL" sz="1450" dirty="0">
+                <a:solidFill>
+                  <a:srgbClr val="1F2933"/>
+                </a:solidFill>
+                <a:latin typeface="Arial" pitchFamily="34" charset="0"/>
+                <a:cs typeface="Arial" pitchFamily="34" charset="-120"/>
+              </a:rPr>
+              <a:t>מסד נתונים אמיתי </a:t>
+            </a:r>
+            <a:r>
+              <a:rPr lang="he-IL" sz="1450" dirty="0">
+                <a:solidFill>
+                  <a:srgbClr val="1F2933"/>
+                </a:solidFill>
+                <a:latin typeface="Arial" pitchFamily="34" charset="0"/>
+                <a:ea typeface="Arial" pitchFamily="34" charset="-122"/>
+                <a:cs typeface="Arial" pitchFamily="34" charset="-120"/>
+              </a:rPr>
+              <a:t>(</a:t>
+            </a:r>
+            <a:r>
               <a:rPr lang="en-US" sz="1450" dirty="0">
                 <a:solidFill>
                   <a:srgbClr val="1F2933"/>
@@ -6735,7 +9322,18 @@
                 <a:ea typeface="Arial" pitchFamily="34" charset="-122"/>
                 <a:cs typeface="Arial" pitchFamily="34" charset="-120"/>
               </a:rPr>
-              <a:t>מסד נתונים אמיתי, למשל Supabase</a:t>
+              <a:t>Supabase</a:t>
+            </a:r>
+            <a:r>
+              <a:rPr lang="he-IL" sz="1450" dirty="0">
+                <a:solidFill>
+                  <a:srgbClr val="1F2933"/>
+                </a:solidFill>
+                <a:latin typeface="Arial" pitchFamily="34" charset="0"/>
+                <a:ea typeface="Arial" pitchFamily="34" charset="-122"/>
+                <a:cs typeface="Arial" pitchFamily="34" charset="-120"/>
+              </a:rPr>
+              <a:t>)</a:t>
             </a:r>
             <a:endParaRPr lang="en-US" sz="1450" dirty="0"/>
           </a:p>
@@ -6851,15 +9449,24 @@
               <a:buNone/>
             </a:pPr>
             <a:r>
+              <a:rPr lang="he-IL" sz="1450" dirty="0">
+                <a:solidFill>
+                  <a:srgbClr val="1F2933"/>
+                </a:solidFill>
+                <a:latin typeface="Arial" pitchFamily="34" charset="0"/>
+                <a:cs typeface="Arial" pitchFamily="34" charset="-120"/>
+              </a:rPr>
+              <a:t>התראות – </a:t>
+            </a:r>
+            <a:r>
               <a:rPr lang="en-US" sz="1450" dirty="0">
                 <a:solidFill>
                   <a:srgbClr val="1F2933"/>
                 </a:solidFill>
                 <a:latin typeface="Arial" pitchFamily="34" charset="0"/>
-                <a:ea typeface="Arial" pitchFamily="34" charset="-122"/>
-                <a:cs typeface="Arial" pitchFamily="34" charset="-120"/>
-              </a:rPr>
-              <a:t>התראות SMS ו-WhatsApp</a:t>
+                <a:cs typeface="Arial" pitchFamily="34" charset="-120"/>
+              </a:rPr>
+              <a:t>WhatsApp/SMS</a:t>
             </a:r>
             <a:endParaRPr lang="en-US" sz="1450" dirty="0"/>
           </a:p>
@@ -7045,7 +9652,18 @@
                 <a:ea typeface="Arial" pitchFamily="34" charset="-122"/>
                 <a:cs typeface="Arial" pitchFamily="34" charset="-120"/>
               </a:rPr>
-              <a:t>תמיכה בכמה עסקים וספרים</a:t>
+              <a:t>תמיכה בכמה עסקים </a:t>
+            </a:r>
+            <a:r>
+              <a:rPr lang="he-IL" sz="1450" dirty="0">
+                <a:solidFill>
+                  <a:srgbClr val="1F2933"/>
+                </a:solidFill>
+                <a:latin typeface="Arial" pitchFamily="34" charset="0"/>
+                <a:ea typeface="Arial" pitchFamily="34" charset="-122"/>
+                <a:cs typeface="Arial" pitchFamily="34" charset="-120"/>
+              </a:rPr>
+              <a:t>וסוגי עסקים</a:t>
             </a:r>
             <a:endParaRPr lang="en-US" sz="1450" dirty="0"/>
           </a:p>
@@ -7100,6 +9718,17 @@
               <a:buNone/>
             </a:pPr>
             <a:r>
+              <a:rPr lang="he-IL" sz="1300" dirty="0">
+                <a:solidFill>
+                  <a:srgbClr val="C9A96A"/>
+                </a:solidFill>
+                <a:latin typeface="Arial" pitchFamily="34" charset="0"/>
+                <a:ea typeface="Arial" pitchFamily="34" charset="-122"/>
+                <a:cs typeface="Arial" pitchFamily="34" charset="-120"/>
+              </a:rPr>
+              <a:t>ב- </a:t>
+            </a:r>
+            <a:r>
               <a:rPr lang="en-US" sz="1300" dirty="0">
                 <a:solidFill>
                   <a:srgbClr val="C9A96A"/>
@@ -7108,7 +9737,106 @@
                 <a:ea typeface="Arial" pitchFamily="34" charset="-122"/>
                 <a:cs typeface="Arial" pitchFamily="34" charset="-120"/>
               </a:rPr>
-              <a:t>ב-MVP לקורס בחרנו במודע לשמור נתונים בדפדפן. במערכת אמיתית הנתונים יעברו ל-Backend עם Authentication, הרשאות והצפנה</a:t>
+              <a:t>MVP</a:t>
+            </a:r>
+            <a:r>
+              <a:rPr lang="he-IL" sz="1300" dirty="0">
+                <a:solidFill>
+                  <a:srgbClr val="C9A96A"/>
+                </a:solidFill>
+                <a:latin typeface="Arial" pitchFamily="34" charset="0"/>
+                <a:ea typeface="Arial" pitchFamily="34" charset="-122"/>
+                <a:cs typeface="Arial" pitchFamily="34" charset="-120"/>
+              </a:rPr>
+              <a:t> </a:t>
+            </a:r>
+            <a:r>
+              <a:rPr lang="en-US" sz="1300" dirty="0">
+                <a:solidFill>
+                  <a:srgbClr val="C9A96A"/>
+                </a:solidFill>
+                <a:latin typeface="Arial" pitchFamily="34" charset="0"/>
+                <a:ea typeface="Arial" pitchFamily="34" charset="-122"/>
+                <a:cs typeface="Arial" pitchFamily="34" charset="-120"/>
+              </a:rPr>
+              <a:t>בחרנו במודע לשמור נתונים בדפדפן</a:t>
+            </a:r>
+            <a:r>
+              <a:rPr lang="he-IL" sz="1300" dirty="0">
+                <a:solidFill>
+                  <a:srgbClr val="C9A96A"/>
+                </a:solidFill>
+                <a:latin typeface="Arial" pitchFamily="34" charset="0"/>
+                <a:ea typeface="Arial" pitchFamily="34" charset="-122"/>
+                <a:cs typeface="Arial" pitchFamily="34" charset="-120"/>
+              </a:rPr>
+              <a:t>.</a:t>
+            </a:r>
+            <a:r>
+              <a:rPr lang="en-US" sz="1300" dirty="0">
+                <a:solidFill>
+                  <a:srgbClr val="C9A96A"/>
+                </a:solidFill>
+                <a:latin typeface="Arial" pitchFamily="34" charset="0"/>
+                <a:ea typeface="Arial" pitchFamily="34" charset="-122"/>
+                <a:cs typeface="Arial" pitchFamily="34" charset="-120"/>
+              </a:rPr>
+              <a:t> מערכת אמיתית הנתונים יעברו </a:t>
+            </a:r>
+            <a:r>
+              <a:rPr lang="he-IL" sz="1300" dirty="0">
+                <a:solidFill>
+                  <a:srgbClr val="C9A96A"/>
+                </a:solidFill>
+                <a:latin typeface="Arial" pitchFamily="34" charset="0"/>
+                <a:ea typeface="Arial" pitchFamily="34" charset="-122"/>
+                <a:cs typeface="Arial" pitchFamily="34" charset="-120"/>
+              </a:rPr>
+              <a:t>ל- </a:t>
+            </a:r>
+            <a:r>
+              <a:rPr lang="en-US" sz="1300" dirty="0">
+                <a:solidFill>
+                  <a:srgbClr val="C9A96A"/>
+                </a:solidFill>
+                <a:latin typeface="Arial" pitchFamily="34" charset="0"/>
+                <a:ea typeface="Arial" pitchFamily="34" charset="-122"/>
+                <a:cs typeface="Arial" pitchFamily="34" charset="-120"/>
+              </a:rPr>
+              <a:t>Backend</a:t>
+            </a:r>
+            <a:r>
+              <a:rPr lang="he-IL" sz="1300" dirty="0">
+                <a:solidFill>
+                  <a:srgbClr val="C9A96A"/>
+                </a:solidFill>
+                <a:latin typeface="Arial" pitchFamily="34" charset="0"/>
+                <a:ea typeface="Arial" pitchFamily="34" charset="-122"/>
+                <a:cs typeface="Arial" pitchFamily="34" charset="-120"/>
+              </a:rPr>
+              <a:t> עם </a:t>
+            </a:r>
+            <a:r>
+              <a:rPr lang="en-US" sz="1300" dirty="0">
+                <a:solidFill>
+                  <a:srgbClr val="C9A96A"/>
+                </a:solidFill>
+                <a:latin typeface="Arial" pitchFamily="34" charset="0"/>
+                <a:ea typeface="Arial" pitchFamily="34" charset="-122"/>
+                <a:cs typeface="Arial" pitchFamily="34" charset="-120"/>
+              </a:rPr>
+              <a:t>Authentication</a:t>
+            </a:r>
+            <a:r>
+              <a:rPr lang="he-IL" sz="1300" dirty="0">
+                <a:solidFill>
+                  <a:srgbClr val="C9A96A"/>
+                </a:solidFill>
+                <a:latin typeface="Arial" pitchFamily="34" charset="0"/>
+                <a:ea typeface="Arial" pitchFamily="34" charset="-122"/>
+                <a:cs typeface="Arial" pitchFamily="34" charset="-120"/>
+              </a:rPr>
+              <a:t>, הרשאות והצפנה</a:t>
             </a:r>
             <a:endParaRPr lang="en-US" sz="1300" dirty="0"/>
           </a:p>

--- a/QueueLess_Presentation.pptx
+++ b/QueueLess_Presentation.pptx
@@ -5,15 +5,16 @@
     <p:sldMasterId id="2147483648" r:id="rId1"/>
   </p:sldMasterIdLst>
   <p:notesMasterIdLst>
-    <p:notesMasterId r:id="rId8"/>
+    <p:notesMasterId r:id="rId9"/>
   </p:notesMasterIdLst>
   <p:sldIdLst>
     <p:sldId id="256" r:id="rId2"/>
     <p:sldId id="257" r:id="rId3"/>
     <p:sldId id="258" r:id="rId4"/>
     <p:sldId id="259" r:id="rId5"/>
-    <p:sldId id="261" r:id="rId6"/>
-    <p:sldId id="260" r:id="rId7"/>
+    <p:sldId id="262" r:id="rId6"/>
+    <p:sldId id="261" r:id="rId7"/>
+    <p:sldId id="260" r:id="rId8"/>
   </p:sldIdLst>
   <p:sldSz cx="12192000" cy="6858000"/>
   <p:notesSz cx="6858000" cy="12192000"/>
@@ -118,6 +119,7 @@
             <p14:sldId id="257"/>
             <p14:sldId id="258"/>
             <p14:sldId id="259"/>
+            <p14:sldId id="262"/>
             <p14:sldId id="261"/>
             <p14:sldId id="260"/>
           </p14:sldIdLst>
@@ -681,7 +683,7 @@
     </p:spTree>
     <p:extLst>
       <p:ext uri="{BB962C8B-B14F-4D97-AF65-F5344CB8AC3E}">
-        <p14:creationId xmlns:p14="http://schemas.microsoft.com/office/powerpoint/2010/main" val="2306573308"/>
+        <p14:creationId xmlns:p14="http://schemas.microsoft.com/office/powerpoint/2010/main" val="1002174383"/>
       </p:ext>
     </p:extLst>
   </p:cSld>
@@ -737,7 +739,7 @@
           <a:p>
             <a:r>
               <a:rPr lang="en-US" dirty="0"/>
-              <a:t>פותחים DevTools ומראים את המפתחות בפועל. מסבירים למה localStorage מספיק לדמו ומה היה משתנה בפרודקשן.</a:t>
+              <a:t>עוברים מסלול לקוח ואז מסלול בעל עסק. מדגישים שה-Scope צומצם במודע כדי להציג מוצר יציב.</a:t>
             </a:r>
           </a:p>
         </p:txBody>
@@ -760,6 +762,93 @@
             <a:fld id="{F7021451-1387-4CA6-816F-3879F97B5CBC}" type="slidenum">
               <a:rPr lang="en-US"/>
               <a:t>6</a:t>
+            </a:fld>
+            <a:endParaRPr lang="en-US"/>
+          </a:p>
+        </p:txBody>
+      </p:sp>
+    </p:spTree>
+    <p:extLst>
+      <p:ext uri="{BB962C8B-B14F-4D97-AF65-F5344CB8AC3E}">
+        <p14:creationId xmlns:p14="http://schemas.microsoft.com/office/powerpoint/2010/main" val="2306573308"/>
+      </p:ext>
+    </p:extLst>
+  </p:cSld>
+  <p:clrMapOvr>
+    <a:masterClrMapping/>
+  </p:clrMapOvr>
+</p:notes>
+</file>
+
+<file path=ppt/notesSlides/notesSlide7.xml><?xml version="1.0" encoding="utf-8"?>
+<p:notes xmlns:a="http://schemas.openxmlformats.org/drawingml/2006/main" xmlns:r="http://schemas.openxmlformats.org/officeDocument/2006/relationships" xmlns:p="http://schemas.openxmlformats.org/presentationml/2006/main">
+  <p:cSld>
+    <p:spTree>
+      <p:nvGrpSpPr>
+        <p:cNvPr id="1" name=""/>
+        <p:cNvGrpSpPr/>
+        <p:nvPr/>
+      </p:nvGrpSpPr>
+      <p:grpSpPr>
+        <a:xfrm>
+          <a:off x="0" y="0"/>
+          <a:ext cx="0" cy="0"/>
+          <a:chOff x="0" y="0"/>
+          <a:chExt cx="0" cy="0"/>
+        </a:xfrm>
+      </p:grpSpPr>
+      <p:sp>
+        <p:nvSpPr>
+          <p:cNvPr id="2" name="Slide Image Placeholder 1"/>
+          <p:cNvSpPr>
+            <a:spLocks noGrp="1" noRot="1" noChangeAspect="1"/>
+          </p:cNvSpPr>
+          <p:nvPr>
+            <p:ph type="sldImg"/>
+          </p:nvPr>
+        </p:nvSpPr>
+        <p:spPr/>
+      </p:sp>
+      <p:sp>
+        <p:nvSpPr>
+          <p:cNvPr id="3" name="Notes Placeholder 2"/>
+          <p:cNvSpPr>
+            <a:spLocks noGrp="1"/>
+          </p:cNvSpPr>
+          <p:nvPr>
+            <p:ph type="body" idx="1"/>
+          </p:nvPr>
+        </p:nvSpPr>
+        <p:spPr/>
+        <p:txBody>
+          <a:bodyPr/>
+          <a:lstStyle/>
+          <a:p>
+            <a:r>
+              <a:rPr lang="en-US" dirty="0"/>
+              <a:t>פותחים DevTools ומראים את המפתחות בפועל. מסבירים למה localStorage מספיק לדמו ומה היה משתנה בפרודקשן.</a:t>
+            </a:r>
+          </a:p>
+        </p:txBody>
+      </p:sp>
+      <p:sp>
+        <p:nvSpPr>
+          <p:cNvPr id="4" name="Slide Number Placeholder 3"/>
+          <p:cNvSpPr>
+            <a:spLocks noGrp="1"/>
+          </p:cNvSpPr>
+          <p:nvPr>
+            <p:ph type="sldNum" sz="quarter" idx="10"/>
+          </p:nvPr>
+        </p:nvSpPr>
+        <p:spPr/>
+        <p:txBody>
+          <a:bodyPr/>
+          <a:lstStyle/>
+          <a:p>
+            <a:fld id="{F7021451-1387-4CA6-816F-3879F97B5CBC}" type="slidenum">
+              <a:rPr lang="en-US"/>
+              <a:t>7</a:t>
             </a:fld>
             <a:endParaRPr lang="en-US"/>
           </a:p>
@@ -1553,7 +1642,16 @@
                 </a:solidFill>
                 <a:cs typeface="Arial" pitchFamily="34" charset="-120"/>
               </a:rPr>
-              <a:t>ת.ז - 111111111</a:t>
+              <a:t>ת.ז - </a:t>
+            </a:r>
+            <a:r>
+              <a:rPr lang="en-US" sz="1150" dirty="0">
+                <a:solidFill>
+                  <a:srgbClr val="9BA3AE"/>
+                </a:solidFill>
+                <a:cs typeface="Arial" pitchFamily="34" charset="-120"/>
+              </a:rPr>
+              <a:t>318993516</a:t>
             </a:r>
             <a:endParaRPr lang="en-US" sz="1150" dirty="0"/>
           </a:p>
@@ -1688,7 +1786,7 @@
                 </a:solidFill>
                 <a:cs typeface="Arial" pitchFamily="34" charset="-120"/>
               </a:rPr>
-              <a:t>ת.ז - 111111111</a:t>
+              <a:t>ת.ז - 324926666</a:t>
             </a:r>
             <a:endParaRPr lang="en-US" sz="1150" dirty="0"/>
           </a:p>
@@ -1823,7 +1921,7 @@
                 </a:solidFill>
                 <a:cs typeface="Arial" pitchFamily="34" charset="-120"/>
               </a:rPr>
-              <a:t>ת.ז - 111111111</a:t>
+              <a:t>ת.ז - 207796558</a:t>
             </a:r>
             <a:endParaRPr lang="en-US" sz="1150" dirty="0"/>
           </a:p>
@@ -1837,7 +1935,7 @@
         </p:nvSpPr>
         <p:spPr>
           <a:xfrm>
-            <a:off x="4709160" y="5129784"/>
+            <a:off x="4709160" y="5102352"/>
             <a:ext cx="6949440" cy="621792"/>
           </a:xfrm>
           <a:prstGeom prst="roundRect">
@@ -1958,7 +2056,7 @@
                 </a:solidFill>
                 <a:cs typeface="Arial" pitchFamily="34" charset="-120"/>
               </a:rPr>
-              <a:t>ת.ז - 111111111</a:t>
+              <a:t>ת.ז - 211895313</a:t>
             </a:r>
             <a:endParaRPr lang="en-US" sz="1150" dirty="0"/>
           </a:p>
@@ -2015,19 +2113,10 @@
                 <a:solidFill>
                   <a:srgbClr val="C9A96A"/>
                 </a:solidFill>
-                <a:cs typeface="Arial" pitchFamily="34" charset="-120"/>
-              </a:rPr>
-              <a:t>Link: </a:t>
-            </a:r>
-            <a:r>
-              <a:rPr lang="en-US" sz="1300" dirty="0">
-                <a:solidFill>
-                  <a:srgbClr val="C9A96A"/>
-                </a:solidFill>
-                <a:ea typeface="Arial" pitchFamily="34" charset="-122"/>
-                <a:cs typeface="Arial" pitchFamily="34" charset="-120"/>
-              </a:rPr>
-              <a:t>https://queue-less-rho.vercel.app/QueueLess_v5.html</a:t>
+                <a:ea typeface="Arial" pitchFamily="34" charset="-122"/>
+                <a:cs typeface="Arial" pitchFamily="34" charset="-120"/>
+              </a:rPr>
+              <a:t>https://queue-less-rho.vercel.app/QueueLess.html</a:t>
             </a:r>
             <a:endParaRPr lang="en-US" sz="1300" dirty="0"/>
           </a:p>
@@ -6832,6 +6921,74 @@
           <a:chExt cx="0" cy="0"/>
         </a:xfrm>
       </p:grpSpPr>
+      <p:pic>
+        <p:nvPicPr>
+          <p:cNvPr id="4" name="Picture 3">
+            <a:extLst>
+              <a:ext uri="{FF2B5EF4-FFF2-40B4-BE49-F238E27FC236}">
+                <a16:creationId xmlns:a16="http://schemas.microsoft.com/office/drawing/2014/main" id="{07464B04-99DA-EDD7-9F96-76745E7A6543}"/>
+              </a:ext>
+            </a:extLst>
+          </p:cNvPr>
+          <p:cNvPicPr>
+            <a:picLocks noChangeAspect="1"/>
+          </p:cNvPicPr>
+          <p:nvPr/>
+        </p:nvPicPr>
+        <p:blipFill>
+          <a:blip r:embed="rId3"/>
+          <a:stretch>
+            <a:fillRect/>
+          </a:stretch>
+        </p:blipFill>
+        <p:spPr>
+          <a:xfrm>
+            <a:off x="0" y="0"/>
+            <a:ext cx="12192000" cy="6858000"/>
+          </a:xfrm>
+          <a:prstGeom prst="rect">
+            <a:avLst/>
+          </a:prstGeom>
+        </p:spPr>
+      </p:pic>
+    </p:spTree>
+    <p:extLst>
+      <p:ext uri="{BB962C8B-B14F-4D97-AF65-F5344CB8AC3E}">
+        <p14:creationId xmlns:p14="http://schemas.microsoft.com/office/powerpoint/2010/main" val="382418192"/>
+      </p:ext>
+    </p:extLst>
+  </p:cSld>
+  <p:clrMapOvr>
+    <a:masterClrMapping/>
+  </p:clrMapOvr>
+</p:sld>
+</file>
+
+<file path=ppt/slides/slide6.xml><?xml version="1.0" encoding="utf-8"?>
+<p:sld xmlns:a="http://schemas.openxmlformats.org/drawingml/2006/main" xmlns:r="http://schemas.openxmlformats.org/officeDocument/2006/relationships" xmlns:p="http://schemas.openxmlformats.org/presentationml/2006/main">
+  <p:cSld>
+    <p:bg>
+      <p:bgPr>
+        <a:solidFill>
+          <a:srgbClr val="F5F1EA"/>
+        </a:solidFill>
+        <a:effectLst/>
+      </p:bgPr>
+    </p:bg>
+    <p:spTree>
+      <p:nvGrpSpPr>
+        <p:cNvPr id="1" name=""/>
+        <p:cNvGrpSpPr/>
+        <p:nvPr/>
+      </p:nvGrpSpPr>
+      <p:grpSpPr>
+        <a:xfrm>
+          <a:off x="0" y="0"/>
+          <a:ext cx="0" cy="0"/>
+          <a:chOff x="0" y="0"/>
+          <a:chExt cx="0" cy="0"/>
+        </a:xfrm>
+      </p:grpSpPr>
       <p:sp>
         <p:nvSpPr>
           <p:cNvPr id="63" name="Text 0">
@@ -8498,7 +8655,7 @@
 </p:sld>
 </file>
 
-<file path=ppt/slides/slide6.xml><?xml version="1.0" encoding="utf-8"?>
+<file path=ppt/slides/slide7.xml><?xml version="1.0" encoding="utf-8"?>
 <p:sld xmlns:a="http://schemas.openxmlformats.org/drawingml/2006/main" xmlns:r="http://schemas.openxmlformats.org/officeDocument/2006/relationships" xmlns:p="http://schemas.openxmlformats.org/presentationml/2006/main">
   <p:cSld name="Slide 5">
     <p:bg>
